--- a/docs/Progress_Presentation_1.pptx
+++ b/docs/Progress_Presentation_1.pptx
@@ -13,9 +13,10 @@
     <p:sldId id="261" r:id="rId7"/>
     <p:sldId id="262" r:id="rId8"/>
     <p:sldId id="263" r:id="rId9"/>
+    <p:sldId id="264" r:id="rId10"/>
   </p:sldIdLst>
   <p:notesMasterIdLst>
-    <p:notesMasterId r:id="rId10"/>
+    <p:notesMasterId r:id="rId11"/>
   </p:notesMasterIdLst>
   <p:sldSz cx="9144000" cy="5143500"/>
   <p:notesSz cx="5143500" cy="9144000"/>
@@ -509,7 +510,7 @@
           <a:p>
             <a:r>
               <a:rPr lang="en-US" dirty="0"/>
-              <a:t>[0:00-0:20] Assalam-o-Alaikum. I am Khizar Rizwan, and my project is Problem 4: a commercial bank modelled with classes and inheritance. In five minutes I will show where the project stands, the research behind the design, the class and inheritance diagrams, one workflow and one lifecycle, and what I will do next.</a:t>
+              <a:t>[0:00-0:20] Assalam-o-Alaikum. Mera naam Khizar Rizwan hai, roll number 25L-5668. Mera project Problem 4 hai: ek commercial bank ka object-oriented model, jis mein customers, loans, payments, cards aur compliance sab shamil hain. Agle paanch minute mein main aap ko apni research, design, ab tak ki progress aur agle steps dikhaunga.</a:t>
             </a:r>
             <a:endParaRPr lang="en-US" dirty="0"/>
           </a:p>
@@ -597,7 +598,7 @@
           <a:p>
             <a:r>
               <a:rPr lang="en-US" dirty="0"/>
-              <a:t>[0:20-1:05] Here is my progress. I planned seven phases. The first five are complete: research, assumptions, the class design, the core implementation with tests, and a seeded demonstration with a desktop interface. The numbers underneath are measured from the code: 71 business classes, 98 operations, four multi-level inheritance hierarchies, 16 scenarios where the normal workflow breaks, and 73 automated tests that all pass. The brief asks for at least 30 classes and 30 operations, so the minimum is covered. I am now in phase six, refining the design with your feedback, and phase seven is the final report and viva.</a:t>
+              <a:t>[0:20-0:55] Main ne project ko chhe phases mein plan kiya. Pehle teen phases mukammal hain: domain research, assumptions aur requirements, aur class aur inheritance design. Chautha phase, yani Python implementation, is waqt jaari hai, aur us ke saath Tkinter GUI par bhi kaam chal raha hai. Aakhri phase final report aur viva hai. Neeche diye gaye numbers meri research aur design ke hain: aath sources, sattaees banking terms, chhattees documented assumptions, aur ikhattar classes ka design, jin mein chaar multi-level hierarchies hain.</a:t>
             </a:r>
             <a:endParaRPr lang="en-US" dirty="0"/>
           </a:p>
@@ -685,7 +686,7 @@
           <a:p>
             <a:r>
               <a:rPr lang="en-US" dirty="0"/>
-              <a:t>[1:05-1:50] Before designing I researched how banks actually work, and three findings changed my design. First, know-your-customer rules treat customer, director, owner and signatory as roles of one person. So I have one Person class, and the roles are separate dated objects, not subclasses. Second, banks never erase a wrong payment; they post a new entry that counteracts it. So a Reversal, and a card Chargeback, are new transactions linked to the original. Third, a bank product can stop being sold while existing customers keep it on their old terms. So I separated the product definition from the customer's own arrangement.</a:t>
+              <a:t>[0:55-1:40] Brief kehta hai ke model banane se pehle industry ko samjho. Is liye main ne aath sources study kiye. FATF Recommendations aur State Bank of Pakistan ki AML regulations se customer due diligence aur beneficial ownership samjha. Basel Committee se risk management. ISO 20022 se payment ka lifecycle, ke payment sirf "hui" ya "nahi hui" nahi hoti, balkay pending, held, posted aur failed jaise statuses se guzarti hai. Visa aur Mastercard ke dispute rules se reversal, refund aur chargeback ka farq. IFRS 9 se loan restructuring, BIAN se product aur customer agreement ka farq, aur Martin Fowler ki Analysis Patterns se roles aur time-dated records.</a:t>
             </a:r>
             <a:endParaRPr lang="en-US" dirty="0"/>
           </a:p>
@@ -773,7 +774,7 @@
           <a:p>
             <a:r>
               <a:rPr lang="en-US" dirty="0"/>
-              <a:t>[1:50-2:30] This is the class diagram. It is generated from the code itself, so it always matches the program. There are four hierarchies: parties, arrangements, transactions and cases. Everything else, like cards, mandates, branches and employees, is a standalone class connected by association, because those things are related to each other but are not kinds of each other. That distinction was my main rule: inheritance only for an is-a relationship where the parent's data genuinely belongs to every child.</a:t>
+              <a:t>[1:40-2:20] Is research ne mera design badal diya. Pehle mera khayal tha ke Customer, Person ki subclass hogi. Lekin KYC rules batate hain ke customer, director, owner aur signatory ek hi insaan ke roles hain. Is liye ek Person class hai, aur roles alag, dated objects hain. Doosra: bank kabhi galat payment ko mitata nahi, balkay nayi entry post karta hai. Is liye Reversal aur Chargeback nayi transactions hain. Teesra: product band ho jaye to purane customers apni purani terms par rehte hain, is liye ProductDefinition aur customer ka Arrangement alag classes hain.</a:t>
             </a:r>
             <a:endParaRPr lang="en-US" dirty="0"/>
           </a:p>
@@ -861,7 +862,7 @@
           <a:p>
             <a:r>
               <a:rPr lang="en-US" dirty="0"/>
-              <a:t>[2:30-3:15] Here are two of the multi-level hierarchies as UML. Party, then Organization, then Company and Charity: an organization adds registration and officers, and each subclass adds its own rule, for example a charity needs two trustees. Arrangement, then DepositAccount, then current, savings and term deposit: every deposit account has a ledger and balance, and each subclass changes only one behaviour. On the right are tempting inheritances I rejected. A customer is a role with a start and an end, not a kind of person. A card holds no money, so it is not an account. A sole trader is legally the person. And a merchant refund is not a reversal, because the original purchase stays valid.</a:t>
+              <a:t>[2:20-2:50] Yeh research ke baad ka class diagram hai. Is mein chaar hierarchies hain: Party, Arrangement, BankTransaction aur Case. Baqi cheezen, jaise cards, mandates, branches aur employees, association se jurri hain, kyunke woh ek doosre se related hain magar ek doosre ki qism nahi. Mera usool yeh tha: inheritance sirf wahan jahan sach mein "is-a" rishta ho.</a:t>
             </a:r>
             <a:endParaRPr lang="en-US" dirty="0"/>
           </a:p>
@@ -949,7 +950,7 @@
           <a:p>
             <a:r>
               <a:rPr lang="en-US" dirty="0"/>
-              <a:t>[3:15-3:50] This flowchart shows one complete workflow, a large transfer from the company account through digital banking, exactly the case in the brief. The code checks the rules in this order: authority, then funds and limits, then dual control, where a second signatory must approve, then the compliance hold for review. If any rule fails, the payment is not thrown away; it is kept as a failed transaction with the reason, so the history is complete.</a:t>
+              <a:t>[2:50-3:25] Yeh do multi-level hierarchies UML mein hain. Party se Organization, aur Organization se Company aur Charity. Aur Arrangement se DepositAccount, phir Current, Savings aur Term Deposit. Shared data hamesha us sab se oonche level par hai jahan har subclass ko us ki zaroorat hai. Daayen taraf woh inheritance hai jo main ne soch kar reject ki: card account nahi kyunke us mein paisa nahi hota, sole trader alag legal entity nahi, aur merchant refund reversal nahi kyunke asal purchase valid rehti hai.</a:t>
             </a:r>
             <a:endParaRPr lang="en-US" dirty="0"/>
           </a:p>
@@ -1037,7 +1038,7 @@
           <a:p>
             <a:r>
               <a:rPr lang="en-US" dirty="0"/>
-              <a:t>[3:50-4:30] Records also change over time, so each class declares its lifecycle. This UML state machine for a card is drawn from that declaration, and the same declaration is enforced in the code. It covers the brief's critical case: a card is reported stolen and blocked, replaced with a different limit, and when the old card is found it is destroyed, never re-activated. Every old payment still names the exact card that was used, and an illegal move, like destroyed back to active, is refused.</a:t>
+              <a:t>[3:25-3:55] Yeh flowchart ek poora workflow dikhata hai: digital banking se ek bara transfer, jo brief ka apna case hai. Pehle authority check hoti hai, phir funds aur limit, phir dual control jahan doosre signatory ki approval chahiye, aur phir compliance review. Agar koi rule fail ho to payment mitti nahi, balkay wajah ke saath record mein rehti hai.</a:t>
             </a:r>
             <a:endParaRPr lang="en-US" dirty="0"/>
           </a:p>
@@ -1125,7 +1126,7 @@
           <a:p>
             <a:r>
               <a:rPr lang="en-US" dirty="0"/>
-              <a:t>[4:30-5:00] To finish, my next steps. Now, I will refine the model with your feedback from today. Next, I will add saving and loading the bank's records with files and JSON, which we cover in the course, and review the design against SOLID and the design patterns we will study. Finally, I will complete the report and prepare for the viva. Thank you, I am happy to take questions.</a:t>
+              <a:t>[3:55-4:35] Ab implementation ki progress. Core model Python mein ban raha hai: parties, accounts, transactions aur double-entry ledger ka kaam ho chuka hai, aur har rule ke saath test likh raha hoon. Is waqt main cards aur lending ke workflows aur brief ke exception scenarios par kaam kar raha hoon. Saath hi Tkinter mein GUI ka prototype ban raha hai, yeh us ki screen hai, jahan staff aur customer dono apne role ke hisaab se kaam kar sakenge.</a:t>
             </a:r>
             <a:endParaRPr lang="en-US" dirty="0"/>
           </a:p>
@@ -1149,6 +1150,94 @@
             <a:fld id="{F7021451-1387-4CA6-816F-3879F97B5CBC}" type="slidenum">
               <a:rPr lang="en-US"/>
               <a:t>8</a:t>
+            </a:fld>
+            <a:endParaRPr lang="en-US"/>
+          </a:p>
+        </p:txBody>
+      </p:sp>
+    </p:spTree>
+    <p:extLst>
+      <p:ext uri="{BB962C8B-B14F-4D97-AF65-F5344CB8AC3E}">
+        <p14:creationId xmlns:p14="http://schemas.microsoft.com/office/powerpoint/2010/main" val="1024086991"/>
+      </p:ext>
+    </p:extLst>
+  </p:cSld>
+  <p:clrMapOvr>
+    <a:masterClrMapping/>
+  </p:clrMapOvr>
+</p:notes>
+</file>
+
+<file path=ppt/notesSlides/notesSlide9.xml><?xml version="1.0" encoding="utf-8"?>
+<p:notes xmlns:a="http://schemas.openxmlformats.org/drawingml/2006/main" xmlns:r="http://schemas.openxmlformats.org/officeDocument/2006/relationships" xmlns:p="http://schemas.openxmlformats.org/presentationml/2006/main">
+  <p:cSld>
+    <p:spTree>
+      <p:nvGrpSpPr>
+        <p:cNvPr id="1" name=""/>
+        <p:cNvGrpSpPr/>
+        <p:nvPr/>
+      </p:nvGrpSpPr>
+      <p:grpSpPr>
+        <a:xfrm>
+          <a:off x="0" y="0"/>
+          <a:ext cx="0" cy="0"/>
+          <a:chOff x="0" y="0"/>
+          <a:chExt cx="0" cy="0"/>
+        </a:xfrm>
+      </p:grpSpPr>
+      <p:sp>
+        <p:nvSpPr>
+          <p:cNvPr id="2" name="Slide Image Placeholder 1"/>
+          <p:cNvSpPr>
+            <a:spLocks noGrp="1" noRot="1" noChangeAspect="1"/>
+          </p:cNvSpPr>
+          <p:nvPr>
+            <p:ph type="sldImg"/>
+          </p:nvPr>
+        </p:nvSpPr>
+        <p:spPr/>
+      </p:sp>
+      <p:sp>
+        <p:nvSpPr>
+          <p:cNvPr id="3" name="Notes Placeholder 2"/>
+          <p:cNvSpPr>
+            <a:spLocks noGrp="1"/>
+          </p:cNvSpPr>
+          <p:nvPr>
+            <p:ph type="body" idx="1"/>
+          </p:nvPr>
+        </p:nvSpPr>
+        <p:spPr/>
+        <p:txBody>
+          <a:bodyPr/>
+          <a:lstStyle/>
+          <a:p>
+            <a:r>
+              <a:rPr lang="en-US" dirty="0"/>
+              <a:t>[4:35-5:00] Agle steps: implementation aur GUI mukammal karna, brief ke har critical case ko automated tests se check karna, files aur JSON se data save karna, aur SOLID principles ke mutabiq design review karna. Aakhir mein final report aur viva. Shukriya, main sawalat ke liye hazir hoon.</a:t>
+            </a:r>
+            <a:endParaRPr lang="en-US" dirty="0"/>
+          </a:p>
+        </p:txBody>
+      </p:sp>
+      <p:sp>
+        <p:nvSpPr>
+          <p:cNvPr id="4" name="Slide Number Placeholder 3"/>
+          <p:cNvSpPr>
+            <a:spLocks noGrp="1"/>
+          </p:cNvSpPr>
+          <p:nvPr>
+            <p:ph type="sldNum" sz="quarter" idx="10"/>
+          </p:nvPr>
+        </p:nvSpPr>
+        <p:spPr/>
+        <p:txBody>
+          <a:bodyPr/>
+          <a:lstStyle/>
+          <a:p>
+            <a:fld id="{F7021451-1387-4CA6-816F-3879F97B5CBC}" type="slidenum">
+              <a:rPr lang="en-US"/>
+              <a:t>9</a:t>
             </a:fld>
             <a:endParaRPr lang="en-US"/>
           </a:p>
@@ -1623,8 +1712,8 @@
         </p:nvSpPr>
         <p:spPr>
           <a:xfrm>
-            <a:off x="548640" y="3291840"/>
-            <a:ext cx="8046720" cy="1097280"/>
+            <a:off x="548640" y="3383280"/>
+            <a:ext cx="8046720" cy="822960"/>
           </a:xfrm>
           <a:prstGeom prst="rect">
             <a:avLst/>
@@ -1648,24 +1737,7 @@
                 <a:ea typeface="Calibri" pitchFamily="34" charset="-122"/>
                 <a:cs typeface="Calibri" pitchFamily="34" charset="-120"/>
               </a:rPr>
-              <a:t>Khizar Rizwan</a:t>
-            </a:r>
-            <a:endParaRPr lang="en-US" sz="1300" dirty="0"/>
-          </a:p>
-          <a:p>
-            <a:pPr indent="0" marL="0">
-              <a:buNone/>
-            </a:pPr>
-            <a:r>
-              <a:rPr lang="en-US" sz="1300" dirty="0">
-                <a:solidFill>
-                  <a:srgbClr val="FFFFFF"/>
-                </a:solidFill>
-                <a:latin typeface="Calibri" pitchFamily="34" charset="0"/>
-                <a:ea typeface="Calibri" pitchFamily="34" charset="-122"/>
-                <a:cs typeface="Calibri" pitchFamily="34" charset="-120"/>
-              </a:rPr>
-              <a:t>Roll number: ________________</a:t>
+              <a:t>Khizar Rizwan  •  25L-5668</a:t>
             </a:r>
             <a:endParaRPr lang="en-US" sz="1300" dirty="0"/>
           </a:p>
@@ -1792,7 +1864,7 @@
                 <a:ea typeface="Calibri" pitchFamily="34" charset="-122"/>
                 <a:cs typeface="Calibri" pitchFamily="34" charset="-120"/>
               </a:rPr>
-              <a:t>Seven phases, planned from the course outline; five done, two ahead</a:t>
+              <a:t>Six planned phases: research and design complete, implementation and GUI under way</a:t>
             </a:r>
             <a:endParaRPr lang="en-US" sz="1200" dirty="0"/>
           </a:p>
@@ -1901,8 +1973,8 @@
         </p:nvSpPr>
         <p:spPr>
           <a:xfrm>
-            <a:off x="685800" y="1737360"/>
-            <a:ext cx="6967728" cy="0"/>
+            <a:off x="868680" y="1737360"/>
+            <a:ext cx="7406640" cy="0"/>
           </a:xfrm>
           <a:prstGeom prst="line">
             <a:avLst/>
@@ -1924,7 +1996,7 @@
         </p:nvSpPr>
         <p:spPr>
           <a:xfrm>
-            <a:off x="502920" y="1554480"/>
+            <a:off x="685800" y="1554480"/>
             <a:ext cx="365760" cy="365760"/>
           </a:xfrm>
           <a:prstGeom prst="ellipse">
@@ -1949,7 +2021,7 @@
         </p:nvSpPr>
         <p:spPr>
           <a:xfrm>
-            <a:off x="502920" y="1554480"/>
+            <a:off x="685800" y="1554480"/>
             <a:ext cx="365760" cy="365760"/>
           </a:xfrm>
           <a:prstGeom prst="rect">
@@ -1988,8 +2060,8 @@
         </p:nvSpPr>
         <p:spPr>
           <a:xfrm>
-            <a:off x="137160" y="2011680"/>
-            <a:ext cx="1097280" cy="502920"/>
+            <a:off x="182880" y="2011680"/>
+            <a:ext cx="1371600" cy="502920"/>
           </a:xfrm>
           <a:prstGeom prst="rect">
             <a:avLst/>
@@ -2005,7 +2077,7 @@
               <a:buNone/>
             </a:pPr>
             <a:r>
-              <a:rPr lang="en-US" sz="1050" b="1" dirty="0">
+              <a:rPr lang="en-US" sz="1100" b="1" dirty="0">
                 <a:solidFill>
                   <a:srgbClr val="1D2B2A"/>
                 </a:solidFill>
@@ -2015,46 +2087,46 @@
               </a:rPr>
               <a:t>Domain research</a:t>
             </a:r>
+            <a:endParaRPr lang="en-US" sz="1100" dirty="0"/>
+          </a:p>
+        </p:txBody>
+      </p:sp>
+      <p:sp>
+        <p:nvSpPr>
+          <p:cNvPr id="9" name="Text 7"/>
+          <p:cNvSpPr txBox="1"/>
+          <p:nvPr/>
+        </p:nvSpPr>
+        <p:spPr>
+          <a:xfrm>
+            <a:off x="182880" y="2514600"/>
+            <a:ext cx="1371600" cy="228600"/>
+          </a:xfrm>
+          <a:prstGeom prst="rect">
+            <a:avLst/>
+          </a:prstGeom>
+          <a:noFill/>
+          <a:ln/>
+        </p:spPr>
+        <p:txBody>
+          <a:bodyPr wrap="square" lIns="0" tIns="0" rIns="0" bIns="0" rtlCol="0" anchor="ctr"/>
+          <a:lstStyle/>
+          <a:p>
+            <a:pPr algn="ctr" indent="0" marL="0">
+              <a:buNone/>
+            </a:pPr>
+            <a:r>
+              <a:rPr lang="en-US" sz="1050" dirty="0">
+                <a:solidFill>
+                  <a:srgbClr val="2E7D4F"/>
+                </a:solidFill>
+                <a:latin typeface="Calibri" pitchFamily="34" charset="0"/>
+                <a:ea typeface="Calibri" pitchFamily="34" charset="-122"/>
+                <a:cs typeface="Calibri" pitchFamily="34" charset="-120"/>
+              </a:rPr>
+              <a:t>Done</a:t>
+            </a:r>
             <a:endParaRPr lang="en-US" sz="1050" dirty="0"/>
-          </a:p>
-        </p:txBody>
-      </p:sp>
-      <p:sp>
-        <p:nvSpPr>
-          <p:cNvPr id="9" name="Text 7"/>
-          <p:cNvSpPr txBox="1"/>
-          <p:nvPr/>
-        </p:nvSpPr>
-        <p:spPr>
-          <a:xfrm>
-            <a:off x="137160" y="2514600"/>
-            <a:ext cx="1097280" cy="228600"/>
-          </a:xfrm>
-          <a:prstGeom prst="rect">
-            <a:avLst/>
-          </a:prstGeom>
-          <a:noFill/>
-          <a:ln/>
-        </p:spPr>
-        <p:txBody>
-          <a:bodyPr wrap="square" lIns="0" tIns="0" rIns="0" bIns="0" rtlCol="0" anchor="ctr"/>
-          <a:lstStyle/>
-          <a:p>
-            <a:pPr algn="ctr" indent="0" marL="0">
-              <a:buNone/>
-            </a:pPr>
-            <a:r>
-              <a:rPr lang="en-US" sz="1000" dirty="0">
-                <a:solidFill>
-                  <a:srgbClr val="2E7D4F"/>
-                </a:solidFill>
-                <a:latin typeface="Calibri" pitchFamily="34" charset="0"/>
-                <a:ea typeface="Calibri" pitchFamily="34" charset="-122"/>
-                <a:cs typeface="Calibri" pitchFamily="34" charset="-120"/>
-              </a:rPr>
-              <a:t>Done</a:t>
-            </a:r>
-            <a:endParaRPr lang="en-US" sz="1000" dirty="0"/>
           </a:p>
         </p:txBody>
       </p:sp>
@@ -2066,7 +2138,7 @@
         </p:nvSpPr>
         <p:spPr>
           <a:xfrm>
-            <a:off x="1664208" y="1554480"/>
+            <a:off x="2167128" y="1554480"/>
             <a:ext cx="365760" cy="365760"/>
           </a:xfrm>
           <a:prstGeom prst="ellipse">
@@ -2091,7 +2163,7 @@
         </p:nvSpPr>
         <p:spPr>
           <a:xfrm>
-            <a:off x="1664208" y="1554480"/>
+            <a:off x="2167128" y="1554480"/>
             <a:ext cx="365760" cy="365760"/>
           </a:xfrm>
           <a:prstGeom prst="rect">
@@ -2130,8 +2202,8 @@
         </p:nvSpPr>
         <p:spPr>
           <a:xfrm>
-            <a:off x="1298448" y="2011680"/>
-            <a:ext cx="1097280" cy="502920"/>
+            <a:off x="1664208" y="2011680"/>
+            <a:ext cx="1371600" cy="502920"/>
           </a:xfrm>
           <a:prstGeom prst="rect">
             <a:avLst/>
@@ -2147,7 +2219,7 @@
               <a:buNone/>
             </a:pPr>
             <a:r>
-              <a:rPr lang="en-US" sz="1050" b="1" dirty="0">
+              <a:rPr lang="en-US" sz="1100" b="1" dirty="0">
                 <a:solidFill>
                   <a:srgbClr val="1D2B2A"/>
                 </a:solidFill>
@@ -2157,46 +2229,46 @@
               </a:rPr>
               <a:t>Assumptions &amp; requirements</a:t>
             </a:r>
+            <a:endParaRPr lang="en-US" sz="1100" dirty="0"/>
+          </a:p>
+        </p:txBody>
+      </p:sp>
+      <p:sp>
+        <p:nvSpPr>
+          <p:cNvPr id="13" name="Text 11"/>
+          <p:cNvSpPr txBox="1"/>
+          <p:nvPr/>
+        </p:nvSpPr>
+        <p:spPr>
+          <a:xfrm>
+            <a:off x="1664208" y="2514600"/>
+            <a:ext cx="1371600" cy="228600"/>
+          </a:xfrm>
+          <a:prstGeom prst="rect">
+            <a:avLst/>
+          </a:prstGeom>
+          <a:noFill/>
+          <a:ln/>
+        </p:spPr>
+        <p:txBody>
+          <a:bodyPr wrap="square" lIns="0" tIns="0" rIns="0" bIns="0" rtlCol="0" anchor="ctr"/>
+          <a:lstStyle/>
+          <a:p>
+            <a:pPr algn="ctr" indent="0" marL="0">
+              <a:buNone/>
+            </a:pPr>
+            <a:r>
+              <a:rPr lang="en-US" sz="1050" dirty="0">
+                <a:solidFill>
+                  <a:srgbClr val="2E7D4F"/>
+                </a:solidFill>
+                <a:latin typeface="Calibri" pitchFamily="34" charset="0"/>
+                <a:ea typeface="Calibri" pitchFamily="34" charset="-122"/>
+                <a:cs typeface="Calibri" pitchFamily="34" charset="-120"/>
+              </a:rPr>
+              <a:t>Done</a:t>
+            </a:r>
             <a:endParaRPr lang="en-US" sz="1050" dirty="0"/>
-          </a:p>
-        </p:txBody>
-      </p:sp>
-      <p:sp>
-        <p:nvSpPr>
-          <p:cNvPr id="13" name="Text 11"/>
-          <p:cNvSpPr txBox="1"/>
-          <p:nvPr/>
-        </p:nvSpPr>
-        <p:spPr>
-          <a:xfrm>
-            <a:off x="1298448" y="2514600"/>
-            <a:ext cx="1097280" cy="228600"/>
-          </a:xfrm>
-          <a:prstGeom prst="rect">
-            <a:avLst/>
-          </a:prstGeom>
-          <a:noFill/>
-          <a:ln/>
-        </p:spPr>
-        <p:txBody>
-          <a:bodyPr wrap="square" lIns="0" tIns="0" rIns="0" bIns="0" rtlCol="0" anchor="ctr"/>
-          <a:lstStyle/>
-          <a:p>
-            <a:pPr algn="ctr" indent="0" marL="0">
-              <a:buNone/>
-            </a:pPr>
-            <a:r>
-              <a:rPr lang="en-US" sz="1000" dirty="0">
-                <a:solidFill>
-                  <a:srgbClr val="2E7D4F"/>
-                </a:solidFill>
-                <a:latin typeface="Calibri" pitchFamily="34" charset="0"/>
-                <a:ea typeface="Calibri" pitchFamily="34" charset="-122"/>
-                <a:cs typeface="Calibri" pitchFamily="34" charset="-120"/>
-              </a:rPr>
-              <a:t>Done</a:t>
-            </a:r>
-            <a:endParaRPr lang="en-US" sz="1000" dirty="0"/>
           </a:p>
         </p:txBody>
       </p:sp>
@@ -2208,7 +2280,7 @@
         </p:nvSpPr>
         <p:spPr>
           <a:xfrm>
-            <a:off x="2825496" y="1554480"/>
+            <a:off x="3648456" y="1554480"/>
             <a:ext cx="365760" cy="365760"/>
           </a:xfrm>
           <a:prstGeom prst="ellipse">
@@ -2233,7 +2305,7 @@
         </p:nvSpPr>
         <p:spPr>
           <a:xfrm>
-            <a:off x="2825496" y="1554480"/>
+            <a:off x="3648456" y="1554480"/>
             <a:ext cx="365760" cy="365760"/>
           </a:xfrm>
           <a:prstGeom prst="rect">
@@ -2272,8 +2344,8 @@
         </p:nvSpPr>
         <p:spPr>
           <a:xfrm>
-            <a:off x="2459736" y="2011680"/>
-            <a:ext cx="1097280" cy="502920"/>
+            <a:off x="3145536" y="2011680"/>
+            <a:ext cx="1371600" cy="502920"/>
           </a:xfrm>
           <a:prstGeom prst="rect">
             <a:avLst/>
@@ -2289,7 +2361,7 @@
               <a:buNone/>
             </a:pPr>
             <a:r>
-              <a:rPr lang="en-US" sz="1050" b="1" dirty="0">
+              <a:rPr lang="en-US" sz="1100" b="1" dirty="0">
                 <a:solidFill>
                   <a:srgbClr val="1D2B2A"/>
                 </a:solidFill>
@@ -2299,46 +2371,46 @@
               </a:rPr>
               <a:t>Class &amp; inheritance design</a:t>
             </a:r>
+            <a:endParaRPr lang="en-US" sz="1100" dirty="0"/>
+          </a:p>
+        </p:txBody>
+      </p:sp>
+      <p:sp>
+        <p:nvSpPr>
+          <p:cNvPr id="17" name="Text 15"/>
+          <p:cNvSpPr txBox="1"/>
+          <p:nvPr/>
+        </p:nvSpPr>
+        <p:spPr>
+          <a:xfrm>
+            <a:off x="3145536" y="2514600"/>
+            <a:ext cx="1371600" cy="228600"/>
+          </a:xfrm>
+          <a:prstGeom prst="rect">
+            <a:avLst/>
+          </a:prstGeom>
+          <a:noFill/>
+          <a:ln/>
+        </p:spPr>
+        <p:txBody>
+          <a:bodyPr wrap="square" lIns="0" tIns="0" rIns="0" bIns="0" rtlCol="0" anchor="ctr"/>
+          <a:lstStyle/>
+          <a:p>
+            <a:pPr algn="ctr" indent="0" marL="0">
+              <a:buNone/>
+            </a:pPr>
+            <a:r>
+              <a:rPr lang="en-US" sz="1050" dirty="0">
+                <a:solidFill>
+                  <a:srgbClr val="2E7D4F"/>
+                </a:solidFill>
+                <a:latin typeface="Calibri" pitchFamily="34" charset="0"/>
+                <a:ea typeface="Calibri" pitchFamily="34" charset="-122"/>
+                <a:cs typeface="Calibri" pitchFamily="34" charset="-120"/>
+              </a:rPr>
+              <a:t>Done</a:t>
+            </a:r>
             <a:endParaRPr lang="en-US" sz="1050" dirty="0"/>
-          </a:p>
-        </p:txBody>
-      </p:sp>
-      <p:sp>
-        <p:nvSpPr>
-          <p:cNvPr id="17" name="Text 15"/>
-          <p:cNvSpPr txBox="1"/>
-          <p:nvPr/>
-        </p:nvSpPr>
-        <p:spPr>
-          <a:xfrm>
-            <a:off x="2459736" y="2514600"/>
-            <a:ext cx="1097280" cy="228600"/>
-          </a:xfrm>
-          <a:prstGeom prst="rect">
-            <a:avLst/>
-          </a:prstGeom>
-          <a:noFill/>
-          <a:ln/>
-        </p:spPr>
-        <p:txBody>
-          <a:bodyPr wrap="square" lIns="0" tIns="0" rIns="0" bIns="0" rtlCol="0" anchor="ctr"/>
-          <a:lstStyle/>
-          <a:p>
-            <a:pPr algn="ctr" indent="0" marL="0">
-              <a:buNone/>
-            </a:pPr>
-            <a:r>
-              <a:rPr lang="en-US" sz="1000" dirty="0">
-                <a:solidFill>
-                  <a:srgbClr val="2E7D4F"/>
-                </a:solidFill>
-                <a:latin typeface="Calibri" pitchFamily="34" charset="0"/>
-                <a:ea typeface="Calibri" pitchFamily="34" charset="-122"/>
-                <a:cs typeface="Calibri" pitchFamily="34" charset="-120"/>
-              </a:rPr>
-              <a:t>Done</a:t>
-            </a:r>
-            <a:endParaRPr lang="en-US" sz="1000" dirty="0"/>
           </a:p>
         </p:txBody>
       </p:sp>
@@ -2350,291 +2422,7 @@
         </p:nvSpPr>
         <p:spPr>
           <a:xfrm>
-            <a:off x="3986784" y="1554480"/>
-            <a:ext cx="365760" cy="365760"/>
-          </a:xfrm>
-          <a:prstGeom prst="ellipse">
-            <a:avLst/>
-          </a:prstGeom>
-          <a:solidFill>
-            <a:srgbClr val="2E7D4F"/>
-          </a:solidFill>
-          <a:ln w="25400">
-            <a:solidFill>
-              <a:srgbClr val="FFFFFF"/>
-            </a:solidFill>
-            <a:prstDash val="solid"/>
-          </a:ln>
-        </p:spPr>
-      </p:sp>
-      <p:sp>
-        <p:nvSpPr>
-          <p:cNvPr id="19" name="Text 17"/>
-          <p:cNvSpPr txBox="1"/>
-          <p:nvPr/>
-        </p:nvSpPr>
-        <p:spPr>
-          <a:xfrm>
-            <a:off x="3986784" y="1554480"/>
-            <a:ext cx="365760" cy="365760"/>
-          </a:xfrm>
-          <a:prstGeom prst="rect">
-            <a:avLst/>
-          </a:prstGeom>
-          <a:noFill/>
-          <a:ln/>
-        </p:spPr>
-        <p:txBody>
-          <a:bodyPr wrap="square" lIns="0" tIns="0" rIns="0" bIns="0" rtlCol="0" anchor="ctr"/>
-          <a:lstStyle/>
-          <a:p>
-            <a:pPr algn="ctr" indent="0" marL="0">
-              <a:buNone/>
-            </a:pPr>
-            <a:r>
-              <a:rPr lang="en-US" sz="1300" b="1" dirty="0">
-                <a:solidFill>
-                  <a:srgbClr val="FFFFFF"/>
-                </a:solidFill>
-                <a:latin typeface="Cambria" pitchFamily="34" charset="0"/>
-                <a:ea typeface="Cambria" pitchFamily="34" charset="-122"/>
-                <a:cs typeface="Cambria" pitchFamily="34" charset="-120"/>
-              </a:rPr>
-              <a:t>4</a:t>
-            </a:r>
-            <a:endParaRPr lang="en-US" sz="1300" dirty="0"/>
-          </a:p>
-        </p:txBody>
-      </p:sp>
-      <p:sp>
-        <p:nvSpPr>
-          <p:cNvPr id="20" name="Text 18"/>
-          <p:cNvSpPr txBox="1"/>
-          <p:nvPr/>
-        </p:nvSpPr>
-        <p:spPr>
-          <a:xfrm>
-            <a:off x="3621024" y="2011680"/>
-            <a:ext cx="1097280" cy="502920"/>
-          </a:xfrm>
-          <a:prstGeom prst="rect">
-            <a:avLst/>
-          </a:prstGeom>
-          <a:noFill/>
-          <a:ln/>
-        </p:spPr>
-        <p:txBody>
-          <a:bodyPr wrap="square" lIns="0" tIns="0" rIns="0" bIns="0" rtlCol="0" anchor="t"/>
-          <a:lstStyle/>
-          <a:p>
-            <a:pPr algn="ctr" indent="0" marL="0">
-              <a:buNone/>
-            </a:pPr>
-            <a:r>
-              <a:rPr lang="en-US" sz="1050" b="1" dirty="0">
-                <a:solidFill>
-                  <a:srgbClr val="1D2B2A"/>
-                </a:solidFill>
-                <a:latin typeface="Calibri" pitchFamily="34" charset="0"/>
-                <a:ea typeface="Calibri" pitchFamily="34" charset="-122"/>
-                <a:cs typeface="Calibri" pitchFamily="34" charset="-120"/>
-              </a:rPr>
-              <a:t>Core implementation + tests</a:t>
-            </a:r>
-            <a:endParaRPr lang="en-US" sz="1050" dirty="0"/>
-          </a:p>
-        </p:txBody>
-      </p:sp>
-      <p:sp>
-        <p:nvSpPr>
-          <p:cNvPr id="21" name="Text 19"/>
-          <p:cNvSpPr txBox="1"/>
-          <p:nvPr/>
-        </p:nvSpPr>
-        <p:spPr>
-          <a:xfrm>
-            <a:off x="3621024" y="2514600"/>
-            <a:ext cx="1097280" cy="228600"/>
-          </a:xfrm>
-          <a:prstGeom prst="rect">
-            <a:avLst/>
-          </a:prstGeom>
-          <a:noFill/>
-          <a:ln/>
-        </p:spPr>
-        <p:txBody>
-          <a:bodyPr wrap="square" lIns="0" tIns="0" rIns="0" bIns="0" rtlCol="0" anchor="ctr"/>
-          <a:lstStyle/>
-          <a:p>
-            <a:pPr algn="ctr" indent="0" marL="0">
-              <a:buNone/>
-            </a:pPr>
-            <a:r>
-              <a:rPr lang="en-US" sz="1000" dirty="0">
-                <a:solidFill>
-                  <a:srgbClr val="2E7D4F"/>
-                </a:solidFill>
-                <a:latin typeface="Calibri" pitchFamily="34" charset="0"/>
-                <a:ea typeface="Calibri" pitchFamily="34" charset="-122"/>
-                <a:cs typeface="Calibri" pitchFamily="34" charset="-120"/>
-              </a:rPr>
-              <a:t>Done</a:t>
-            </a:r>
-            <a:endParaRPr lang="en-US" sz="1000" dirty="0"/>
-          </a:p>
-        </p:txBody>
-      </p:sp>
-      <p:sp>
-        <p:nvSpPr>
-          <p:cNvPr id="22" name="Shape 20"/>
-          <p:cNvSpPr/>
-          <p:nvPr/>
-        </p:nvSpPr>
-        <p:spPr>
-          <a:xfrm>
-            <a:off x="5148072" y="1554480"/>
-            <a:ext cx="365760" cy="365760"/>
-          </a:xfrm>
-          <a:prstGeom prst="ellipse">
-            <a:avLst/>
-          </a:prstGeom>
-          <a:solidFill>
-            <a:srgbClr val="2E7D4F"/>
-          </a:solidFill>
-          <a:ln w="25400">
-            <a:solidFill>
-              <a:srgbClr val="FFFFFF"/>
-            </a:solidFill>
-            <a:prstDash val="solid"/>
-          </a:ln>
-        </p:spPr>
-      </p:sp>
-      <p:sp>
-        <p:nvSpPr>
-          <p:cNvPr id="23" name="Text 21"/>
-          <p:cNvSpPr txBox="1"/>
-          <p:nvPr/>
-        </p:nvSpPr>
-        <p:spPr>
-          <a:xfrm>
-            <a:off x="5148072" y="1554480"/>
-            <a:ext cx="365760" cy="365760"/>
-          </a:xfrm>
-          <a:prstGeom prst="rect">
-            <a:avLst/>
-          </a:prstGeom>
-          <a:noFill/>
-          <a:ln/>
-        </p:spPr>
-        <p:txBody>
-          <a:bodyPr wrap="square" lIns="0" tIns="0" rIns="0" bIns="0" rtlCol="0" anchor="ctr"/>
-          <a:lstStyle/>
-          <a:p>
-            <a:pPr algn="ctr" indent="0" marL="0">
-              <a:buNone/>
-            </a:pPr>
-            <a:r>
-              <a:rPr lang="en-US" sz="1300" b="1" dirty="0">
-                <a:solidFill>
-                  <a:srgbClr val="FFFFFF"/>
-                </a:solidFill>
-                <a:latin typeface="Cambria" pitchFamily="34" charset="0"/>
-                <a:ea typeface="Cambria" pitchFamily="34" charset="-122"/>
-                <a:cs typeface="Cambria" pitchFamily="34" charset="-120"/>
-              </a:rPr>
-              <a:t>5</a:t>
-            </a:r>
-            <a:endParaRPr lang="en-US" sz="1300" dirty="0"/>
-          </a:p>
-        </p:txBody>
-      </p:sp>
-      <p:sp>
-        <p:nvSpPr>
-          <p:cNvPr id="24" name="Text 22"/>
-          <p:cNvSpPr txBox="1"/>
-          <p:nvPr/>
-        </p:nvSpPr>
-        <p:spPr>
-          <a:xfrm>
-            <a:off x="4782312" y="2011680"/>
-            <a:ext cx="1097280" cy="502920"/>
-          </a:xfrm>
-          <a:prstGeom prst="rect">
-            <a:avLst/>
-          </a:prstGeom>
-          <a:noFill/>
-          <a:ln/>
-        </p:spPr>
-        <p:txBody>
-          <a:bodyPr wrap="square" lIns="0" tIns="0" rIns="0" bIns="0" rtlCol="0" anchor="t"/>
-          <a:lstStyle/>
-          <a:p>
-            <a:pPr algn="ctr" indent="0" marL="0">
-              <a:buNone/>
-            </a:pPr>
-            <a:r>
-              <a:rPr lang="en-US" sz="1050" b="1" dirty="0">
-                <a:solidFill>
-                  <a:srgbClr val="1D2B2A"/>
-                </a:solidFill>
-                <a:latin typeface="Calibri" pitchFamily="34" charset="0"/>
-                <a:ea typeface="Calibri" pitchFamily="34" charset="-122"/>
-                <a:cs typeface="Calibri" pitchFamily="34" charset="-120"/>
-              </a:rPr>
-              <a:t>Scenario demo + GUI</a:t>
-            </a:r>
-            <a:endParaRPr lang="en-US" sz="1050" dirty="0"/>
-          </a:p>
-        </p:txBody>
-      </p:sp>
-      <p:sp>
-        <p:nvSpPr>
-          <p:cNvPr id="25" name="Text 23"/>
-          <p:cNvSpPr txBox="1"/>
-          <p:nvPr/>
-        </p:nvSpPr>
-        <p:spPr>
-          <a:xfrm>
-            <a:off x="4782312" y="2514600"/>
-            <a:ext cx="1097280" cy="228600"/>
-          </a:xfrm>
-          <a:prstGeom prst="rect">
-            <a:avLst/>
-          </a:prstGeom>
-          <a:noFill/>
-          <a:ln/>
-        </p:spPr>
-        <p:txBody>
-          <a:bodyPr wrap="square" lIns="0" tIns="0" rIns="0" bIns="0" rtlCol="0" anchor="ctr"/>
-          <a:lstStyle/>
-          <a:p>
-            <a:pPr algn="ctr" indent="0" marL="0">
-              <a:buNone/>
-            </a:pPr>
-            <a:r>
-              <a:rPr lang="en-US" sz="1000" dirty="0">
-                <a:solidFill>
-                  <a:srgbClr val="2E7D4F"/>
-                </a:solidFill>
-                <a:latin typeface="Calibri" pitchFamily="34" charset="0"/>
-                <a:ea typeface="Calibri" pitchFamily="34" charset="-122"/>
-                <a:cs typeface="Calibri" pitchFamily="34" charset="-120"/>
-              </a:rPr>
-              <a:t>Done</a:t>
-            </a:r>
-            <a:endParaRPr lang="en-US" sz="1000" dirty="0"/>
-          </a:p>
-        </p:txBody>
-      </p:sp>
-      <p:sp>
-        <p:nvSpPr>
-          <p:cNvPr id="26" name="Shape 24"/>
-          <p:cNvSpPr/>
-          <p:nvPr/>
-        </p:nvSpPr>
-        <p:spPr>
-          <a:xfrm>
-            <a:off x="6309360" y="1554480"/>
+            <a:off x="5129784" y="1554480"/>
             <a:ext cx="365760" cy="365760"/>
           </a:xfrm>
           <a:prstGeom prst="ellipse">
@@ -2653,13 +2441,13 @@
       </p:sp>
       <p:sp>
         <p:nvSpPr>
-          <p:cNvPr id="27" name="Text 25"/>
-          <p:cNvSpPr txBox="1"/>
-          <p:nvPr/>
-        </p:nvSpPr>
-        <p:spPr>
-          <a:xfrm>
-            <a:off x="6309360" y="1554480"/>
+          <p:cNvPr id="19" name="Text 17"/>
+          <p:cNvSpPr txBox="1"/>
+          <p:nvPr/>
+        </p:nvSpPr>
+        <p:spPr>
+          <a:xfrm>
+            <a:off x="5129784" y="1554480"/>
             <a:ext cx="365760" cy="365760"/>
           </a:xfrm>
           <a:prstGeom prst="rect">
@@ -2684,7 +2472,7 @@
                 <a:ea typeface="Cambria" pitchFamily="34" charset="-122"/>
                 <a:cs typeface="Cambria" pitchFamily="34" charset="-120"/>
               </a:rPr>
-              <a:t>6</a:t>
+              <a:t>4</a:t>
             </a:r>
             <a:endParaRPr lang="en-US" sz="1300" dirty="0"/>
           </a:p>
@@ -2692,14 +2480,14 @@
       </p:sp>
       <p:sp>
         <p:nvSpPr>
-          <p:cNvPr id="28" name="Text 26"/>
-          <p:cNvSpPr txBox="1"/>
-          <p:nvPr/>
-        </p:nvSpPr>
-        <p:spPr>
-          <a:xfrm>
-            <a:off x="5943600" y="2011680"/>
-            <a:ext cx="1097280" cy="502920"/>
+          <p:cNvPr id="20" name="Text 18"/>
+          <p:cNvSpPr txBox="1"/>
+          <p:nvPr/>
+        </p:nvSpPr>
+        <p:spPr>
+          <a:xfrm>
+            <a:off x="4626864" y="2011680"/>
+            <a:ext cx="1371600" cy="502920"/>
           </a:xfrm>
           <a:prstGeom prst="rect">
             <a:avLst/>
@@ -2715,7 +2503,7 @@
               <a:buNone/>
             </a:pPr>
             <a:r>
-              <a:rPr lang="en-US" sz="1050" b="1" dirty="0">
+              <a:rPr lang="en-US" sz="1100" b="1" dirty="0">
                 <a:solidFill>
                   <a:srgbClr val="1D2B2A"/>
                 </a:solidFill>
@@ -2723,7 +2511,46 @@
                 <a:ea typeface="Calibri" pitchFamily="34" charset="-122"/>
                 <a:cs typeface="Calibri" pitchFamily="34" charset="-120"/>
               </a:rPr>
-              <a:t>Feedback &amp; refinement</a:t>
+              <a:t>Implementation (Python)</a:t>
+            </a:r>
+            <a:endParaRPr lang="en-US" sz="1100" dirty="0"/>
+          </a:p>
+        </p:txBody>
+      </p:sp>
+      <p:sp>
+        <p:nvSpPr>
+          <p:cNvPr id="21" name="Text 19"/>
+          <p:cNvSpPr txBox="1"/>
+          <p:nvPr/>
+        </p:nvSpPr>
+        <p:spPr>
+          <a:xfrm>
+            <a:off x="4626864" y="2514600"/>
+            <a:ext cx="1371600" cy="228600"/>
+          </a:xfrm>
+          <a:prstGeom prst="rect">
+            <a:avLst/>
+          </a:prstGeom>
+          <a:noFill/>
+          <a:ln/>
+        </p:spPr>
+        <p:txBody>
+          <a:bodyPr wrap="square" lIns="0" tIns="0" rIns="0" bIns="0" rtlCol="0" anchor="ctr"/>
+          <a:lstStyle/>
+          <a:p>
+            <a:pPr algn="ctr" indent="0" marL="0">
+              <a:buNone/>
+            </a:pPr>
+            <a:r>
+              <a:rPr lang="en-US" sz="1050" dirty="0">
+                <a:solidFill>
+                  <a:srgbClr val="C98A12"/>
+                </a:solidFill>
+                <a:latin typeface="Calibri" pitchFamily="34" charset="0"/>
+                <a:ea typeface="Calibri" pitchFamily="34" charset="-122"/>
+                <a:cs typeface="Calibri" pitchFamily="34" charset="-120"/>
+              </a:rPr>
+              <a:t>In progress</a:t>
             </a:r>
             <a:endParaRPr lang="en-US" sz="1050" dirty="0"/>
           </a:p>
@@ -2731,14 +2558,39 @@
       </p:sp>
       <p:sp>
         <p:nvSpPr>
-          <p:cNvPr id="29" name="Text 27"/>
-          <p:cNvSpPr txBox="1"/>
-          <p:nvPr/>
-        </p:nvSpPr>
-        <p:spPr>
-          <a:xfrm>
-            <a:off x="5943600" y="2514600"/>
-            <a:ext cx="1097280" cy="228600"/>
+          <p:cNvPr id="22" name="Shape 20"/>
+          <p:cNvSpPr/>
+          <p:nvPr/>
+        </p:nvSpPr>
+        <p:spPr>
+          <a:xfrm>
+            <a:off x="6611112" y="1554480"/>
+            <a:ext cx="365760" cy="365760"/>
+          </a:xfrm>
+          <a:prstGeom prst="ellipse">
+            <a:avLst/>
+          </a:prstGeom>
+          <a:solidFill>
+            <a:srgbClr val="C98A12"/>
+          </a:solidFill>
+          <a:ln w="25400">
+            <a:solidFill>
+              <a:srgbClr val="FFFFFF"/>
+            </a:solidFill>
+            <a:prstDash val="solid"/>
+          </a:ln>
+        </p:spPr>
+      </p:sp>
+      <p:sp>
+        <p:nvSpPr>
+          <p:cNvPr id="23" name="Text 21"/>
+          <p:cNvSpPr txBox="1"/>
+          <p:nvPr/>
+        </p:nvSpPr>
+        <p:spPr>
+          <a:xfrm>
+            <a:off x="6611112" y="1554480"/>
+            <a:ext cx="365760" cy="365760"/>
           </a:xfrm>
           <a:prstGeom prst="rect">
             <a:avLst/>
@@ -2754,7 +2606,85 @@
               <a:buNone/>
             </a:pPr>
             <a:r>
-              <a:rPr lang="en-US" sz="1000" dirty="0">
+              <a:rPr lang="en-US" sz="1300" b="1" dirty="0">
+                <a:solidFill>
+                  <a:srgbClr val="FFFFFF"/>
+                </a:solidFill>
+                <a:latin typeface="Cambria" pitchFamily="34" charset="0"/>
+                <a:ea typeface="Cambria" pitchFamily="34" charset="-122"/>
+                <a:cs typeface="Cambria" pitchFamily="34" charset="-120"/>
+              </a:rPr>
+              <a:t>5</a:t>
+            </a:r>
+            <a:endParaRPr lang="en-US" sz="1300" dirty="0"/>
+          </a:p>
+        </p:txBody>
+      </p:sp>
+      <p:sp>
+        <p:nvSpPr>
+          <p:cNvPr id="24" name="Text 22"/>
+          <p:cNvSpPr txBox="1"/>
+          <p:nvPr/>
+        </p:nvSpPr>
+        <p:spPr>
+          <a:xfrm>
+            <a:off x="6108192" y="2011680"/>
+            <a:ext cx="1371600" cy="502920"/>
+          </a:xfrm>
+          <a:prstGeom prst="rect">
+            <a:avLst/>
+          </a:prstGeom>
+          <a:noFill/>
+          <a:ln/>
+        </p:spPr>
+        <p:txBody>
+          <a:bodyPr wrap="square" lIns="0" tIns="0" rIns="0" bIns="0" rtlCol="0" anchor="t"/>
+          <a:lstStyle/>
+          <a:p>
+            <a:pPr algn="ctr" indent="0" marL="0">
+              <a:buNone/>
+            </a:pPr>
+            <a:r>
+              <a:rPr lang="en-US" sz="1100" b="1" dirty="0">
+                <a:solidFill>
+                  <a:srgbClr val="1D2B2A"/>
+                </a:solidFill>
+                <a:latin typeface="Calibri" pitchFamily="34" charset="0"/>
+                <a:ea typeface="Calibri" pitchFamily="34" charset="-122"/>
+                <a:cs typeface="Calibri" pitchFamily="34" charset="-120"/>
+              </a:rPr>
+              <a:t>GUI (Tkinter)</a:t>
+            </a:r>
+            <a:endParaRPr lang="en-US" sz="1100" dirty="0"/>
+          </a:p>
+        </p:txBody>
+      </p:sp>
+      <p:sp>
+        <p:nvSpPr>
+          <p:cNvPr id="25" name="Text 23"/>
+          <p:cNvSpPr txBox="1"/>
+          <p:nvPr/>
+        </p:nvSpPr>
+        <p:spPr>
+          <a:xfrm>
+            <a:off x="6108192" y="2514600"/>
+            <a:ext cx="1371600" cy="228600"/>
+          </a:xfrm>
+          <a:prstGeom prst="rect">
+            <a:avLst/>
+          </a:prstGeom>
+          <a:noFill/>
+          <a:ln/>
+        </p:spPr>
+        <p:txBody>
+          <a:bodyPr wrap="square" lIns="0" tIns="0" rIns="0" bIns="0" rtlCol="0" anchor="ctr"/>
+          <a:lstStyle/>
+          <a:p>
+            <a:pPr algn="ctr" indent="0" marL="0">
+              <a:buNone/>
+            </a:pPr>
+            <a:r>
+              <a:rPr lang="en-US" sz="1050" dirty="0">
                 <a:solidFill>
                   <a:srgbClr val="C98A12"/>
                 </a:solidFill>
@@ -2764,19 +2694,19 @@
               </a:rPr>
               <a:t>In progress</a:t>
             </a:r>
-            <a:endParaRPr lang="en-US" sz="1000" dirty="0"/>
-          </a:p>
-        </p:txBody>
-      </p:sp>
-      <p:sp>
-        <p:nvSpPr>
-          <p:cNvPr id="30" name="Shape 28"/>
+            <a:endParaRPr lang="en-US" sz="1050" dirty="0"/>
+          </a:p>
+        </p:txBody>
+      </p:sp>
+      <p:sp>
+        <p:nvSpPr>
+          <p:cNvPr id="26" name="Shape 24"/>
           <p:cNvSpPr/>
           <p:nvPr/>
         </p:nvSpPr>
         <p:spPr>
           <a:xfrm>
-            <a:off x="7470648" y="1554480"/>
+            <a:off x="8092440" y="1554480"/>
             <a:ext cx="365760" cy="365760"/>
           </a:xfrm>
           <a:prstGeom prst="ellipse">
@@ -2795,13 +2725,13 @@
       </p:sp>
       <p:sp>
         <p:nvSpPr>
-          <p:cNvPr id="31" name="Text 29"/>
-          <p:cNvSpPr txBox="1"/>
-          <p:nvPr/>
-        </p:nvSpPr>
-        <p:spPr>
-          <a:xfrm>
-            <a:off x="7470648" y="1554480"/>
+          <p:cNvPr id="27" name="Text 25"/>
+          <p:cNvSpPr txBox="1"/>
+          <p:nvPr/>
+        </p:nvSpPr>
+        <p:spPr>
+          <a:xfrm>
+            <a:off x="8092440" y="1554480"/>
             <a:ext cx="365760" cy="365760"/>
           </a:xfrm>
           <a:prstGeom prst="rect">
@@ -2826,7 +2756,7 @@
                 <a:ea typeface="Cambria" pitchFamily="34" charset="-122"/>
                 <a:cs typeface="Cambria" pitchFamily="34" charset="-120"/>
               </a:rPr>
-              <a:t>7</a:t>
+              <a:t>6</a:t>
             </a:r>
             <a:endParaRPr lang="en-US" sz="1300" dirty="0"/>
           </a:p>
@@ -2834,14 +2764,14 @@
       </p:sp>
       <p:sp>
         <p:nvSpPr>
-          <p:cNvPr id="32" name="Text 30"/>
-          <p:cNvSpPr txBox="1"/>
-          <p:nvPr/>
-        </p:nvSpPr>
-        <p:spPr>
-          <a:xfrm>
-            <a:off x="7104888" y="2011680"/>
-            <a:ext cx="1097280" cy="502920"/>
+          <p:cNvPr id="28" name="Text 26"/>
+          <p:cNvSpPr txBox="1"/>
+          <p:nvPr/>
+        </p:nvSpPr>
+        <p:spPr>
+          <a:xfrm>
+            <a:off x="7589520" y="2011680"/>
+            <a:ext cx="1371600" cy="502920"/>
           </a:xfrm>
           <a:prstGeom prst="rect">
             <a:avLst/>
@@ -2857,7 +2787,7 @@
               <a:buNone/>
             </a:pPr>
             <a:r>
-              <a:rPr lang="en-US" sz="1050" b="1" dirty="0">
+              <a:rPr lang="en-US" sz="1100" b="1" dirty="0">
                 <a:solidFill>
                   <a:srgbClr val="1D2B2A"/>
                 </a:solidFill>
@@ -2867,52 +2797,52 @@
               </a:rPr>
               <a:t>Final report &amp; viva</a:t>
             </a:r>
+            <a:endParaRPr lang="en-US" sz="1100" dirty="0"/>
+          </a:p>
+        </p:txBody>
+      </p:sp>
+      <p:sp>
+        <p:nvSpPr>
+          <p:cNvPr id="29" name="Text 27"/>
+          <p:cNvSpPr txBox="1"/>
+          <p:nvPr/>
+        </p:nvSpPr>
+        <p:spPr>
+          <a:xfrm>
+            <a:off x="7589520" y="2514600"/>
+            <a:ext cx="1371600" cy="228600"/>
+          </a:xfrm>
+          <a:prstGeom prst="rect">
+            <a:avLst/>
+          </a:prstGeom>
+          <a:noFill/>
+          <a:ln/>
+        </p:spPr>
+        <p:txBody>
+          <a:bodyPr wrap="square" lIns="0" tIns="0" rIns="0" bIns="0" rtlCol="0" anchor="ctr"/>
+          <a:lstStyle/>
+          <a:p>
+            <a:pPr algn="ctr" indent="0" marL="0">
+              <a:buNone/>
+            </a:pPr>
+            <a:r>
+              <a:rPr lang="en-US" sz="1050" dirty="0">
+                <a:solidFill>
+                  <a:srgbClr val="9AAAA7"/>
+                </a:solidFill>
+                <a:latin typeface="Calibri" pitchFamily="34" charset="0"/>
+                <a:ea typeface="Calibri" pitchFamily="34" charset="-122"/>
+                <a:cs typeface="Calibri" pitchFamily="34" charset="-120"/>
+              </a:rPr>
+              <a:t>Next</a:t>
+            </a:r>
             <a:endParaRPr lang="en-US" sz="1050" dirty="0"/>
           </a:p>
         </p:txBody>
       </p:sp>
       <p:sp>
         <p:nvSpPr>
-          <p:cNvPr id="33" name="Text 31"/>
-          <p:cNvSpPr txBox="1"/>
-          <p:nvPr/>
-        </p:nvSpPr>
-        <p:spPr>
-          <a:xfrm>
-            <a:off x="7104888" y="2514600"/>
-            <a:ext cx="1097280" cy="228600"/>
-          </a:xfrm>
-          <a:prstGeom prst="rect">
-            <a:avLst/>
-          </a:prstGeom>
-          <a:noFill/>
-          <a:ln/>
-        </p:spPr>
-        <p:txBody>
-          <a:bodyPr wrap="square" lIns="0" tIns="0" rIns="0" bIns="0" rtlCol="0" anchor="ctr"/>
-          <a:lstStyle/>
-          <a:p>
-            <a:pPr algn="ctr" indent="0" marL="0">
-              <a:buNone/>
-            </a:pPr>
-            <a:r>
-              <a:rPr lang="en-US" sz="1000" dirty="0">
-                <a:solidFill>
-                  <a:srgbClr val="9AAAA7"/>
-                </a:solidFill>
-                <a:latin typeface="Calibri" pitchFamily="34" charset="0"/>
-                <a:ea typeface="Calibri" pitchFamily="34" charset="-122"/>
-                <a:cs typeface="Calibri" pitchFamily="34" charset="-120"/>
-              </a:rPr>
-              <a:t>Next</a:t>
-            </a:r>
-            <a:endParaRPr lang="en-US" sz="1000" dirty="0"/>
-          </a:p>
-        </p:txBody>
-      </p:sp>
-      <p:sp>
-        <p:nvSpPr>
-          <p:cNvPr id="34" name="Shape 32"/>
+          <p:cNvPr id="30" name="Shape 28"/>
           <p:cNvSpPr/>
           <p:nvPr/>
         </p:nvSpPr>
@@ -2939,7 +2869,7 @@
       </p:sp>
       <p:sp>
         <p:nvSpPr>
-          <p:cNvPr id="35" name="Text 33"/>
+          <p:cNvPr id="31" name="Text 29"/>
           <p:cNvSpPr txBox="1"/>
           <p:nvPr/>
         </p:nvSpPr>
@@ -2970,7 +2900,7 @@
                 <a:ea typeface="Cambria" pitchFamily="34" charset="-122"/>
                 <a:cs typeface="Cambria" pitchFamily="34" charset="-120"/>
               </a:rPr>
-              <a:t>71</a:t>
+              <a:t>8</a:t>
             </a:r>
             <a:endParaRPr lang="en-US" sz="3400" dirty="0"/>
           </a:p>
@@ -2978,7 +2908,7 @@
       </p:sp>
       <p:sp>
         <p:nvSpPr>
-          <p:cNvPr id="36" name="Text 34"/>
+          <p:cNvPr id="32" name="Text 30"/>
           <p:cNvSpPr txBox="1"/>
           <p:nvPr/>
         </p:nvSpPr>
@@ -3009,7 +2939,7 @@
                 <a:ea typeface="Calibri" pitchFamily="34" charset="-122"/>
                 <a:cs typeface="Calibri" pitchFamily="34" charset="-120"/>
               </a:rPr>
-              <a:t>business classes</a:t>
+              <a:t>sources studied</a:t>
             </a:r>
             <a:endParaRPr lang="en-US" sz="1150" dirty="0"/>
           </a:p>
@@ -3017,7 +2947,7 @@
       </p:sp>
       <p:sp>
         <p:nvSpPr>
-          <p:cNvPr id="37" name="Shape 35"/>
+          <p:cNvPr id="33" name="Shape 31"/>
           <p:cNvSpPr/>
           <p:nvPr/>
         </p:nvSpPr>
@@ -3044,7 +2974,7 @@
       </p:sp>
       <p:sp>
         <p:nvSpPr>
-          <p:cNvPr id="38" name="Text 36"/>
+          <p:cNvPr id="34" name="Text 32"/>
           <p:cNvSpPr txBox="1"/>
           <p:nvPr/>
         </p:nvSpPr>
@@ -3075,7 +3005,7 @@
                 <a:ea typeface="Cambria" pitchFamily="34" charset="-122"/>
                 <a:cs typeface="Cambria" pitchFamily="34" charset="-120"/>
               </a:rPr>
-              <a:t>98</a:t>
+              <a:t>27</a:t>
             </a:r>
             <a:endParaRPr lang="en-US" sz="3400" dirty="0"/>
           </a:p>
@@ -3083,7 +3013,7 @@
       </p:sp>
       <p:sp>
         <p:nvSpPr>
-          <p:cNvPr id="39" name="Text 37"/>
+          <p:cNvPr id="35" name="Text 33"/>
           <p:cNvSpPr txBox="1"/>
           <p:nvPr/>
         </p:nvSpPr>
@@ -3114,7 +3044,7 @@
                 <a:ea typeface="Calibri" pitchFamily="34" charset="-122"/>
                 <a:cs typeface="Calibri" pitchFamily="34" charset="-120"/>
               </a:rPr>
-              <a:t>Bank operations</a:t>
+              <a:t>banking terms defined</a:t>
             </a:r>
             <a:endParaRPr lang="en-US" sz="1150" dirty="0"/>
           </a:p>
@@ -3122,7 +3052,7 @@
       </p:sp>
       <p:sp>
         <p:nvSpPr>
-          <p:cNvPr id="40" name="Shape 38"/>
+          <p:cNvPr id="36" name="Shape 34"/>
           <p:cNvSpPr/>
           <p:nvPr/>
         </p:nvSpPr>
@@ -3149,7 +3079,7 @@
       </p:sp>
       <p:sp>
         <p:nvSpPr>
-          <p:cNvPr id="41" name="Text 39"/>
+          <p:cNvPr id="37" name="Text 35"/>
           <p:cNvSpPr txBox="1"/>
           <p:nvPr/>
         </p:nvSpPr>
@@ -3180,7 +3110,7 @@
                 <a:ea typeface="Cambria" pitchFamily="34" charset="-122"/>
                 <a:cs typeface="Cambria" pitchFamily="34" charset="-120"/>
               </a:rPr>
-              <a:t>4</a:t>
+              <a:t>36</a:t>
             </a:r>
             <a:endParaRPr lang="en-US" sz="3400" dirty="0"/>
           </a:p>
@@ -3188,7 +3118,7 @@
       </p:sp>
       <p:sp>
         <p:nvSpPr>
-          <p:cNvPr id="42" name="Text 40"/>
+          <p:cNvPr id="38" name="Text 36"/>
           <p:cNvSpPr txBox="1"/>
           <p:nvPr/>
         </p:nvSpPr>
@@ -3219,7 +3149,7 @@
                 <a:ea typeface="Calibri" pitchFamily="34" charset="-122"/>
                 <a:cs typeface="Calibri" pitchFamily="34" charset="-120"/>
               </a:rPr>
-              <a:t>multi-level hierarchies</a:t>
+              <a:t>documented assumptions</a:t>
             </a:r>
             <a:endParaRPr lang="en-US" sz="1150" dirty="0"/>
           </a:p>
@@ -3227,7 +3157,7 @@
       </p:sp>
       <p:sp>
         <p:nvSpPr>
-          <p:cNvPr id="43" name="Shape 41"/>
+          <p:cNvPr id="39" name="Shape 37"/>
           <p:cNvSpPr/>
           <p:nvPr/>
         </p:nvSpPr>
@@ -3254,7 +3184,7 @@
       </p:sp>
       <p:sp>
         <p:nvSpPr>
-          <p:cNvPr id="44" name="Text 42"/>
+          <p:cNvPr id="40" name="Text 38"/>
           <p:cNvSpPr txBox="1"/>
           <p:nvPr/>
         </p:nvSpPr>
@@ -3285,7 +3215,7 @@
                 <a:ea typeface="Cambria" pitchFamily="34" charset="-122"/>
                 <a:cs typeface="Cambria" pitchFamily="34" charset="-120"/>
               </a:rPr>
-              <a:t>16</a:t>
+              <a:t>71</a:t>
             </a:r>
             <a:endParaRPr lang="en-US" sz="3400" dirty="0"/>
           </a:p>
@@ -3293,7 +3223,7 @@
       </p:sp>
       <p:sp>
         <p:nvSpPr>
-          <p:cNvPr id="45" name="Text 43"/>
+          <p:cNvPr id="41" name="Text 39"/>
           <p:cNvSpPr txBox="1"/>
           <p:nvPr/>
         </p:nvSpPr>
@@ -3324,7 +3254,7 @@
                 <a:ea typeface="Calibri" pitchFamily="34" charset="-122"/>
                 <a:cs typeface="Calibri" pitchFamily="34" charset="-120"/>
               </a:rPr>
-              <a:t>exception scenarios</a:t>
+              <a:t>classes designed</a:t>
             </a:r>
             <a:endParaRPr lang="en-US" sz="1150" dirty="0"/>
           </a:p>
@@ -3332,7 +3262,7 @@
       </p:sp>
       <p:sp>
         <p:nvSpPr>
-          <p:cNvPr id="46" name="Shape 44"/>
+          <p:cNvPr id="42" name="Shape 40"/>
           <p:cNvSpPr/>
           <p:nvPr/>
         </p:nvSpPr>
@@ -3359,7 +3289,7 @@
       </p:sp>
       <p:sp>
         <p:nvSpPr>
-          <p:cNvPr id="47" name="Text 45"/>
+          <p:cNvPr id="43" name="Text 41"/>
           <p:cNvSpPr txBox="1"/>
           <p:nvPr/>
         </p:nvSpPr>
@@ -3390,7 +3320,7 @@
                 <a:ea typeface="Cambria" pitchFamily="34" charset="-122"/>
                 <a:cs typeface="Cambria" pitchFamily="34" charset="-120"/>
               </a:rPr>
-              <a:t>73</a:t>
+              <a:t>4</a:t>
             </a:r>
             <a:endParaRPr lang="en-US" sz="3400" dirty="0"/>
           </a:p>
@@ -3398,7 +3328,7 @@
       </p:sp>
       <p:sp>
         <p:nvSpPr>
-          <p:cNvPr id="48" name="Text 46"/>
+          <p:cNvPr id="44" name="Text 42"/>
           <p:cNvSpPr txBox="1"/>
           <p:nvPr/>
         </p:nvSpPr>
@@ -3429,7 +3359,7 @@
                 <a:ea typeface="Calibri" pitchFamily="34" charset="-122"/>
                 <a:cs typeface="Calibri" pitchFamily="34" charset="-120"/>
               </a:rPr>
-              <a:t>automated tests</a:t>
+              <a:t>multi-level hierarchies</a:t>
             </a:r>
             <a:endParaRPr lang="en-US" sz="1150" dirty="0"/>
           </a:p>
@@ -3437,7 +3367,7 @@
       </p:sp>
       <p:sp>
         <p:nvSpPr>
-          <p:cNvPr id="49" name="Text 47"/>
+          <p:cNvPr id="45" name="Text 43"/>
           <p:cNvSpPr txBox="1"/>
           <p:nvPr/>
         </p:nvSpPr>
@@ -3468,7 +3398,7 @@
                 <a:ea typeface="Calibri" pitchFamily="34" charset="-122"/>
                 <a:cs typeface="Calibri" pitchFamily="34" charset="-120"/>
               </a:rPr>
-              <a:t>Brief asks for at least 30 classes, 30 operations and one multi-level hierarchy</a:t>
+              <a:t>The brief asks for at least 30 meaningful classes and one multi-level hierarchy</a:t>
             </a:r>
             <a:endParaRPr lang="en-US" sz="1100" dirty="0"/>
           </a:p>
@@ -3539,7 +3469,7 @@
                 <a:ea typeface="Cambria" pitchFamily="34" charset="-122"/>
                 <a:cs typeface="Cambria" pitchFamily="34" charset="-120"/>
               </a:rPr>
-              <a:t>Research changed the design</a:t>
+              <a:t>Domain research: what I studied</a:t>
             </a:r>
             <a:endParaRPr lang="en-US" sz="2600" dirty="0"/>
           </a:p>
@@ -3578,7 +3508,7 @@
                 <a:ea typeface="Calibri" pitchFamily="34" charset="-122"/>
                 <a:cs typeface="Calibri" pitchFamily="34" charset="-120"/>
               </a:rPr>
-              <a:t>Three findings from KYC rules, payment lifecycles and card-scheme rules</a:t>
+              <a:t>Eight sources, chosen to cover every research area the brief lists</a:t>
             </a:r>
             <a:endParaRPr lang="en-US" sz="1200" dirty="0"/>
           </a:p>
@@ -3688,11 +3618,11 @@
         <p:spPr>
           <a:xfrm>
             <a:off x="457200" y="1280160"/>
-            <a:ext cx="2606040" cy="3291840"/>
+            <a:ext cx="1938528" cy="1508760"/>
           </a:xfrm>
           <a:prstGeom prst="roundRect">
             <a:avLst>
-              <a:gd name="adj" fmla="val 2807"/>
+              <a:gd name="adj" fmla="val 4848"/>
             </a:avLst>
           </a:prstGeom>
           <a:solidFill>
@@ -3714,34 +3644,34 @@
         </p:nvSpPr>
         <p:spPr>
           <a:xfrm>
-            <a:off x="640080" y="1417320"/>
-            <a:ext cx="2240280" cy="548640"/>
-          </a:xfrm>
-          <a:prstGeom prst="rect">
-            <a:avLst/>
-          </a:prstGeom>
-          <a:noFill/>
-          <a:ln/>
-        </p:spPr>
-        <p:txBody>
-          <a:bodyPr wrap="square" lIns="0" tIns="0" rIns="0" bIns="0" rtlCol="0" anchor="t"/>
+            <a:off x="594360" y="1417320"/>
+            <a:ext cx="365760" cy="365760"/>
+          </a:xfrm>
+          <a:prstGeom prst="rect">
+            <a:avLst/>
+          </a:prstGeom>
+          <a:noFill/>
+          <a:ln/>
+        </p:spPr>
+        <p:txBody>
+          <a:bodyPr wrap="square" lIns="0" tIns="0" rIns="0" bIns="0" rtlCol="0" anchor="ctr"/>
           <a:lstStyle/>
           <a:p>
             <a:pPr indent="0" marL="0">
               <a:buNone/>
             </a:pPr>
             <a:r>
-              <a:rPr lang="en-US" sz="1500" b="1" dirty="0">
-                <a:solidFill>
-                  <a:srgbClr val="0B4F4A"/>
+              <a:rPr lang="en-US" sz="1800" b="1" dirty="0">
+                <a:solidFill>
+                  <a:srgbClr val="B8862F"/>
                 </a:solidFill>
                 <a:latin typeface="Cambria" pitchFamily="34" charset="0"/>
                 <a:ea typeface="Cambria" pitchFamily="34" charset="-122"/>
                 <a:cs typeface="Cambria" pitchFamily="34" charset="-120"/>
               </a:rPr>
-              <a:t>One person, many roles</a:t>
-            </a:r>
-            <a:endParaRPr lang="en-US" sz="1500" dirty="0"/>
+              <a:t>1</a:t>
+            </a:r>
+            <a:endParaRPr lang="en-US" sz="1800" dirty="0"/>
           </a:p>
         </p:txBody>
       </p:sp>
@@ -3753,34 +3683,34 @@
         </p:nvSpPr>
         <p:spPr>
           <a:xfrm>
-            <a:off x="640080" y="2011680"/>
-            <a:ext cx="2240280" cy="228600"/>
-          </a:xfrm>
-          <a:prstGeom prst="rect">
-            <a:avLst/>
-          </a:prstGeom>
-          <a:noFill/>
-          <a:ln/>
-        </p:spPr>
-        <p:txBody>
-          <a:bodyPr wrap="square" lIns="0" tIns="0" rIns="0" bIns="0" rtlCol="0" anchor="ctr"/>
+            <a:off x="594360" y="1783080"/>
+            <a:ext cx="1691640" cy="411480"/>
+          </a:xfrm>
+          <a:prstGeom prst="rect">
+            <a:avLst/>
+          </a:prstGeom>
+          <a:noFill/>
+          <a:ln/>
+        </p:spPr>
+        <p:txBody>
+          <a:bodyPr wrap="square" lIns="0" tIns="0" rIns="0" bIns="0" rtlCol="0" anchor="t"/>
           <a:lstStyle/>
           <a:p>
             <a:pPr indent="0" marL="0">
               <a:buNone/>
             </a:pPr>
             <a:r>
-              <a:rPr lang="en-US" sz="1000" b="1" dirty="0">
-                <a:solidFill>
-                  <a:srgbClr val="B8862F"/>
-                </a:solidFill>
-                <a:latin typeface="Calibri" pitchFamily="34" charset="0"/>
-                <a:ea typeface="Calibri" pitchFamily="34" charset="-122"/>
-                <a:cs typeface="Calibri" pitchFamily="34" charset="-120"/>
-              </a:rPr>
-              <a:t>Found</a:t>
-            </a:r>
-            <a:endParaRPr lang="en-US" sz="1000" dirty="0"/>
+              <a:rPr lang="en-US" sz="1300" b="1" dirty="0">
+                <a:solidFill>
+                  <a:srgbClr val="0B4F4A"/>
+                </a:solidFill>
+                <a:latin typeface="Cambria" pitchFamily="34" charset="0"/>
+                <a:ea typeface="Cambria" pitchFamily="34" charset="-122"/>
+                <a:cs typeface="Cambria" pitchFamily="34" charset="-120"/>
+              </a:rPr>
+              <a:t>FATF Recommendations</a:t>
+            </a:r>
+            <a:endParaRPr lang="en-US" sz="1300" dirty="0"/>
           </a:p>
         </p:txBody>
       </p:sp>
@@ -3792,8 +3722,8 @@
         </p:nvSpPr>
         <p:spPr>
           <a:xfrm>
-            <a:off x="640080" y="2240280"/>
-            <a:ext cx="2240280" cy="914400"/>
+            <a:off x="594360" y="2194560"/>
+            <a:ext cx="1691640" cy="548640"/>
           </a:xfrm>
           <a:prstGeom prst="rect">
             <a:avLst/>
@@ -3809,7 +3739,7 @@
               <a:buNone/>
             </a:pPr>
             <a:r>
-              <a:rPr lang="en-US" sz="1200" dirty="0">
+              <a:rPr lang="en-US" sz="1100" dirty="0">
                 <a:solidFill>
                   <a:srgbClr val="1D2B2A"/>
                 </a:solidFill>
@@ -3817,104 +3747,26 @@
                 <a:ea typeface="Calibri" pitchFamily="34" charset="-122"/>
                 <a:cs typeface="Calibri" pitchFamily="34" charset="-120"/>
               </a:rPr>
-              <a:t>KYC treats customer, director, owner and signatory as roles of one person.</a:t>
-            </a:r>
-            <a:endParaRPr lang="en-US" sz="1200" dirty="0"/>
-          </a:p>
-        </p:txBody>
-      </p:sp>
-      <p:sp>
-        <p:nvSpPr>
-          <p:cNvPr id="9" name="Text 7"/>
-          <p:cNvSpPr txBox="1"/>
-          <p:nvPr/>
-        </p:nvSpPr>
-        <p:spPr>
-          <a:xfrm>
-            <a:off x="640080" y="3154680"/>
-            <a:ext cx="2240280" cy="228600"/>
-          </a:xfrm>
-          <a:prstGeom prst="rect">
-            <a:avLst/>
-          </a:prstGeom>
-          <a:noFill/>
-          <a:ln/>
-        </p:spPr>
-        <p:txBody>
-          <a:bodyPr wrap="square" lIns="0" tIns="0" rIns="0" bIns="0" rtlCol="0" anchor="ctr"/>
-          <a:lstStyle/>
-          <a:p>
-            <a:pPr indent="0" marL="0">
-              <a:buNone/>
-            </a:pPr>
-            <a:r>
-              <a:rPr lang="en-US" sz="1000" b="1" dirty="0">
-                <a:solidFill>
-                  <a:srgbClr val="B8862F"/>
-                </a:solidFill>
-                <a:latin typeface="Calibri" pitchFamily="34" charset="0"/>
-                <a:ea typeface="Calibri" pitchFamily="34" charset="-122"/>
-                <a:cs typeface="Calibri" pitchFamily="34" charset="-120"/>
-              </a:rPr>
-              <a:t>So the model has</a:t>
-            </a:r>
-            <a:endParaRPr lang="en-US" sz="1000" dirty="0"/>
-          </a:p>
-        </p:txBody>
-      </p:sp>
-      <p:sp>
-        <p:nvSpPr>
-          <p:cNvPr id="10" name="Text 8"/>
-          <p:cNvSpPr txBox="1"/>
-          <p:nvPr/>
-        </p:nvSpPr>
-        <p:spPr>
-          <a:xfrm>
-            <a:off x="640080" y="3383280"/>
-            <a:ext cx="2240280" cy="1097280"/>
-          </a:xfrm>
-          <a:prstGeom prst="rect">
-            <a:avLst/>
-          </a:prstGeom>
-          <a:noFill/>
-          <a:ln/>
-        </p:spPr>
-        <p:txBody>
-          <a:bodyPr wrap="square" lIns="0" tIns="0" rIns="0" bIns="0" rtlCol="0" anchor="t"/>
-          <a:lstStyle/>
-          <a:p>
-            <a:pPr indent="0" marL="0">
-              <a:buNone/>
-            </a:pPr>
-            <a:r>
-              <a:rPr lang="en-US" sz="1200" dirty="0">
-                <a:solidFill>
-                  <a:srgbClr val="1D2B2A"/>
-                </a:solidFill>
-                <a:latin typeface="Calibri" pitchFamily="34" charset="0"/>
-                <a:ea typeface="Calibri" pitchFamily="34" charset="-122"/>
-                <a:cs typeface="Calibri" pitchFamily="34" charset="-120"/>
-              </a:rPr>
-              <a:t>One Person record; roles are dated objects (Mandate, OfficerRole), not subclasses.</a:t>
-            </a:r>
-            <a:endParaRPr lang="en-US" sz="1200" dirty="0"/>
-          </a:p>
-        </p:txBody>
-      </p:sp>
-      <p:sp>
-        <p:nvSpPr>
-          <p:cNvPr id="11" name="Shape 9"/>
+              <a:t>Customer due diligence; beneficial owners (Rec. 10, 24, 25)</a:t>
+            </a:r>
+            <a:endParaRPr lang="en-US" sz="1100" dirty="0"/>
+          </a:p>
+        </p:txBody>
+      </p:sp>
+      <p:sp>
+        <p:nvSpPr>
+          <p:cNvPr id="9" name="Shape 7"/>
           <p:cNvSpPr/>
           <p:nvPr/>
         </p:nvSpPr>
         <p:spPr>
           <a:xfrm>
-            <a:off x="3246120" y="1280160"/>
-            <a:ext cx="2606040" cy="3291840"/>
+            <a:off x="2542032" y="1280160"/>
+            <a:ext cx="1938528" cy="1508760"/>
           </a:xfrm>
           <a:prstGeom prst="roundRect">
             <a:avLst>
-              <a:gd name="adj" fmla="val 2807"/>
+              <a:gd name="adj" fmla="val 4848"/>
             </a:avLst>
           </a:prstGeom>
           <a:solidFill>
@@ -3930,92 +3782,92 @@
       </p:sp>
       <p:sp>
         <p:nvSpPr>
-          <p:cNvPr id="12" name="Text 10"/>
-          <p:cNvSpPr txBox="1"/>
-          <p:nvPr/>
-        </p:nvSpPr>
-        <p:spPr>
-          <a:xfrm>
-            <a:off x="3429000" y="1417320"/>
-            <a:ext cx="2240280" cy="548640"/>
-          </a:xfrm>
-          <a:prstGeom prst="rect">
-            <a:avLst/>
-          </a:prstGeom>
-          <a:noFill/>
-          <a:ln/>
-        </p:spPr>
-        <p:txBody>
-          <a:bodyPr wrap="square" lIns="0" tIns="0" rIns="0" bIns="0" rtlCol="0" anchor="t"/>
+          <p:cNvPr id="10" name="Text 8"/>
+          <p:cNvSpPr txBox="1"/>
+          <p:nvPr/>
+        </p:nvSpPr>
+        <p:spPr>
+          <a:xfrm>
+            <a:off x="2679192" y="1417320"/>
+            <a:ext cx="365760" cy="365760"/>
+          </a:xfrm>
+          <a:prstGeom prst="rect">
+            <a:avLst/>
+          </a:prstGeom>
+          <a:noFill/>
+          <a:ln/>
+        </p:spPr>
+        <p:txBody>
+          <a:bodyPr wrap="square" lIns="0" tIns="0" rIns="0" bIns="0" rtlCol="0" anchor="ctr"/>
           <a:lstStyle/>
           <a:p>
             <a:pPr indent="0" marL="0">
               <a:buNone/>
             </a:pPr>
             <a:r>
-              <a:rPr lang="en-US" sz="1500" b="1" dirty="0">
-                <a:solidFill>
-                  <a:srgbClr val="0B4F4A"/>
+              <a:rPr lang="en-US" sz="1800" b="1" dirty="0">
+                <a:solidFill>
+                  <a:srgbClr val="B8862F"/>
                 </a:solidFill>
                 <a:latin typeface="Cambria" pitchFamily="34" charset="0"/>
                 <a:ea typeface="Cambria" pitchFamily="34" charset="-122"/>
                 <a:cs typeface="Cambria" pitchFamily="34" charset="-120"/>
               </a:rPr>
-              <a:t>Nothing is erased</a:t>
-            </a:r>
-            <a:endParaRPr lang="en-US" sz="1500" dirty="0"/>
-          </a:p>
-        </p:txBody>
-      </p:sp>
-      <p:sp>
-        <p:nvSpPr>
-          <p:cNvPr id="13" name="Text 11"/>
-          <p:cNvSpPr txBox="1"/>
-          <p:nvPr/>
-        </p:nvSpPr>
-        <p:spPr>
-          <a:xfrm>
-            <a:off x="3429000" y="2011680"/>
-            <a:ext cx="2240280" cy="228600"/>
-          </a:xfrm>
-          <a:prstGeom prst="rect">
-            <a:avLst/>
-          </a:prstGeom>
-          <a:noFill/>
-          <a:ln/>
-        </p:spPr>
-        <p:txBody>
-          <a:bodyPr wrap="square" lIns="0" tIns="0" rIns="0" bIns="0" rtlCol="0" anchor="ctr"/>
+              <a:t>2</a:t>
+            </a:r>
+            <a:endParaRPr lang="en-US" sz="1800" dirty="0"/>
+          </a:p>
+        </p:txBody>
+      </p:sp>
+      <p:sp>
+        <p:nvSpPr>
+          <p:cNvPr id="11" name="Text 9"/>
+          <p:cNvSpPr txBox="1"/>
+          <p:nvPr/>
+        </p:nvSpPr>
+        <p:spPr>
+          <a:xfrm>
+            <a:off x="2679192" y="1783080"/>
+            <a:ext cx="1691640" cy="411480"/>
+          </a:xfrm>
+          <a:prstGeom prst="rect">
+            <a:avLst/>
+          </a:prstGeom>
+          <a:noFill/>
+          <a:ln/>
+        </p:spPr>
+        <p:txBody>
+          <a:bodyPr wrap="square" lIns="0" tIns="0" rIns="0" bIns="0" rtlCol="0" anchor="t"/>
           <a:lstStyle/>
           <a:p>
             <a:pPr indent="0" marL="0">
               <a:buNone/>
             </a:pPr>
             <a:r>
-              <a:rPr lang="en-US" sz="1000" b="1" dirty="0">
-                <a:solidFill>
-                  <a:srgbClr val="B8862F"/>
-                </a:solidFill>
-                <a:latin typeface="Calibri" pitchFamily="34" charset="0"/>
-                <a:ea typeface="Calibri" pitchFamily="34" charset="-122"/>
-                <a:cs typeface="Calibri" pitchFamily="34" charset="-120"/>
-              </a:rPr>
-              <a:t>Found</a:t>
-            </a:r>
-            <a:endParaRPr lang="en-US" sz="1000" dirty="0"/>
-          </a:p>
-        </p:txBody>
-      </p:sp>
-      <p:sp>
-        <p:nvSpPr>
-          <p:cNvPr id="14" name="Text 12"/>
-          <p:cNvSpPr txBox="1"/>
-          <p:nvPr/>
-        </p:nvSpPr>
-        <p:spPr>
-          <a:xfrm>
-            <a:off x="3429000" y="2240280"/>
-            <a:ext cx="2240280" cy="914400"/>
+              <a:rPr lang="en-US" sz="1300" b="1" dirty="0">
+                <a:solidFill>
+                  <a:srgbClr val="0B4F4A"/>
+                </a:solidFill>
+                <a:latin typeface="Cambria" pitchFamily="34" charset="0"/>
+                <a:ea typeface="Cambria" pitchFamily="34" charset="-122"/>
+                <a:cs typeface="Cambria" pitchFamily="34" charset="-120"/>
+              </a:rPr>
+              <a:t>State Bank of Pakistan</a:t>
+            </a:r>
+            <a:endParaRPr lang="en-US" sz="1300" dirty="0"/>
+          </a:p>
+        </p:txBody>
+      </p:sp>
+      <p:sp>
+        <p:nvSpPr>
+          <p:cNvPr id="12" name="Text 10"/>
+          <p:cNvSpPr txBox="1"/>
+          <p:nvPr/>
+        </p:nvSpPr>
+        <p:spPr>
+          <a:xfrm>
+            <a:off x="2679192" y="2194560"/>
+            <a:ext cx="1691640" cy="548640"/>
           </a:xfrm>
           <a:prstGeom prst="rect">
             <a:avLst/>
@@ -4031,7 +3883,7 @@
               <a:buNone/>
             </a:pPr>
             <a:r>
-              <a:rPr lang="en-US" sz="1200" dirty="0">
+              <a:rPr lang="en-US" sz="1100" dirty="0">
                 <a:solidFill>
                   <a:srgbClr val="1D2B2A"/>
                 </a:solidFill>
@@ -4039,104 +3891,26 @@
                 <a:ea typeface="Calibri" pitchFamily="34" charset="-122"/>
                 <a:cs typeface="Calibri" pitchFamily="34" charset="-120"/>
               </a:rPr>
-              <a:t>Banks counteract a wrong payment with a new entry; they never edit history.</a:t>
-            </a:r>
-            <a:endParaRPr lang="en-US" sz="1200" dirty="0"/>
-          </a:p>
-        </p:txBody>
-      </p:sp>
-      <p:sp>
-        <p:nvSpPr>
-          <p:cNvPr id="15" name="Text 13"/>
-          <p:cNvSpPr txBox="1"/>
-          <p:nvPr/>
-        </p:nvSpPr>
-        <p:spPr>
-          <a:xfrm>
-            <a:off x="3429000" y="3154680"/>
-            <a:ext cx="2240280" cy="228600"/>
-          </a:xfrm>
-          <a:prstGeom prst="rect">
-            <a:avLst/>
-          </a:prstGeom>
-          <a:noFill/>
-          <a:ln/>
-        </p:spPr>
-        <p:txBody>
-          <a:bodyPr wrap="square" lIns="0" tIns="0" rIns="0" bIns="0" rtlCol="0" anchor="ctr"/>
-          <a:lstStyle/>
-          <a:p>
-            <a:pPr indent="0" marL="0">
-              <a:buNone/>
-            </a:pPr>
-            <a:r>
-              <a:rPr lang="en-US" sz="1000" b="1" dirty="0">
-                <a:solidFill>
-                  <a:srgbClr val="B8862F"/>
-                </a:solidFill>
-                <a:latin typeface="Calibri" pitchFamily="34" charset="0"/>
-                <a:ea typeface="Calibri" pitchFamily="34" charset="-122"/>
-                <a:cs typeface="Calibri" pitchFamily="34" charset="-120"/>
-              </a:rPr>
-              <a:t>So the model has</a:t>
-            </a:r>
-            <a:endParaRPr lang="en-US" sz="1000" dirty="0"/>
-          </a:p>
-        </p:txBody>
-      </p:sp>
-      <p:sp>
-        <p:nvSpPr>
-          <p:cNvPr id="16" name="Text 14"/>
-          <p:cNvSpPr txBox="1"/>
-          <p:nvPr/>
-        </p:nvSpPr>
-        <p:spPr>
-          <a:xfrm>
-            <a:off x="3429000" y="3383280"/>
-            <a:ext cx="2240280" cy="1097280"/>
-          </a:xfrm>
-          <a:prstGeom prst="rect">
-            <a:avLst/>
-          </a:prstGeom>
-          <a:noFill/>
-          <a:ln/>
-        </p:spPr>
-        <p:txBody>
-          <a:bodyPr wrap="square" lIns="0" tIns="0" rIns="0" bIns="0" rtlCol="0" anchor="t"/>
-          <a:lstStyle/>
-          <a:p>
-            <a:pPr indent="0" marL="0">
-              <a:buNone/>
-            </a:pPr>
-            <a:r>
-              <a:rPr lang="en-US" sz="1200" dirty="0">
-                <a:solidFill>
-                  <a:srgbClr val="1D2B2A"/>
-                </a:solidFill>
-                <a:latin typeface="Calibri" pitchFamily="34" charset="0"/>
-                <a:ea typeface="Calibri" pitchFamily="34" charset="-122"/>
-                <a:cs typeface="Calibri" pitchFamily="34" charset="-120"/>
-              </a:rPr>
-              <a:t>Reversal and Chargeback are new transactions linked to the original.</a:t>
-            </a:r>
-            <a:endParaRPr lang="en-US" sz="1200" dirty="0"/>
-          </a:p>
-        </p:txBody>
-      </p:sp>
-      <p:sp>
-        <p:nvSpPr>
-          <p:cNvPr id="17" name="Shape 15"/>
+              <a:t>AML/CFT regulations: local KYC practice</a:t>
+            </a:r>
+            <a:endParaRPr lang="en-US" sz="1100" dirty="0"/>
+          </a:p>
+        </p:txBody>
+      </p:sp>
+      <p:sp>
+        <p:nvSpPr>
+          <p:cNvPr id="13" name="Shape 11"/>
           <p:cNvSpPr/>
           <p:nvPr/>
         </p:nvSpPr>
         <p:spPr>
           <a:xfrm>
-            <a:off x="6035040" y="1280160"/>
-            <a:ext cx="2606040" cy="3291840"/>
+            <a:off x="4626864" y="1280160"/>
+            <a:ext cx="1938528" cy="1508760"/>
           </a:xfrm>
           <a:prstGeom prst="roundRect">
             <a:avLst>
-              <a:gd name="adj" fmla="val 2807"/>
+              <a:gd name="adj" fmla="val 4848"/>
             </a:avLst>
           </a:prstGeom>
           <a:solidFill>
@@ -4152,40 +3926,184 @@
       </p:sp>
       <p:sp>
         <p:nvSpPr>
-          <p:cNvPr id="18" name="Text 16"/>
-          <p:cNvSpPr txBox="1"/>
-          <p:nvPr/>
-        </p:nvSpPr>
-        <p:spPr>
-          <a:xfrm>
-            <a:off x="6217920" y="1417320"/>
-            <a:ext cx="2240280" cy="548640"/>
-          </a:xfrm>
-          <a:prstGeom prst="rect">
-            <a:avLst/>
-          </a:prstGeom>
-          <a:noFill/>
-          <a:ln/>
-        </p:spPr>
-        <p:txBody>
-          <a:bodyPr wrap="square" lIns="0" tIns="0" rIns="0" bIns="0" rtlCol="0" anchor="t"/>
+          <p:cNvPr id="14" name="Text 12"/>
+          <p:cNvSpPr txBox="1"/>
+          <p:nvPr/>
+        </p:nvSpPr>
+        <p:spPr>
+          <a:xfrm>
+            <a:off x="4764024" y="1417320"/>
+            <a:ext cx="365760" cy="365760"/>
+          </a:xfrm>
+          <a:prstGeom prst="rect">
+            <a:avLst/>
+          </a:prstGeom>
+          <a:noFill/>
+          <a:ln/>
+        </p:spPr>
+        <p:txBody>
+          <a:bodyPr wrap="square" lIns="0" tIns="0" rIns="0" bIns="0" rtlCol="0" anchor="ctr"/>
           <a:lstStyle/>
           <a:p>
             <a:pPr indent="0" marL="0">
               <a:buNone/>
             </a:pPr>
             <a:r>
-              <a:rPr lang="en-US" sz="1500" b="1" dirty="0">
-                <a:solidFill>
-                  <a:srgbClr val="0B4F4A"/>
+              <a:rPr lang="en-US" sz="1800" b="1" dirty="0">
+                <a:solidFill>
+                  <a:srgbClr val="B8862F"/>
                 </a:solidFill>
                 <a:latin typeface="Cambria" pitchFamily="34" charset="0"/>
                 <a:ea typeface="Cambria" pitchFamily="34" charset="-122"/>
                 <a:cs typeface="Cambria" pitchFamily="34" charset="-120"/>
               </a:rPr>
-              <a:t>Product ≠ customer’s product</a:t>
-            </a:r>
-            <a:endParaRPr lang="en-US" sz="1500" dirty="0"/>
+              <a:t>3</a:t>
+            </a:r>
+            <a:endParaRPr lang="en-US" sz="1800" dirty="0"/>
+          </a:p>
+        </p:txBody>
+      </p:sp>
+      <p:sp>
+        <p:nvSpPr>
+          <p:cNvPr id="15" name="Text 13"/>
+          <p:cNvSpPr txBox="1"/>
+          <p:nvPr/>
+        </p:nvSpPr>
+        <p:spPr>
+          <a:xfrm>
+            <a:off x="4764024" y="1783080"/>
+            <a:ext cx="1691640" cy="411480"/>
+          </a:xfrm>
+          <a:prstGeom prst="rect">
+            <a:avLst/>
+          </a:prstGeom>
+          <a:noFill/>
+          <a:ln/>
+        </p:spPr>
+        <p:txBody>
+          <a:bodyPr wrap="square" lIns="0" tIns="0" rIns="0" bIns="0" rtlCol="0" anchor="t"/>
+          <a:lstStyle/>
+          <a:p>
+            <a:pPr indent="0" marL="0">
+              <a:buNone/>
+            </a:pPr>
+            <a:r>
+              <a:rPr lang="en-US" sz="1300" b="1" dirty="0">
+                <a:solidFill>
+                  <a:srgbClr val="0B4F4A"/>
+                </a:solidFill>
+                <a:latin typeface="Cambria" pitchFamily="34" charset="0"/>
+                <a:ea typeface="Cambria" pitchFamily="34" charset="-122"/>
+                <a:cs typeface="Cambria" pitchFamily="34" charset="-120"/>
+              </a:rPr>
+              <a:t>Basel Committee</a:t>
+            </a:r>
+            <a:endParaRPr lang="en-US" sz="1300" dirty="0"/>
+          </a:p>
+        </p:txBody>
+      </p:sp>
+      <p:sp>
+        <p:nvSpPr>
+          <p:cNvPr id="16" name="Text 14"/>
+          <p:cNvSpPr txBox="1"/>
+          <p:nvPr/>
+        </p:nvSpPr>
+        <p:spPr>
+          <a:xfrm>
+            <a:off x="4764024" y="2194560"/>
+            <a:ext cx="1691640" cy="548640"/>
+          </a:xfrm>
+          <a:prstGeom prst="rect">
+            <a:avLst/>
+          </a:prstGeom>
+          <a:noFill/>
+          <a:ln/>
+        </p:spPr>
+        <p:txBody>
+          <a:bodyPr wrap="square" lIns="0" tIns="0" rIns="0" bIns="0" rtlCol="0" anchor="t"/>
+          <a:lstStyle/>
+          <a:p>
+            <a:pPr indent="0" marL="0">
+              <a:buNone/>
+            </a:pPr>
+            <a:r>
+              <a:rPr lang="en-US" sz="1100" dirty="0">
+                <a:solidFill>
+                  <a:srgbClr val="1D2B2A"/>
+                </a:solidFill>
+                <a:latin typeface="Calibri" pitchFamily="34" charset="0"/>
+                <a:ea typeface="Calibri" pitchFamily="34" charset="-122"/>
+                <a:cs typeface="Calibri" pitchFamily="34" charset="-120"/>
+              </a:rPr>
+              <a:t>Managing money-laundering risk in banks</a:t>
+            </a:r>
+            <a:endParaRPr lang="en-US" sz="1100" dirty="0"/>
+          </a:p>
+        </p:txBody>
+      </p:sp>
+      <p:sp>
+        <p:nvSpPr>
+          <p:cNvPr id="17" name="Shape 15"/>
+          <p:cNvSpPr/>
+          <p:nvPr/>
+        </p:nvSpPr>
+        <p:spPr>
+          <a:xfrm>
+            <a:off x="6711696" y="1280160"/>
+            <a:ext cx="1938528" cy="1508760"/>
+          </a:xfrm>
+          <a:prstGeom prst="roundRect">
+            <a:avLst>
+              <a:gd name="adj" fmla="val 4848"/>
+            </a:avLst>
+          </a:prstGeom>
+          <a:solidFill>
+            <a:srgbClr val="E8F0EE"/>
+          </a:solidFill>
+          <a:ln w="12700">
+            <a:solidFill>
+              <a:srgbClr val="E8F0EE"/>
+            </a:solidFill>
+            <a:prstDash val="solid"/>
+          </a:ln>
+        </p:spPr>
+      </p:sp>
+      <p:sp>
+        <p:nvSpPr>
+          <p:cNvPr id="18" name="Text 16"/>
+          <p:cNvSpPr txBox="1"/>
+          <p:nvPr/>
+        </p:nvSpPr>
+        <p:spPr>
+          <a:xfrm>
+            <a:off x="6848856" y="1417320"/>
+            <a:ext cx="365760" cy="365760"/>
+          </a:xfrm>
+          <a:prstGeom prst="rect">
+            <a:avLst/>
+          </a:prstGeom>
+          <a:noFill/>
+          <a:ln/>
+        </p:spPr>
+        <p:txBody>
+          <a:bodyPr wrap="square" lIns="0" tIns="0" rIns="0" bIns="0" rtlCol="0" anchor="ctr"/>
+          <a:lstStyle/>
+          <a:p>
+            <a:pPr indent="0" marL="0">
+              <a:buNone/>
+            </a:pPr>
+            <a:r>
+              <a:rPr lang="en-US" sz="1800" b="1" dirty="0">
+                <a:solidFill>
+                  <a:srgbClr val="B8862F"/>
+                </a:solidFill>
+                <a:latin typeface="Cambria" pitchFamily="34" charset="0"/>
+                <a:ea typeface="Cambria" pitchFamily="34" charset="-122"/>
+                <a:cs typeface="Cambria" pitchFamily="34" charset="-120"/>
+              </a:rPr>
+              <a:t>4</a:t>
+            </a:r>
+            <a:endParaRPr lang="en-US" sz="1800" dirty="0"/>
           </a:p>
         </p:txBody>
       </p:sp>
@@ -4197,8 +4115,113 @@
         </p:nvSpPr>
         <p:spPr>
           <a:xfrm>
-            <a:off x="6217920" y="2011680"/>
-            <a:ext cx="2240280" cy="228600"/>
+            <a:off x="6848856" y="1783080"/>
+            <a:ext cx="1691640" cy="411480"/>
+          </a:xfrm>
+          <a:prstGeom prst="rect">
+            <a:avLst/>
+          </a:prstGeom>
+          <a:noFill/>
+          <a:ln/>
+        </p:spPr>
+        <p:txBody>
+          <a:bodyPr wrap="square" lIns="0" tIns="0" rIns="0" bIns="0" rtlCol="0" anchor="t"/>
+          <a:lstStyle/>
+          <a:p>
+            <a:pPr indent="0" marL="0">
+              <a:buNone/>
+            </a:pPr>
+            <a:r>
+              <a:rPr lang="en-US" sz="1300" b="1" dirty="0">
+                <a:solidFill>
+                  <a:srgbClr val="0B4F4A"/>
+                </a:solidFill>
+                <a:latin typeface="Cambria" pitchFamily="34" charset="0"/>
+                <a:ea typeface="Cambria" pitchFamily="34" charset="-122"/>
+                <a:cs typeface="Cambria" pitchFamily="34" charset="-120"/>
+              </a:rPr>
+              <a:t>ISO 20022</a:t>
+            </a:r>
+            <a:endParaRPr lang="en-US" sz="1300" dirty="0"/>
+          </a:p>
+        </p:txBody>
+      </p:sp>
+      <p:sp>
+        <p:nvSpPr>
+          <p:cNvPr id="20" name="Text 18"/>
+          <p:cNvSpPr txBox="1"/>
+          <p:nvPr/>
+        </p:nvSpPr>
+        <p:spPr>
+          <a:xfrm>
+            <a:off x="6848856" y="2194560"/>
+            <a:ext cx="1691640" cy="548640"/>
+          </a:xfrm>
+          <a:prstGeom prst="rect">
+            <a:avLst/>
+          </a:prstGeom>
+          <a:noFill/>
+          <a:ln/>
+        </p:spPr>
+        <p:txBody>
+          <a:bodyPr wrap="square" lIns="0" tIns="0" rIns="0" bIns="0" rtlCol="0" anchor="t"/>
+          <a:lstStyle/>
+          <a:p>
+            <a:pPr indent="0" marL="0">
+              <a:buNone/>
+            </a:pPr>
+            <a:r>
+              <a:rPr lang="en-US" sz="1100" dirty="0">
+                <a:solidFill>
+                  <a:srgbClr val="1D2B2A"/>
+                </a:solidFill>
+                <a:latin typeface="Calibri" pitchFamily="34" charset="0"/>
+                <a:ea typeface="Calibri" pitchFamily="34" charset="-122"/>
+                <a:cs typeface="Calibri" pitchFamily="34" charset="-120"/>
+              </a:rPr>
+              <a:t>Payment statuses: pending, held, posted, rejected</a:t>
+            </a:r>
+            <a:endParaRPr lang="en-US" sz="1100" dirty="0"/>
+          </a:p>
+        </p:txBody>
+      </p:sp>
+      <p:sp>
+        <p:nvSpPr>
+          <p:cNvPr id="21" name="Shape 19"/>
+          <p:cNvSpPr/>
+          <p:nvPr/>
+        </p:nvSpPr>
+        <p:spPr>
+          <a:xfrm>
+            <a:off x="457200" y="2971800"/>
+            <a:ext cx="1938528" cy="1508760"/>
+          </a:xfrm>
+          <a:prstGeom prst="roundRect">
+            <a:avLst>
+              <a:gd name="adj" fmla="val 4848"/>
+            </a:avLst>
+          </a:prstGeom>
+          <a:solidFill>
+            <a:srgbClr val="E8F0EE"/>
+          </a:solidFill>
+          <a:ln w="12700">
+            <a:solidFill>
+              <a:srgbClr val="E8F0EE"/>
+            </a:solidFill>
+            <a:prstDash val="solid"/>
+          </a:ln>
+        </p:spPr>
+      </p:sp>
+      <p:sp>
+        <p:nvSpPr>
+          <p:cNvPr id="22" name="Text 20"/>
+          <p:cNvSpPr txBox="1"/>
+          <p:nvPr/>
+        </p:nvSpPr>
+        <p:spPr>
+          <a:xfrm>
+            <a:off x="594360" y="3108960"/>
+            <a:ext cx="365760" cy="365760"/>
           </a:xfrm>
           <a:prstGeom prst="rect">
             <a:avLst/>
@@ -4214,30 +4237,30 @@
               <a:buNone/>
             </a:pPr>
             <a:r>
-              <a:rPr lang="en-US" sz="1000" b="1" dirty="0">
+              <a:rPr lang="en-US" sz="1800" b="1" dirty="0">
                 <a:solidFill>
                   <a:srgbClr val="B8862F"/>
                 </a:solidFill>
-                <a:latin typeface="Calibri" pitchFamily="34" charset="0"/>
-                <a:ea typeface="Calibri" pitchFamily="34" charset="-122"/>
-                <a:cs typeface="Calibri" pitchFamily="34" charset="-120"/>
-              </a:rPr>
-              <a:t>Found</a:t>
-            </a:r>
-            <a:endParaRPr lang="en-US" sz="1000" dirty="0"/>
-          </a:p>
-        </p:txBody>
-      </p:sp>
-      <p:sp>
-        <p:nvSpPr>
-          <p:cNvPr id="20" name="Text 18"/>
-          <p:cNvSpPr txBox="1"/>
-          <p:nvPr/>
-        </p:nvSpPr>
-        <p:spPr>
-          <a:xfrm>
-            <a:off x="6217920" y="2240280"/>
-            <a:ext cx="2240280" cy="914400"/>
+                <a:latin typeface="Cambria" pitchFamily="34" charset="0"/>
+                <a:ea typeface="Cambria" pitchFamily="34" charset="-122"/>
+                <a:cs typeface="Cambria" pitchFamily="34" charset="-120"/>
+              </a:rPr>
+              <a:t>5</a:t>
+            </a:r>
+            <a:endParaRPr lang="en-US" sz="1800" dirty="0"/>
+          </a:p>
+        </p:txBody>
+      </p:sp>
+      <p:sp>
+        <p:nvSpPr>
+          <p:cNvPr id="23" name="Text 21"/>
+          <p:cNvSpPr txBox="1"/>
+          <p:nvPr/>
+        </p:nvSpPr>
+        <p:spPr>
+          <a:xfrm>
+            <a:off x="594360" y="3474720"/>
+            <a:ext cx="1691640" cy="411480"/>
           </a:xfrm>
           <a:prstGeom prst="rect">
             <a:avLst/>
@@ -4253,7 +4276,46 @@
               <a:buNone/>
             </a:pPr>
             <a:r>
-              <a:rPr lang="en-US" sz="1200" dirty="0">
+              <a:rPr lang="en-US" sz="1300" b="1" dirty="0">
+                <a:solidFill>
+                  <a:srgbClr val="0B4F4A"/>
+                </a:solidFill>
+                <a:latin typeface="Cambria" pitchFamily="34" charset="0"/>
+                <a:ea typeface="Cambria" pitchFamily="34" charset="-122"/>
+                <a:cs typeface="Cambria" pitchFamily="34" charset="-120"/>
+              </a:rPr>
+              <a:t>Visa &amp; Mastercard</a:t>
+            </a:r>
+            <a:endParaRPr lang="en-US" sz="1300" dirty="0"/>
+          </a:p>
+        </p:txBody>
+      </p:sp>
+      <p:sp>
+        <p:nvSpPr>
+          <p:cNvPr id="24" name="Text 22"/>
+          <p:cNvSpPr txBox="1"/>
+          <p:nvPr/>
+        </p:nvSpPr>
+        <p:spPr>
+          <a:xfrm>
+            <a:off x="594360" y="3886200"/>
+            <a:ext cx="1691640" cy="548640"/>
+          </a:xfrm>
+          <a:prstGeom prst="rect">
+            <a:avLst/>
+          </a:prstGeom>
+          <a:noFill/>
+          <a:ln/>
+        </p:spPr>
+        <p:txBody>
+          <a:bodyPr wrap="square" lIns="0" tIns="0" rIns="0" bIns="0" rtlCol="0" anchor="t"/>
+          <a:lstStyle/>
+          <a:p>
+            <a:pPr indent="0" marL="0">
+              <a:buNone/>
+            </a:pPr>
+            <a:r>
+              <a:rPr lang="en-US" sz="1100" dirty="0">
                 <a:solidFill>
                   <a:srgbClr val="1D2B2A"/>
                 </a:solidFill>
@@ -4261,22 +4323,49 @@
                 <a:ea typeface="Calibri" pitchFamily="34" charset="-122"/>
                 <a:cs typeface="Calibri" pitchFamily="34" charset="-120"/>
               </a:rPr>
-              <a:t>A product can close to new customers while old holders keep their terms.</a:t>
-            </a:r>
-            <a:endParaRPr lang="en-US" sz="1200" dirty="0"/>
-          </a:p>
-        </p:txBody>
-      </p:sp>
-      <p:sp>
-        <p:nvSpPr>
-          <p:cNvPr id="21" name="Text 19"/>
-          <p:cNvSpPr txBox="1"/>
-          <p:nvPr/>
-        </p:nvSpPr>
-        <p:spPr>
-          <a:xfrm>
-            <a:off x="6217920" y="3154680"/>
-            <a:ext cx="2240280" cy="228600"/>
+              <a:t>Disputes, reason codes, chargebacks</a:t>
+            </a:r>
+            <a:endParaRPr lang="en-US" sz="1100" dirty="0"/>
+          </a:p>
+        </p:txBody>
+      </p:sp>
+      <p:sp>
+        <p:nvSpPr>
+          <p:cNvPr id="25" name="Shape 23"/>
+          <p:cNvSpPr/>
+          <p:nvPr/>
+        </p:nvSpPr>
+        <p:spPr>
+          <a:xfrm>
+            <a:off x="2542032" y="2971800"/>
+            <a:ext cx="1938528" cy="1508760"/>
+          </a:xfrm>
+          <a:prstGeom prst="roundRect">
+            <a:avLst>
+              <a:gd name="adj" fmla="val 4848"/>
+            </a:avLst>
+          </a:prstGeom>
+          <a:solidFill>
+            <a:srgbClr val="E8F0EE"/>
+          </a:solidFill>
+          <a:ln w="12700">
+            <a:solidFill>
+              <a:srgbClr val="E8F0EE"/>
+            </a:solidFill>
+            <a:prstDash val="solid"/>
+          </a:ln>
+        </p:spPr>
+      </p:sp>
+      <p:sp>
+        <p:nvSpPr>
+          <p:cNvPr id="26" name="Text 24"/>
+          <p:cNvSpPr txBox="1"/>
+          <p:nvPr/>
+        </p:nvSpPr>
+        <p:spPr>
+          <a:xfrm>
+            <a:off x="2679192" y="3108960"/>
+            <a:ext cx="365760" cy="365760"/>
           </a:xfrm>
           <a:prstGeom prst="rect">
             <a:avLst/>
@@ -4292,30 +4381,30 @@
               <a:buNone/>
             </a:pPr>
             <a:r>
-              <a:rPr lang="en-US" sz="1000" b="1" dirty="0">
+              <a:rPr lang="en-US" sz="1800" b="1" dirty="0">
                 <a:solidFill>
                   <a:srgbClr val="B8862F"/>
                 </a:solidFill>
-                <a:latin typeface="Calibri" pitchFamily="34" charset="0"/>
-                <a:ea typeface="Calibri" pitchFamily="34" charset="-122"/>
-                <a:cs typeface="Calibri" pitchFamily="34" charset="-120"/>
-              </a:rPr>
-              <a:t>So the model has</a:t>
-            </a:r>
-            <a:endParaRPr lang="en-US" sz="1000" dirty="0"/>
-          </a:p>
-        </p:txBody>
-      </p:sp>
-      <p:sp>
-        <p:nvSpPr>
-          <p:cNvPr id="22" name="Text 20"/>
-          <p:cNvSpPr txBox="1"/>
-          <p:nvPr/>
-        </p:nvSpPr>
-        <p:spPr>
-          <a:xfrm>
-            <a:off x="6217920" y="3383280"/>
-            <a:ext cx="2240280" cy="1097280"/>
+                <a:latin typeface="Cambria" pitchFamily="34" charset="0"/>
+                <a:ea typeface="Cambria" pitchFamily="34" charset="-122"/>
+                <a:cs typeface="Cambria" pitchFamily="34" charset="-120"/>
+              </a:rPr>
+              <a:t>6</a:t>
+            </a:r>
+            <a:endParaRPr lang="en-US" sz="1800" dirty="0"/>
+          </a:p>
+        </p:txBody>
+      </p:sp>
+      <p:sp>
+        <p:nvSpPr>
+          <p:cNvPr id="27" name="Text 25"/>
+          <p:cNvSpPr txBox="1"/>
+          <p:nvPr/>
+        </p:nvSpPr>
+        <p:spPr>
+          <a:xfrm>
+            <a:off x="2679192" y="3474720"/>
+            <a:ext cx="1691640" cy="411480"/>
           </a:xfrm>
           <a:prstGeom prst="rect">
             <a:avLst/>
@@ -4331,7 +4420,46 @@
               <a:buNone/>
             </a:pPr>
             <a:r>
-              <a:rPr lang="en-US" sz="1200" dirty="0">
+              <a:rPr lang="en-US" sz="1300" b="1" dirty="0">
+                <a:solidFill>
+                  <a:srgbClr val="0B4F4A"/>
+                </a:solidFill>
+                <a:latin typeface="Cambria" pitchFamily="34" charset="0"/>
+                <a:ea typeface="Cambria" pitchFamily="34" charset="-122"/>
+                <a:cs typeface="Cambria" pitchFamily="34" charset="-120"/>
+              </a:rPr>
+              <a:t>IFRS 9</a:t>
+            </a:r>
+            <a:endParaRPr lang="en-US" sz="1300" dirty="0"/>
+          </a:p>
+        </p:txBody>
+      </p:sp>
+      <p:sp>
+        <p:nvSpPr>
+          <p:cNvPr id="28" name="Text 26"/>
+          <p:cNvSpPr txBox="1"/>
+          <p:nvPr/>
+        </p:nvSpPr>
+        <p:spPr>
+          <a:xfrm>
+            <a:off x="2679192" y="3886200"/>
+            <a:ext cx="1691640" cy="548640"/>
+          </a:xfrm>
+          <a:prstGeom prst="rect">
+            <a:avLst/>
+          </a:prstGeom>
+          <a:noFill/>
+          <a:ln/>
+        </p:spPr>
+        <p:txBody>
+          <a:bodyPr wrap="square" lIns="0" tIns="0" rIns="0" bIns="0" rtlCol="0" anchor="t"/>
+          <a:lstStyle/>
+          <a:p>
+            <a:pPr indent="0" marL="0">
+              <a:buNone/>
+            </a:pPr>
+            <a:r>
+              <a:rPr lang="en-US" sz="1100" dirty="0">
                 <a:solidFill>
                   <a:srgbClr val="1D2B2A"/>
                 </a:solidFill>
@@ -4339,9 +4467,336 @@
                 <a:ea typeface="Calibri" pitchFamily="34" charset="-122"/>
                 <a:cs typeface="Calibri" pitchFamily="34" charset="-120"/>
               </a:rPr>
-              <a:t>ProductDefinition (the offer) vs Arrangement (what a customer holds, pinned to a terms version).</a:t>
-            </a:r>
-            <a:endParaRPr lang="en-US" sz="1200" dirty="0"/>
+              <a:t>Loan modification and restructuring</a:t>
+            </a:r>
+            <a:endParaRPr lang="en-US" sz="1100" dirty="0"/>
+          </a:p>
+        </p:txBody>
+      </p:sp>
+      <p:sp>
+        <p:nvSpPr>
+          <p:cNvPr id="29" name="Shape 27"/>
+          <p:cNvSpPr/>
+          <p:nvPr/>
+        </p:nvSpPr>
+        <p:spPr>
+          <a:xfrm>
+            <a:off x="4626864" y="2971800"/>
+            <a:ext cx="1938528" cy="1508760"/>
+          </a:xfrm>
+          <a:prstGeom prst="roundRect">
+            <a:avLst>
+              <a:gd name="adj" fmla="val 4848"/>
+            </a:avLst>
+          </a:prstGeom>
+          <a:solidFill>
+            <a:srgbClr val="E8F0EE"/>
+          </a:solidFill>
+          <a:ln w="12700">
+            <a:solidFill>
+              <a:srgbClr val="E8F0EE"/>
+            </a:solidFill>
+            <a:prstDash val="solid"/>
+          </a:ln>
+        </p:spPr>
+      </p:sp>
+      <p:sp>
+        <p:nvSpPr>
+          <p:cNvPr id="30" name="Text 28"/>
+          <p:cNvSpPr txBox="1"/>
+          <p:nvPr/>
+        </p:nvSpPr>
+        <p:spPr>
+          <a:xfrm>
+            <a:off x="4764024" y="3108960"/>
+            <a:ext cx="365760" cy="365760"/>
+          </a:xfrm>
+          <a:prstGeom prst="rect">
+            <a:avLst/>
+          </a:prstGeom>
+          <a:noFill/>
+          <a:ln/>
+        </p:spPr>
+        <p:txBody>
+          <a:bodyPr wrap="square" lIns="0" tIns="0" rIns="0" bIns="0" rtlCol="0" anchor="ctr"/>
+          <a:lstStyle/>
+          <a:p>
+            <a:pPr indent="0" marL="0">
+              <a:buNone/>
+            </a:pPr>
+            <a:r>
+              <a:rPr lang="en-US" sz="1800" b="1" dirty="0">
+                <a:solidFill>
+                  <a:srgbClr val="B8862F"/>
+                </a:solidFill>
+                <a:latin typeface="Cambria" pitchFamily="34" charset="0"/>
+                <a:ea typeface="Cambria" pitchFamily="34" charset="-122"/>
+                <a:cs typeface="Cambria" pitchFamily="34" charset="-120"/>
+              </a:rPr>
+              <a:t>7</a:t>
+            </a:r>
+            <a:endParaRPr lang="en-US" sz="1800" dirty="0"/>
+          </a:p>
+        </p:txBody>
+      </p:sp>
+      <p:sp>
+        <p:nvSpPr>
+          <p:cNvPr id="31" name="Text 29"/>
+          <p:cNvSpPr txBox="1"/>
+          <p:nvPr/>
+        </p:nvSpPr>
+        <p:spPr>
+          <a:xfrm>
+            <a:off x="4764024" y="3474720"/>
+            <a:ext cx="1691640" cy="411480"/>
+          </a:xfrm>
+          <a:prstGeom prst="rect">
+            <a:avLst/>
+          </a:prstGeom>
+          <a:noFill/>
+          <a:ln/>
+        </p:spPr>
+        <p:txBody>
+          <a:bodyPr wrap="square" lIns="0" tIns="0" rIns="0" bIns="0" rtlCol="0" anchor="t"/>
+          <a:lstStyle/>
+          <a:p>
+            <a:pPr indent="0" marL="0">
+              <a:buNone/>
+            </a:pPr>
+            <a:r>
+              <a:rPr lang="en-US" sz="1300" b="1" dirty="0">
+                <a:solidFill>
+                  <a:srgbClr val="0B4F4A"/>
+                </a:solidFill>
+                <a:latin typeface="Cambria" pitchFamily="34" charset="0"/>
+                <a:ea typeface="Cambria" pitchFamily="34" charset="-122"/>
+                <a:cs typeface="Cambria" pitchFamily="34" charset="-120"/>
+              </a:rPr>
+              <a:t>BIAN</a:t>
+            </a:r>
+            <a:endParaRPr lang="en-US" sz="1300" dirty="0"/>
+          </a:p>
+        </p:txBody>
+      </p:sp>
+      <p:sp>
+        <p:nvSpPr>
+          <p:cNvPr id="32" name="Text 30"/>
+          <p:cNvSpPr txBox="1"/>
+          <p:nvPr/>
+        </p:nvSpPr>
+        <p:spPr>
+          <a:xfrm>
+            <a:off x="4764024" y="3886200"/>
+            <a:ext cx="1691640" cy="548640"/>
+          </a:xfrm>
+          <a:prstGeom prst="rect">
+            <a:avLst/>
+          </a:prstGeom>
+          <a:noFill/>
+          <a:ln/>
+        </p:spPr>
+        <p:txBody>
+          <a:bodyPr wrap="square" lIns="0" tIns="0" rIns="0" bIns="0" rtlCol="0" anchor="t"/>
+          <a:lstStyle/>
+          <a:p>
+            <a:pPr indent="0" marL="0">
+              <a:buNone/>
+            </a:pPr>
+            <a:r>
+              <a:rPr lang="en-US" sz="1100" dirty="0">
+                <a:solidFill>
+                  <a:srgbClr val="1D2B2A"/>
+                </a:solidFill>
+                <a:latin typeface="Calibri" pitchFamily="34" charset="0"/>
+                <a:ea typeface="Calibri" pitchFamily="34" charset="-122"/>
+                <a:cs typeface="Calibri" pitchFamily="34" charset="-120"/>
+              </a:rPr>
+              <a:t>Product catalogue vs customer agreement</a:t>
+            </a:r>
+            <a:endParaRPr lang="en-US" sz="1100" dirty="0"/>
+          </a:p>
+        </p:txBody>
+      </p:sp>
+      <p:sp>
+        <p:nvSpPr>
+          <p:cNvPr id="33" name="Shape 31"/>
+          <p:cNvSpPr/>
+          <p:nvPr/>
+        </p:nvSpPr>
+        <p:spPr>
+          <a:xfrm>
+            <a:off x="6711696" y="2971800"/>
+            <a:ext cx="1938528" cy="1508760"/>
+          </a:xfrm>
+          <a:prstGeom prst="roundRect">
+            <a:avLst>
+              <a:gd name="adj" fmla="val 4848"/>
+            </a:avLst>
+          </a:prstGeom>
+          <a:solidFill>
+            <a:srgbClr val="E8F0EE"/>
+          </a:solidFill>
+          <a:ln w="12700">
+            <a:solidFill>
+              <a:srgbClr val="E8F0EE"/>
+            </a:solidFill>
+            <a:prstDash val="solid"/>
+          </a:ln>
+        </p:spPr>
+      </p:sp>
+      <p:sp>
+        <p:nvSpPr>
+          <p:cNvPr id="34" name="Text 32"/>
+          <p:cNvSpPr txBox="1"/>
+          <p:nvPr/>
+        </p:nvSpPr>
+        <p:spPr>
+          <a:xfrm>
+            <a:off x="6848856" y="3108960"/>
+            <a:ext cx="365760" cy="365760"/>
+          </a:xfrm>
+          <a:prstGeom prst="rect">
+            <a:avLst/>
+          </a:prstGeom>
+          <a:noFill/>
+          <a:ln/>
+        </p:spPr>
+        <p:txBody>
+          <a:bodyPr wrap="square" lIns="0" tIns="0" rIns="0" bIns="0" rtlCol="0" anchor="ctr"/>
+          <a:lstStyle/>
+          <a:p>
+            <a:pPr indent="0" marL="0">
+              <a:buNone/>
+            </a:pPr>
+            <a:r>
+              <a:rPr lang="en-US" sz="1800" b="1" dirty="0">
+                <a:solidFill>
+                  <a:srgbClr val="B8862F"/>
+                </a:solidFill>
+                <a:latin typeface="Cambria" pitchFamily="34" charset="0"/>
+                <a:ea typeface="Cambria" pitchFamily="34" charset="-122"/>
+                <a:cs typeface="Cambria" pitchFamily="34" charset="-120"/>
+              </a:rPr>
+              <a:t>8</a:t>
+            </a:r>
+            <a:endParaRPr lang="en-US" sz="1800" dirty="0"/>
+          </a:p>
+        </p:txBody>
+      </p:sp>
+      <p:sp>
+        <p:nvSpPr>
+          <p:cNvPr id="35" name="Text 33"/>
+          <p:cNvSpPr txBox="1"/>
+          <p:nvPr/>
+        </p:nvSpPr>
+        <p:spPr>
+          <a:xfrm>
+            <a:off x="6848856" y="3474720"/>
+            <a:ext cx="1691640" cy="411480"/>
+          </a:xfrm>
+          <a:prstGeom prst="rect">
+            <a:avLst/>
+          </a:prstGeom>
+          <a:noFill/>
+          <a:ln/>
+        </p:spPr>
+        <p:txBody>
+          <a:bodyPr wrap="square" lIns="0" tIns="0" rIns="0" bIns="0" rtlCol="0" anchor="t"/>
+          <a:lstStyle/>
+          <a:p>
+            <a:pPr indent="0" marL="0">
+              <a:buNone/>
+            </a:pPr>
+            <a:r>
+              <a:rPr lang="en-US" sz="1300" b="1" dirty="0">
+                <a:solidFill>
+                  <a:srgbClr val="0B4F4A"/>
+                </a:solidFill>
+                <a:latin typeface="Cambria" pitchFamily="34" charset="0"/>
+                <a:ea typeface="Cambria" pitchFamily="34" charset="-122"/>
+                <a:cs typeface="Cambria" pitchFamily="34" charset="-120"/>
+              </a:rPr>
+              <a:t>Fowler, Analysis Patterns</a:t>
+            </a:r>
+            <a:endParaRPr lang="en-US" sz="1300" dirty="0"/>
+          </a:p>
+        </p:txBody>
+      </p:sp>
+      <p:sp>
+        <p:nvSpPr>
+          <p:cNvPr id="36" name="Text 34"/>
+          <p:cNvSpPr txBox="1"/>
+          <p:nvPr/>
+        </p:nvSpPr>
+        <p:spPr>
+          <a:xfrm>
+            <a:off x="6848856" y="3886200"/>
+            <a:ext cx="1691640" cy="548640"/>
+          </a:xfrm>
+          <a:prstGeom prst="rect">
+            <a:avLst/>
+          </a:prstGeom>
+          <a:noFill/>
+          <a:ln/>
+        </p:spPr>
+        <p:txBody>
+          <a:bodyPr wrap="square" lIns="0" tIns="0" rIns="0" bIns="0" rtlCol="0" anchor="t"/>
+          <a:lstStyle/>
+          <a:p>
+            <a:pPr indent="0" marL="0">
+              <a:buNone/>
+            </a:pPr>
+            <a:r>
+              <a:rPr lang="en-US" sz="1100" dirty="0">
+                <a:solidFill>
+                  <a:srgbClr val="1D2B2A"/>
+                </a:solidFill>
+                <a:latin typeface="Calibri" pitchFamily="34" charset="0"/>
+                <a:ea typeface="Calibri" pitchFamily="34" charset="-122"/>
+                <a:cs typeface="Calibri" pitchFamily="34" charset="-120"/>
+              </a:rPr>
+              <a:t>Party roles and time-dated records</a:t>
+            </a:r>
+            <a:endParaRPr lang="en-US" sz="1100" dirty="0"/>
+          </a:p>
+        </p:txBody>
+      </p:sp>
+      <p:sp>
+        <p:nvSpPr>
+          <p:cNvPr id="37" name="Text 35"/>
+          <p:cNvSpPr txBox="1"/>
+          <p:nvPr/>
+        </p:nvSpPr>
+        <p:spPr>
+          <a:xfrm>
+            <a:off x="457200" y="4663440"/>
+            <a:ext cx="8229600" cy="274320"/>
+          </a:xfrm>
+          <a:prstGeom prst="rect">
+            <a:avLst/>
+          </a:prstGeom>
+          <a:noFill/>
+          <a:ln/>
+        </p:spPr>
+        <p:txBody>
+          <a:bodyPr wrap="square" lIns="0" tIns="0" rIns="0" bIns="0" rtlCol="0" anchor="ctr"/>
+          <a:lstStyle/>
+          <a:p>
+            <a:pPr indent="0" marL="0">
+              <a:buNone/>
+            </a:pPr>
+            <a:r>
+              <a:rPr lang="en-US" sz="1050" i="1" dirty="0">
+                <a:solidFill>
+                  <a:srgbClr val="5B6B69"/>
+                </a:solidFill>
+                <a:latin typeface="Calibri" pitchFamily="34" charset="0"/>
+                <a:ea typeface="Calibri" pitchFamily="34" charset="-122"/>
+                <a:cs typeface="Calibri" pitchFamily="34" charset="-120"/>
+              </a:rPr>
+              <a:t>Full references and a 27-term glossary are in the design report, section 1</a:t>
+            </a:r>
+            <a:endParaRPr lang="en-US" sz="1050" dirty="0"/>
           </a:p>
         </p:txBody>
       </p:sp>
@@ -4410,7 +4865,7 @@
                 <a:ea typeface="Cambria" pitchFamily="34" charset="-122"/>
                 <a:cs typeface="Cambria" pitchFamily="34" charset="-120"/>
               </a:rPr>
-              <a:t>Class model after research</a:t>
+              <a:t>How the research changed my design</a:t>
             </a:r>
             <a:endParaRPr lang="en-US" sz="2600" dirty="0"/>
           </a:p>
@@ -4449,7 +4904,7 @@
                 <a:ea typeface="Calibri" pitchFamily="34" charset="-122"/>
                 <a:cs typeface="Calibri" pitchFamily="34" charset="-120"/>
               </a:rPr>
-              <a:t>Four hierarchies (inheritance) plus standalone classes linked by association</a:t>
+              <a:t>My first idea, what the research showed, and the design I adopted</a:t>
             </a:r>
             <a:endParaRPr lang="en-US" sz="1200" dirty="0"/>
           </a:p>
@@ -4494,6 +4949,20 @@
               <a:buNone/>
             </a:pPr>
             <a:r>
+              <a:rPr lang="en-US" sz="1000" b="1" dirty="0">
+                <a:solidFill>
+                  <a:srgbClr val="B8862F"/>
+                </a:solidFill>
+                <a:latin typeface="Calibri" pitchFamily="34" charset="0"/>
+                <a:ea typeface="Calibri" pitchFamily="34" charset="-122"/>
+                <a:cs typeface="Calibri" pitchFamily="34" charset="-120"/>
+              </a:rPr>
+              <a:t>  ›  Research</a:t>
+            </a:r>
+            <a:pPr algn="r" indent="0" marL="0">
+              <a:buNone/>
+            </a:pPr>
+            <a:r>
               <a:rPr lang="en-US" sz="1000" dirty="0">
                 <a:solidFill>
                   <a:srgbClr val="9AAAA7"/>
@@ -4502,88 +4971,338 @@
                 <a:ea typeface="Calibri" pitchFamily="34" charset="-122"/>
                 <a:cs typeface="Calibri" pitchFamily="34" charset="-120"/>
               </a:rPr>
-              <a:t>  ›  Research</a:t>
+              <a:t>  ›  Design</a:t>
             </a:r>
             <a:pPr algn="r" indent="0" marL="0">
               <a:buNone/>
             </a:pPr>
             <a:r>
+              <a:rPr lang="en-US" sz="1000" dirty="0">
+                <a:solidFill>
+                  <a:srgbClr val="9AAAA7"/>
+                </a:solidFill>
+                <a:latin typeface="Calibri" pitchFamily="34" charset="0"/>
+                <a:ea typeface="Calibri" pitchFamily="34" charset="-122"/>
+                <a:cs typeface="Calibri" pitchFamily="34" charset="-120"/>
+              </a:rPr>
+              <a:t>  ›  Build</a:t>
+            </a:r>
+            <a:pPr algn="r" indent="0" marL="0">
+              <a:buNone/>
+            </a:pPr>
+            <a:r>
+              <a:rPr lang="en-US" sz="1000" dirty="0">
+                <a:solidFill>
+                  <a:srgbClr val="9AAAA7"/>
+                </a:solidFill>
+                <a:latin typeface="Calibri" pitchFamily="34" charset="0"/>
+                <a:ea typeface="Calibri" pitchFamily="34" charset="-122"/>
+                <a:cs typeface="Calibri" pitchFamily="34" charset="-120"/>
+              </a:rPr>
+              <a:t>  ›  Next</a:t>
+            </a:r>
+            <a:endParaRPr lang="en-US" sz="1000" dirty="0"/>
+          </a:p>
+        </p:txBody>
+      </p:sp>
+      <p:sp>
+        <p:nvSpPr>
+          <p:cNvPr id="5" name="Shape 3"/>
+          <p:cNvSpPr/>
+          <p:nvPr/>
+        </p:nvSpPr>
+        <p:spPr>
+          <a:xfrm>
+            <a:off x="457200" y="1280160"/>
+            <a:ext cx="2606040" cy="3291840"/>
+          </a:xfrm>
+          <a:prstGeom prst="roundRect">
+            <a:avLst>
+              <a:gd name="adj" fmla="val 2807"/>
+            </a:avLst>
+          </a:prstGeom>
+          <a:solidFill>
+            <a:srgbClr val="E8F0EE"/>
+          </a:solidFill>
+          <a:ln w="12700">
+            <a:solidFill>
+              <a:srgbClr val="E8F0EE"/>
+            </a:solidFill>
+            <a:prstDash val="solid"/>
+          </a:ln>
+        </p:spPr>
+      </p:sp>
+      <p:sp>
+        <p:nvSpPr>
+          <p:cNvPr id="6" name="Text 4"/>
+          <p:cNvSpPr txBox="1"/>
+          <p:nvPr/>
+        </p:nvSpPr>
+        <p:spPr>
+          <a:xfrm>
+            <a:off x="640080" y="1417320"/>
+            <a:ext cx="2240280" cy="548640"/>
+          </a:xfrm>
+          <a:prstGeom prst="rect">
+            <a:avLst/>
+          </a:prstGeom>
+          <a:noFill/>
+          <a:ln/>
+        </p:spPr>
+        <p:txBody>
+          <a:bodyPr wrap="square" lIns="0" tIns="0" rIns="0" bIns="0" rtlCol="0" anchor="t"/>
+          <a:lstStyle/>
+          <a:p>
+            <a:pPr indent="0" marL="0">
+              <a:buNone/>
+            </a:pPr>
+            <a:r>
+              <a:rPr lang="en-US" sz="1500" b="1" dirty="0">
+                <a:solidFill>
+                  <a:srgbClr val="0B4F4A"/>
+                </a:solidFill>
+                <a:latin typeface="Cambria" pitchFamily="34" charset="0"/>
+                <a:ea typeface="Cambria" pitchFamily="34" charset="-122"/>
+                <a:cs typeface="Cambria" pitchFamily="34" charset="-120"/>
+              </a:rPr>
+              <a:t>One person, many roles</a:t>
+            </a:r>
+            <a:endParaRPr lang="en-US" sz="1500" dirty="0"/>
+          </a:p>
+        </p:txBody>
+      </p:sp>
+      <p:sp>
+        <p:nvSpPr>
+          <p:cNvPr id="7" name="Text 5"/>
+          <p:cNvSpPr txBox="1"/>
+          <p:nvPr/>
+        </p:nvSpPr>
+        <p:spPr>
+          <a:xfrm>
+            <a:off x="640080" y="2011680"/>
+            <a:ext cx="2240280" cy="228600"/>
+          </a:xfrm>
+          <a:prstGeom prst="rect">
+            <a:avLst/>
+          </a:prstGeom>
+          <a:noFill/>
+          <a:ln/>
+        </p:spPr>
+        <p:txBody>
+          <a:bodyPr wrap="square" lIns="0" tIns="0" rIns="0" bIns="0" rtlCol="0" anchor="ctr"/>
+          <a:lstStyle/>
+          <a:p>
+            <a:pPr indent="0" marL="0">
+              <a:buNone/>
+            </a:pPr>
+            <a:r>
               <a:rPr lang="en-US" sz="1000" b="1" dirty="0">
                 <a:solidFill>
+                  <a:srgbClr val="5B6B69"/>
+                </a:solidFill>
+                <a:latin typeface="Calibri" pitchFamily="34" charset="0"/>
+                <a:ea typeface="Calibri" pitchFamily="34" charset="-122"/>
+                <a:cs typeface="Calibri" pitchFamily="34" charset="-120"/>
+              </a:rPr>
+              <a:t>First idea</a:t>
+            </a:r>
+            <a:endParaRPr lang="en-US" sz="1000" dirty="0"/>
+          </a:p>
+        </p:txBody>
+      </p:sp>
+      <p:sp>
+        <p:nvSpPr>
+          <p:cNvPr id="8" name="Text 6"/>
+          <p:cNvSpPr txBox="1"/>
+          <p:nvPr/>
+        </p:nvSpPr>
+        <p:spPr>
+          <a:xfrm>
+            <a:off x="640080" y="2240280"/>
+            <a:ext cx="2240280" cy="822960"/>
+          </a:xfrm>
+          <a:prstGeom prst="rect">
+            <a:avLst/>
+          </a:prstGeom>
+          <a:noFill/>
+          <a:ln/>
+        </p:spPr>
+        <p:txBody>
+          <a:bodyPr wrap="square" lIns="0" tIns="0" rIns="0" bIns="0" rtlCol="0" anchor="t"/>
+          <a:lstStyle/>
+          <a:p>
+            <a:pPr indent="0" marL="0">
+              <a:buNone/>
+            </a:pPr>
+            <a:r>
+              <a:rPr lang="en-US" sz="1200" strike="sngStrike" dirty="0">
+                <a:solidFill>
+                  <a:srgbClr val="5B6B69"/>
+                </a:solidFill>
+                <a:latin typeface="Calibri" pitchFamily="34" charset="0"/>
+                <a:ea typeface="Calibri" pitchFamily="34" charset="-122"/>
+                <a:cs typeface="Calibri" pitchFamily="34" charset="-120"/>
+              </a:rPr>
+              <a:t>Customer, Director, Signatory as subclasses of Person</a:t>
+            </a:r>
+            <a:endParaRPr lang="en-US" sz="1200" dirty="0"/>
+          </a:p>
+        </p:txBody>
+      </p:sp>
+      <p:sp>
+        <p:nvSpPr>
+          <p:cNvPr id="9" name="Text 7"/>
+          <p:cNvSpPr txBox="1"/>
+          <p:nvPr/>
+        </p:nvSpPr>
+        <p:spPr>
+          <a:xfrm>
+            <a:off x="640080" y="3108960"/>
+            <a:ext cx="2240280" cy="228600"/>
+          </a:xfrm>
+          <a:prstGeom prst="rect">
+            <a:avLst/>
+          </a:prstGeom>
+          <a:noFill/>
+          <a:ln/>
+        </p:spPr>
+        <p:txBody>
+          <a:bodyPr wrap="square" lIns="0" tIns="0" rIns="0" bIns="0" rtlCol="0" anchor="ctr"/>
+          <a:lstStyle/>
+          <a:p>
+            <a:pPr indent="0" marL="0">
+              <a:buNone/>
+            </a:pPr>
+            <a:r>
+              <a:rPr lang="en-US" sz="1000" b="1" dirty="0">
+                <a:solidFill>
                   <a:srgbClr val="B8862F"/>
                 </a:solidFill>
                 <a:latin typeface="Calibri" pitchFamily="34" charset="0"/>
                 <a:ea typeface="Calibri" pitchFamily="34" charset="-122"/>
                 <a:cs typeface="Calibri" pitchFamily="34" charset="-120"/>
               </a:rPr>
-              <a:t>  ›  Design</a:t>
-            </a:r>
-            <a:pPr algn="r" indent="0" marL="0">
-              <a:buNone/>
-            </a:pPr>
-            <a:r>
-              <a:rPr lang="en-US" sz="1000" dirty="0">
-                <a:solidFill>
-                  <a:srgbClr val="9AAAA7"/>
-                </a:solidFill>
-                <a:latin typeface="Calibri" pitchFamily="34" charset="0"/>
-                <a:ea typeface="Calibri" pitchFamily="34" charset="-122"/>
-                <a:cs typeface="Calibri" pitchFamily="34" charset="-120"/>
-              </a:rPr>
-              <a:t>  ›  Build</a:t>
-            </a:r>
-            <a:pPr algn="r" indent="0" marL="0">
-              <a:buNone/>
-            </a:pPr>
-            <a:r>
-              <a:rPr lang="en-US" sz="1000" dirty="0">
-                <a:solidFill>
-                  <a:srgbClr val="9AAAA7"/>
-                </a:solidFill>
-                <a:latin typeface="Calibri" pitchFamily="34" charset="0"/>
-                <a:ea typeface="Calibri" pitchFamily="34" charset="-122"/>
-                <a:cs typeface="Calibri" pitchFamily="34" charset="-120"/>
-              </a:rPr>
-              <a:t>  ›  Next</a:t>
+              <a:t>After research</a:t>
             </a:r>
             <a:endParaRPr lang="en-US" sz="1000" dirty="0"/>
           </a:p>
         </p:txBody>
       </p:sp>
-      <p:pic>
-        <p:nvPicPr>
-          <p:cNvPr id="5" name="Image 0" descr="/home/user/commercial-banking/docs/class_diagram.png">    </p:cNvPr>
-          <p:cNvPicPr>
-            <a:picLocks noChangeAspect="1"/>
-          </p:cNvPicPr>
-          <p:nvPr/>
-        </p:nvPicPr>
-        <p:blipFill>
-          <a:blip r:embed="rId1"/>
-          <a:stretch>
-            <a:fillRect/>
-          </a:stretch>
-        </p:blipFill>
-        <p:spPr>
-          <a:xfrm>
-            <a:off x="380426" y="1188720"/>
-            <a:ext cx="8383148" cy="3429000"/>
-          </a:xfrm>
-          <a:prstGeom prst="rect">
-            <a:avLst/>
-          </a:prstGeom>
-        </p:spPr>
-      </p:pic>
-      <p:sp>
-        <p:nvSpPr>
-          <p:cNvPr id="6" name="Text 3"/>
-          <p:cNvSpPr txBox="1"/>
-          <p:nvPr/>
-        </p:nvSpPr>
-        <p:spPr>
-          <a:xfrm>
-            <a:off x="457200" y="4663440"/>
-            <a:ext cx="8229600" cy="274320"/>
+      <p:sp>
+        <p:nvSpPr>
+          <p:cNvPr id="10" name="Text 8"/>
+          <p:cNvSpPr txBox="1"/>
+          <p:nvPr/>
+        </p:nvSpPr>
+        <p:spPr>
+          <a:xfrm>
+            <a:off x="640080" y="3337560"/>
+            <a:ext cx="2240280" cy="1143000"/>
+          </a:xfrm>
+          <a:prstGeom prst="rect">
+            <a:avLst/>
+          </a:prstGeom>
+          <a:noFill/>
+          <a:ln/>
+        </p:spPr>
+        <p:txBody>
+          <a:bodyPr wrap="square" lIns="0" tIns="0" rIns="0" bIns="0" rtlCol="0" anchor="t"/>
+          <a:lstStyle/>
+          <a:p>
+            <a:pPr indent="0" marL="0">
+              <a:buNone/>
+            </a:pPr>
+            <a:r>
+              <a:rPr lang="en-US" sz="1200" b="1" dirty="0">
+                <a:solidFill>
+                  <a:srgbClr val="1D2B2A"/>
+                </a:solidFill>
+                <a:latin typeface="Calibri" pitchFamily="34" charset="0"/>
+                <a:ea typeface="Calibri" pitchFamily="34" charset="-122"/>
+                <a:cs typeface="Calibri" pitchFamily="34" charset="-120"/>
+              </a:rPr>
+              <a:t>One Person record; roles are dated objects (Mandate, OfficerRole)</a:t>
+            </a:r>
+            <a:endParaRPr lang="en-US" sz="1200" dirty="0"/>
+          </a:p>
+        </p:txBody>
+      </p:sp>
+      <p:sp>
+        <p:nvSpPr>
+          <p:cNvPr id="11" name="Shape 9"/>
+          <p:cNvSpPr/>
+          <p:nvPr/>
+        </p:nvSpPr>
+        <p:spPr>
+          <a:xfrm>
+            <a:off x="3246120" y="1280160"/>
+            <a:ext cx="2606040" cy="3291840"/>
+          </a:xfrm>
+          <a:prstGeom prst="roundRect">
+            <a:avLst>
+              <a:gd name="adj" fmla="val 2807"/>
+            </a:avLst>
+          </a:prstGeom>
+          <a:solidFill>
+            <a:srgbClr val="E8F0EE"/>
+          </a:solidFill>
+          <a:ln w="12700">
+            <a:solidFill>
+              <a:srgbClr val="E8F0EE"/>
+            </a:solidFill>
+            <a:prstDash val="solid"/>
+          </a:ln>
+        </p:spPr>
+      </p:sp>
+      <p:sp>
+        <p:nvSpPr>
+          <p:cNvPr id="12" name="Text 10"/>
+          <p:cNvSpPr txBox="1"/>
+          <p:nvPr/>
+        </p:nvSpPr>
+        <p:spPr>
+          <a:xfrm>
+            <a:off x="3429000" y="1417320"/>
+            <a:ext cx="2240280" cy="548640"/>
+          </a:xfrm>
+          <a:prstGeom prst="rect">
+            <a:avLst/>
+          </a:prstGeom>
+          <a:noFill/>
+          <a:ln/>
+        </p:spPr>
+        <p:txBody>
+          <a:bodyPr wrap="square" lIns="0" tIns="0" rIns="0" bIns="0" rtlCol="0" anchor="t"/>
+          <a:lstStyle/>
+          <a:p>
+            <a:pPr indent="0" marL="0">
+              <a:buNone/>
+            </a:pPr>
+            <a:r>
+              <a:rPr lang="en-US" sz="1500" b="1" dirty="0">
+                <a:solidFill>
+                  <a:srgbClr val="0B4F4A"/>
+                </a:solidFill>
+                <a:latin typeface="Cambria" pitchFamily="34" charset="0"/>
+                <a:ea typeface="Cambria" pitchFamily="34" charset="-122"/>
+                <a:cs typeface="Cambria" pitchFamily="34" charset="-120"/>
+              </a:rPr>
+              <a:t>Nothing is erased</a:t>
+            </a:r>
+            <a:endParaRPr lang="en-US" sz="1500" dirty="0"/>
+          </a:p>
+        </p:txBody>
+      </p:sp>
+      <p:sp>
+        <p:nvSpPr>
+          <p:cNvPr id="13" name="Text 11"/>
+          <p:cNvSpPr txBox="1"/>
+          <p:nvPr/>
+        </p:nvSpPr>
+        <p:spPr>
+          <a:xfrm>
+            <a:off x="3429000" y="2011680"/>
+            <a:ext cx="2240280" cy="228600"/>
           </a:xfrm>
           <a:prstGeom prst="rect">
             <a:avLst/>
@@ -4599,7 +5318,7 @@
               <a:buNone/>
             </a:pPr>
             <a:r>
-              <a:rPr lang="en-US" sz="1050" i="1" dirty="0">
+              <a:rPr lang="en-US" sz="1000" b="1" dirty="0">
                 <a:solidFill>
                   <a:srgbClr val="5B6B69"/>
                 </a:solidFill>
@@ -4607,9 +5326,348 @@
                 <a:ea typeface="Calibri" pitchFamily="34" charset="-122"/>
                 <a:cs typeface="Calibri" pitchFamily="34" charset="-120"/>
               </a:rPr>
-              <a:t>Full diagram in the design report; generated from the code, so it cannot drift from it</a:t>
-            </a:r>
-            <a:endParaRPr lang="en-US" sz="1050" dirty="0"/>
+              <a:t>First idea</a:t>
+            </a:r>
+            <a:endParaRPr lang="en-US" sz="1000" dirty="0"/>
+          </a:p>
+        </p:txBody>
+      </p:sp>
+      <p:sp>
+        <p:nvSpPr>
+          <p:cNvPr id="14" name="Text 12"/>
+          <p:cNvSpPr txBox="1"/>
+          <p:nvPr/>
+        </p:nvSpPr>
+        <p:spPr>
+          <a:xfrm>
+            <a:off x="3429000" y="2240280"/>
+            <a:ext cx="2240280" cy="822960"/>
+          </a:xfrm>
+          <a:prstGeom prst="rect">
+            <a:avLst/>
+          </a:prstGeom>
+          <a:noFill/>
+          <a:ln/>
+        </p:spPr>
+        <p:txBody>
+          <a:bodyPr wrap="square" lIns="0" tIns="0" rIns="0" bIns="0" rtlCol="0" anchor="t"/>
+          <a:lstStyle/>
+          <a:p>
+            <a:pPr indent="0" marL="0">
+              <a:buNone/>
+            </a:pPr>
+            <a:r>
+              <a:rPr lang="en-US" sz="1200" strike="sngStrike" dirty="0">
+                <a:solidFill>
+                  <a:srgbClr val="5B6B69"/>
+                </a:solidFill>
+                <a:latin typeface="Calibri" pitchFamily="34" charset="0"/>
+                <a:ea typeface="Calibri" pitchFamily="34" charset="-122"/>
+                <a:cs typeface="Calibri" pitchFamily="34" charset="-120"/>
+              </a:rPr>
+              <a:t>Mark a wrong payment as “refunded”</a:t>
+            </a:r>
+            <a:endParaRPr lang="en-US" sz="1200" dirty="0"/>
+          </a:p>
+        </p:txBody>
+      </p:sp>
+      <p:sp>
+        <p:nvSpPr>
+          <p:cNvPr id="15" name="Text 13"/>
+          <p:cNvSpPr txBox="1"/>
+          <p:nvPr/>
+        </p:nvSpPr>
+        <p:spPr>
+          <a:xfrm>
+            <a:off x="3429000" y="3108960"/>
+            <a:ext cx="2240280" cy="228600"/>
+          </a:xfrm>
+          <a:prstGeom prst="rect">
+            <a:avLst/>
+          </a:prstGeom>
+          <a:noFill/>
+          <a:ln/>
+        </p:spPr>
+        <p:txBody>
+          <a:bodyPr wrap="square" lIns="0" tIns="0" rIns="0" bIns="0" rtlCol="0" anchor="ctr"/>
+          <a:lstStyle/>
+          <a:p>
+            <a:pPr indent="0" marL="0">
+              <a:buNone/>
+            </a:pPr>
+            <a:r>
+              <a:rPr lang="en-US" sz="1000" b="1" dirty="0">
+                <a:solidFill>
+                  <a:srgbClr val="B8862F"/>
+                </a:solidFill>
+                <a:latin typeface="Calibri" pitchFamily="34" charset="0"/>
+                <a:ea typeface="Calibri" pitchFamily="34" charset="-122"/>
+                <a:cs typeface="Calibri" pitchFamily="34" charset="-120"/>
+              </a:rPr>
+              <a:t>After research</a:t>
+            </a:r>
+            <a:endParaRPr lang="en-US" sz="1000" dirty="0"/>
+          </a:p>
+        </p:txBody>
+      </p:sp>
+      <p:sp>
+        <p:nvSpPr>
+          <p:cNvPr id="16" name="Text 14"/>
+          <p:cNvSpPr txBox="1"/>
+          <p:nvPr/>
+        </p:nvSpPr>
+        <p:spPr>
+          <a:xfrm>
+            <a:off x="3429000" y="3337560"/>
+            <a:ext cx="2240280" cy="1143000"/>
+          </a:xfrm>
+          <a:prstGeom prst="rect">
+            <a:avLst/>
+          </a:prstGeom>
+          <a:noFill/>
+          <a:ln/>
+        </p:spPr>
+        <p:txBody>
+          <a:bodyPr wrap="square" lIns="0" tIns="0" rIns="0" bIns="0" rtlCol="0" anchor="t"/>
+          <a:lstStyle/>
+          <a:p>
+            <a:pPr indent="0" marL="0">
+              <a:buNone/>
+            </a:pPr>
+            <a:r>
+              <a:rPr lang="en-US" sz="1200" b="1" dirty="0">
+                <a:solidFill>
+                  <a:srgbClr val="1D2B2A"/>
+                </a:solidFill>
+                <a:latin typeface="Calibri" pitchFamily="34" charset="0"/>
+                <a:ea typeface="Calibri" pitchFamily="34" charset="-122"/>
+                <a:cs typeface="Calibri" pitchFamily="34" charset="-120"/>
+              </a:rPr>
+              <a:t>Reversal and Chargeback: new transactions linked to the original</a:t>
+            </a:r>
+            <a:endParaRPr lang="en-US" sz="1200" dirty="0"/>
+          </a:p>
+        </p:txBody>
+      </p:sp>
+      <p:sp>
+        <p:nvSpPr>
+          <p:cNvPr id="17" name="Shape 15"/>
+          <p:cNvSpPr/>
+          <p:nvPr/>
+        </p:nvSpPr>
+        <p:spPr>
+          <a:xfrm>
+            <a:off x="6035040" y="1280160"/>
+            <a:ext cx="2606040" cy="3291840"/>
+          </a:xfrm>
+          <a:prstGeom prst="roundRect">
+            <a:avLst>
+              <a:gd name="adj" fmla="val 2807"/>
+            </a:avLst>
+          </a:prstGeom>
+          <a:solidFill>
+            <a:srgbClr val="E8F0EE"/>
+          </a:solidFill>
+          <a:ln w="12700">
+            <a:solidFill>
+              <a:srgbClr val="E8F0EE"/>
+            </a:solidFill>
+            <a:prstDash val="solid"/>
+          </a:ln>
+        </p:spPr>
+      </p:sp>
+      <p:sp>
+        <p:nvSpPr>
+          <p:cNvPr id="18" name="Text 16"/>
+          <p:cNvSpPr txBox="1"/>
+          <p:nvPr/>
+        </p:nvSpPr>
+        <p:spPr>
+          <a:xfrm>
+            <a:off x="6217920" y="1417320"/>
+            <a:ext cx="2240280" cy="548640"/>
+          </a:xfrm>
+          <a:prstGeom prst="rect">
+            <a:avLst/>
+          </a:prstGeom>
+          <a:noFill/>
+          <a:ln/>
+        </p:spPr>
+        <p:txBody>
+          <a:bodyPr wrap="square" lIns="0" tIns="0" rIns="0" bIns="0" rtlCol="0" anchor="t"/>
+          <a:lstStyle/>
+          <a:p>
+            <a:pPr indent="0" marL="0">
+              <a:buNone/>
+            </a:pPr>
+            <a:r>
+              <a:rPr lang="en-US" sz="1500" b="1" dirty="0">
+                <a:solidFill>
+                  <a:srgbClr val="0B4F4A"/>
+                </a:solidFill>
+                <a:latin typeface="Cambria" pitchFamily="34" charset="0"/>
+                <a:ea typeface="Cambria" pitchFamily="34" charset="-122"/>
+                <a:cs typeface="Cambria" pitchFamily="34" charset="-120"/>
+              </a:rPr>
+              <a:t>Offer ≠ what a customer holds</a:t>
+            </a:r>
+            <a:endParaRPr lang="en-US" sz="1500" dirty="0"/>
+          </a:p>
+        </p:txBody>
+      </p:sp>
+      <p:sp>
+        <p:nvSpPr>
+          <p:cNvPr id="19" name="Text 17"/>
+          <p:cNvSpPr txBox="1"/>
+          <p:nvPr/>
+        </p:nvSpPr>
+        <p:spPr>
+          <a:xfrm>
+            <a:off x="6217920" y="2011680"/>
+            <a:ext cx="2240280" cy="228600"/>
+          </a:xfrm>
+          <a:prstGeom prst="rect">
+            <a:avLst/>
+          </a:prstGeom>
+          <a:noFill/>
+          <a:ln/>
+        </p:spPr>
+        <p:txBody>
+          <a:bodyPr wrap="square" lIns="0" tIns="0" rIns="0" bIns="0" rtlCol="0" anchor="ctr"/>
+          <a:lstStyle/>
+          <a:p>
+            <a:pPr indent="0" marL="0">
+              <a:buNone/>
+            </a:pPr>
+            <a:r>
+              <a:rPr lang="en-US" sz="1000" b="1" dirty="0">
+                <a:solidFill>
+                  <a:srgbClr val="5B6B69"/>
+                </a:solidFill>
+                <a:latin typeface="Calibri" pitchFamily="34" charset="0"/>
+                <a:ea typeface="Calibri" pitchFamily="34" charset="-122"/>
+                <a:cs typeface="Calibri" pitchFamily="34" charset="-120"/>
+              </a:rPr>
+              <a:t>First idea</a:t>
+            </a:r>
+            <a:endParaRPr lang="en-US" sz="1000" dirty="0"/>
+          </a:p>
+        </p:txBody>
+      </p:sp>
+      <p:sp>
+        <p:nvSpPr>
+          <p:cNvPr id="20" name="Text 18"/>
+          <p:cNvSpPr txBox="1"/>
+          <p:nvPr/>
+        </p:nvSpPr>
+        <p:spPr>
+          <a:xfrm>
+            <a:off x="6217920" y="2240280"/>
+            <a:ext cx="2240280" cy="822960"/>
+          </a:xfrm>
+          <a:prstGeom prst="rect">
+            <a:avLst/>
+          </a:prstGeom>
+          <a:noFill/>
+          <a:ln/>
+        </p:spPr>
+        <p:txBody>
+          <a:bodyPr wrap="square" lIns="0" tIns="0" rIns="0" bIns="0" rtlCol="0" anchor="t"/>
+          <a:lstStyle/>
+          <a:p>
+            <a:pPr indent="0" marL="0">
+              <a:buNone/>
+            </a:pPr>
+            <a:r>
+              <a:rPr lang="en-US" sz="1200" strike="sngStrike" dirty="0">
+                <a:solidFill>
+                  <a:srgbClr val="5B6B69"/>
+                </a:solidFill>
+                <a:latin typeface="Calibri" pitchFamily="34" charset="0"/>
+                <a:ea typeface="Calibri" pitchFamily="34" charset="-122"/>
+                <a:cs typeface="Calibri" pitchFamily="34" charset="-120"/>
+              </a:rPr>
+              <a:t>One class for a product and a customer’s account</a:t>
+            </a:r>
+            <a:endParaRPr lang="en-US" sz="1200" dirty="0"/>
+          </a:p>
+        </p:txBody>
+      </p:sp>
+      <p:sp>
+        <p:nvSpPr>
+          <p:cNvPr id="21" name="Text 19"/>
+          <p:cNvSpPr txBox="1"/>
+          <p:nvPr/>
+        </p:nvSpPr>
+        <p:spPr>
+          <a:xfrm>
+            <a:off x="6217920" y="3108960"/>
+            <a:ext cx="2240280" cy="228600"/>
+          </a:xfrm>
+          <a:prstGeom prst="rect">
+            <a:avLst/>
+          </a:prstGeom>
+          <a:noFill/>
+          <a:ln/>
+        </p:spPr>
+        <p:txBody>
+          <a:bodyPr wrap="square" lIns="0" tIns="0" rIns="0" bIns="0" rtlCol="0" anchor="ctr"/>
+          <a:lstStyle/>
+          <a:p>
+            <a:pPr indent="0" marL="0">
+              <a:buNone/>
+            </a:pPr>
+            <a:r>
+              <a:rPr lang="en-US" sz="1000" b="1" dirty="0">
+                <a:solidFill>
+                  <a:srgbClr val="B8862F"/>
+                </a:solidFill>
+                <a:latin typeface="Calibri" pitchFamily="34" charset="0"/>
+                <a:ea typeface="Calibri" pitchFamily="34" charset="-122"/>
+                <a:cs typeface="Calibri" pitchFamily="34" charset="-120"/>
+              </a:rPr>
+              <a:t>After research</a:t>
+            </a:r>
+            <a:endParaRPr lang="en-US" sz="1000" dirty="0"/>
+          </a:p>
+        </p:txBody>
+      </p:sp>
+      <p:sp>
+        <p:nvSpPr>
+          <p:cNvPr id="22" name="Text 20"/>
+          <p:cNvSpPr txBox="1"/>
+          <p:nvPr/>
+        </p:nvSpPr>
+        <p:spPr>
+          <a:xfrm>
+            <a:off x="6217920" y="3337560"/>
+            <a:ext cx="2240280" cy="1143000"/>
+          </a:xfrm>
+          <a:prstGeom prst="rect">
+            <a:avLst/>
+          </a:prstGeom>
+          <a:noFill/>
+          <a:ln/>
+        </p:spPr>
+        <p:txBody>
+          <a:bodyPr wrap="square" lIns="0" tIns="0" rIns="0" bIns="0" rtlCol="0" anchor="t"/>
+          <a:lstStyle/>
+          <a:p>
+            <a:pPr indent="0" marL="0">
+              <a:buNone/>
+            </a:pPr>
+            <a:r>
+              <a:rPr lang="en-US" sz="1200" b="1" dirty="0">
+                <a:solidFill>
+                  <a:srgbClr val="1D2B2A"/>
+                </a:solidFill>
+                <a:latin typeface="Calibri" pitchFamily="34" charset="0"/>
+                <a:ea typeface="Calibri" pitchFamily="34" charset="-122"/>
+                <a:cs typeface="Calibri" pitchFamily="34" charset="-120"/>
+              </a:rPr>
+              <a:t>ProductDefinition (versioned terms) vs Arrangement (pins its version)</a:t>
+            </a:r>
+            <a:endParaRPr lang="en-US" sz="1200" dirty="0"/>
           </a:p>
         </p:txBody>
       </p:sp>
@@ -4670,7 +5728,7 @@
               <a:buNone/>
             </a:pPr>
             <a:r>
-              <a:rPr lang="en-US" sz="2300" b="1" dirty="0">
+              <a:rPr lang="en-US" sz="2600" b="1" dirty="0">
                 <a:solidFill>
                   <a:srgbClr val="0B4F4A"/>
                 </a:solidFill>
@@ -4678,9 +5736,9 @@
                 <a:ea typeface="Cambria" pitchFamily="34" charset="-122"/>
                 <a:cs typeface="Cambria" pitchFamily="34" charset="-120"/>
               </a:rPr>
-              <a:t>Multi-level inheritance, and what I rejected</a:t>
-            </a:r>
-            <a:endParaRPr lang="en-US" sz="2300" dirty="0"/>
+              <a:t>Class model after research</a:t>
+            </a:r>
+            <a:endParaRPr lang="en-US" sz="2600" dirty="0"/>
           </a:p>
         </p:txBody>
       </p:sp>
@@ -4717,7 +5775,7 @@
                 <a:ea typeface="Calibri" pitchFamily="34" charset="-122"/>
                 <a:cs typeface="Calibri" pitchFamily="34" charset="-120"/>
               </a:rPr>
-              <a:t>UML: shared data sits at the highest level where every subclass needs it</a:t>
+              <a:t>Four hierarchies (inheritance) plus standalone classes linked by association</a:t>
             </a:r>
             <a:endParaRPr lang="en-US" sz="1200" dirty="0"/>
           </a:p>
@@ -4820,7 +5878,7 @@
       </p:sp>
       <p:pic>
         <p:nvPicPr>
-          <p:cNvPr id="5" name="Image 0" descr="/home/user/commercial-banking/docs/uml_parties.png">    </p:cNvPr>
+          <p:cNvPr id="5" name="Image 0" descr="/home/user/commercial-banking/docs/class_diagram.png">    </p:cNvPr>
           <p:cNvPicPr>
             <a:picLocks noChangeAspect="1"/>
           </p:cNvPicPr>
@@ -4834,48 +5892,24 @@
         </p:blipFill>
         <p:spPr>
           <a:xfrm>
-            <a:off x="365760" y="1434093"/>
-            <a:ext cx="2743200" cy="2343894"/>
+            <a:off x="380426" y="1188720"/>
+            <a:ext cx="8383148" cy="3429000"/>
           </a:xfrm>
           <a:prstGeom prst="rect">
             <a:avLst/>
           </a:prstGeom>
         </p:spPr>
       </p:pic>
-      <p:pic>
-        <p:nvPicPr>
-          <p:cNvPr id="6" name="Image 1" descr="/home/user/commercial-banking/docs/uml_arrangements.png">    </p:cNvPr>
-          <p:cNvPicPr>
-            <a:picLocks noChangeAspect="1"/>
-          </p:cNvPicPr>
-          <p:nvPr/>
-        </p:nvPicPr>
-        <p:blipFill>
-          <a:blip r:embed="rId2"/>
-          <a:stretch>
-            <a:fillRect/>
-          </a:stretch>
-        </p:blipFill>
-        <p:spPr>
-          <a:xfrm>
-            <a:off x="3200400" y="1353977"/>
-            <a:ext cx="2743200" cy="2504125"/>
-          </a:xfrm>
-          <a:prstGeom prst="rect">
-            <a:avLst/>
-          </a:prstGeom>
-        </p:spPr>
-      </p:pic>
-      <p:sp>
-        <p:nvSpPr>
-          <p:cNvPr id="7" name="Text 3"/>
-          <p:cNvSpPr txBox="1"/>
-          <p:nvPr/>
-        </p:nvSpPr>
-        <p:spPr>
-          <a:xfrm>
-            <a:off x="365760" y="4069080"/>
-            <a:ext cx="2743200" cy="274320"/>
+      <p:sp>
+        <p:nvSpPr>
+          <p:cNvPr id="6" name="Text 3"/>
+          <p:cNvSpPr txBox="1"/>
+          <p:nvPr/>
+        </p:nvSpPr>
+        <p:spPr>
+          <a:xfrm>
+            <a:off x="457200" y="4663440"/>
+            <a:ext cx="8229600" cy="274320"/>
           </a:xfrm>
           <a:prstGeom prst="rect">
             <a:avLst/>
@@ -4887,232 +5921,21 @@
           <a:bodyPr wrap="square" lIns="0" tIns="0" rIns="0" bIns="0" rtlCol="0" anchor="ctr"/>
           <a:lstStyle/>
           <a:p>
-            <a:pPr algn="ctr" indent="0" marL="0">
-              <a:buNone/>
-            </a:pPr>
-            <a:r>
-              <a:rPr lang="en-US" sz="1050" b="1" dirty="0">
-                <a:solidFill>
-                  <a:srgbClr val="0B4F4A"/>
-                </a:solidFill>
-                <a:latin typeface="Calibri" pitchFamily="34" charset="0"/>
-                <a:ea typeface="Calibri" pitchFamily="34" charset="-122"/>
-                <a:cs typeface="Calibri" pitchFamily="34" charset="-120"/>
-              </a:rPr>
-              <a:t>Party › Organization › Company / Charity</a:t>
+            <a:pPr indent="0" marL="0">
+              <a:buNone/>
+            </a:pPr>
+            <a:r>
+              <a:rPr lang="en-US" sz="1050" i="1" dirty="0">
+                <a:solidFill>
+                  <a:srgbClr val="5B6B69"/>
+                </a:solidFill>
+                <a:latin typeface="Calibri" pitchFamily="34" charset="0"/>
+                <a:ea typeface="Calibri" pitchFamily="34" charset="-122"/>
+                <a:cs typeface="Calibri" pitchFamily="34" charset="-120"/>
+              </a:rPr>
+              <a:t>Inheritance only for a true “is-a”; everything else is association</a:t>
             </a:r>
             <a:endParaRPr lang="en-US" sz="1050" dirty="0"/>
-          </a:p>
-        </p:txBody>
-      </p:sp>
-      <p:sp>
-        <p:nvSpPr>
-          <p:cNvPr id="8" name="Text 4"/>
-          <p:cNvSpPr txBox="1"/>
-          <p:nvPr/>
-        </p:nvSpPr>
-        <p:spPr>
-          <a:xfrm>
-            <a:off x="3200400" y="4069080"/>
-            <a:ext cx="2743200" cy="274320"/>
-          </a:xfrm>
-          <a:prstGeom prst="rect">
-            <a:avLst/>
-          </a:prstGeom>
-          <a:noFill/>
-          <a:ln/>
-        </p:spPr>
-        <p:txBody>
-          <a:bodyPr wrap="square" lIns="0" tIns="0" rIns="0" bIns="0" rtlCol="0" anchor="ctr"/>
-          <a:lstStyle/>
-          <a:p>
-            <a:pPr algn="ctr" indent="0" marL="0">
-              <a:buNone/>
-            </a:pPr>
-            <a:r>
-              <a:rPr lang="en-US" sz="1050" b="1" dirty="0">
-                <a:solidFill>
-                  <a:srgbClr val="0B4F4A"/>
-                </a:solidFill>
-                <a:latin typeface="Calibri" pitchFamily="34" charset="0"/>
-                <a:ea typeface="Calibri" pitchFamily="34" charset="-122"/>
-                <a:cs typeface="Calibri" pitchFamily="34" charset="-120"/>
-              </a:rPr>
-              <a:t>Arrangement › DepositAccount › Current / Savings / Term</a:t>
-            </a:r>
-            <a:endParaRPr lang="en-US" sz="1050" dirty="0"/>
-          </a:p>
-        </p:txBody>
-      </p:sp>
-      <p:sp>
-        <p:nvSpPr>
-          <p:cNvPr id="9" name="Shape 5"/>
-          <p:cNvSpPr/>
-          <p:nvPr/>
-        </p:nvSpPr>
-        <p:spPr>
-          <a:xfrm>
-            <a:off x="6172200" y="1188720"/>
-            <a:ext cx="2606040" cy="3520440"/>
-          </a:xfrm>
-          <a:prstGeom prst="roundRect">
-            <a:avLst>
-              <a:gd name="adj" fmla="val 2807"/>
-            </a:avLst>
-          </a:prstGeom>
-          <a:solidFill>
-            <a:srgbClr val="E8F0EE"/>
-          </a:solidFill>
-          <a:ln w="12700">
-            <a:solidFill>
-              <a:srgbClr val="E8F0EE"/>
-            </a:solidFill>
-            <a:prstDash val="solid"/>
-          </a:ln>
-        </p:spPr>
-      </p:sp>
-      <p:sp>
-        <p:nvSpPr>
-          <p:cNvPr id="10" name="Text 6"/>
-          <p:cNvSpPr txBox="1"/>
-          <p:nvPr/>
-        </p:nvSpPr>
-        <p:spPr>
-          <a:xfrm>
-            <a:off x="6355080" y="1280160"/>
-            <a:ext cx="2286000" cy="320040"/>
-          </a:xfrm>
-          <a:prstGeom prst="rect">
-            <a:avLst/>
-          </a:prstGeom>
-          <a:noFill/>
-          <a:ln/>
-        </p:spPr>
-        <p:txBody>
-          <a:bodyPr wrap="square" lIns="0" tIns="0" rIns="0" bIns="0" rtlCol="0" anchor="ctr"/>
-          <a:lstStyle/>
-          <a:p>
-            <a:pPr indent="0" marL="0">
-              <a:buNone/>
-            </a:pPr>
-            <a:r>
-              <a:rPr lang="en-US" sz="1500" b="1" dirty="0">
-                <a:solidFill>
-                  <a:srgbClr val="B8862F"/>
-                </a:solidFill>
-                <a:latin typeface="Cambria" pitchFamily="34" charset="0"/>
-                <a:ea typeface="Cambria" pitchFamily="34" charset="-122"/>
-                <a:cs typeface="Cambria" pitchFamily="34" charset="-120"/>
-              </a:rPr>
-              <a:t>Rejected</a:t>
-            </a:r>
-            <a:endParaRPr lang="en-US" sz="1500" dirty="0"/>
-          </a:p>
-        </p:txBody>
-      </p:sp>
-      <p:sp>
-        <p:nvSpPr>
-          <p:cNvPr id="11" name="Text 7"/>
-          <p:cNvSpPr txBox="1"/>
-          <p:nvPr/>
-        </p:nvSpPr>
-        <p:spPr>
-          <a:xfrm>
-            <a:off x="6309360" y="1645920"/>
-            <a:ext cx="2377440" cy="3017520"/>
-          </a:xfrm>
-          <a:prstGeom prst="rect">
-            <a:avLst/>
-          </a:prstGeom>
-          <a:noFill/>
-          <a:ln/>
-        </p:spPr>
-        <p:txBody>
-          <a:bodyPr wrap="square" lIns="635" tIns="635" rIns="635" bIns="635" rtlCol="0" anchor="t"/>
-          <a:lstStyle/>
-          <a:p>
-            <a:pPr marL="342900" indent="-342900">
-              <a:spcAft>
-                <a:spcPts val="600"/>
-              </a:spcAft>
-              <a:buSzPct val="100000"/>
-              <a:buChar char="•"/>
-            </a:pPr>
-            <a:r>
-              <a:rPr lang="en-US" sz="1150" dirty="0">
-                <a:solidFill>
-                  <a:srgbClr val="1D2B2A"/>
-                </a:solidFill>
-                <a:latin typeface="Calibri" pitchFamily="34" charset="0"/>
-                <a:ea typeface="Calibri" pitchFamily="34" charset="-122"/>
-                <a:cs typeface="Calibri" pitchFamily="34" charset="-120"/>
-              </a:rPr>
-              <a:t>Customer(Person): a role that starts and ends, not a kind of person</a:t>
-            </a:r>
-            <a:endParaRPr lang="en-US" sz="1150" dirty="0"/>
-          </a:p>
-          <a:p>
-            <a:pPr marL="342900" indent="-342900">
-              <a:spcAft>
-                <a:spcPts val="600"/>
-              </a:spcAft>
-              <a:buSzPct val="100000"/>
-              <a:buChar char="•"/>
-            </a:pPr>
-            <a:r>
-              <a:rPr lang="en-US" sz="1150" dirty="0">
-                <a:solidFill>
-                  <a:srgbClr val="1D2B2A"/>
-                </a:solidFill>
-                <a:latin typeface="Calibri" pitchFamily="34" charset="0"/>
-                <a:ea typeface="Calibri" pitchFamily="34" charset="-122"/>
-                <a:cs typeface="Calibri" pitchFamily="34" charset="-120"/>
-              </a:rPr>
-              <a:t>Card(Account): a card holds no money; it is linked to an account</a:t>
-            </a:r>
-            <a:endParaRPr lang="en-US" sz="1150" dirty="0"/>
-          </a:p>
-          <a:p>
-            <a:pPr marL="342900" indent="-342900">
-              <a:spcAft>
-                <a:spcPts val="600"/>
-              </a:spcAft>
-              <a:buSzPct val="100000"/>
-              <a:buChar char="•"/>
-            </a:pPr>
-            <a:r>
-              <a:rPr lang="en-US" sz="1150" dirty="0">
-                <a:solidFill>
-                  <a:srgbClr val="1D2B2A"/>
-                </a:solidFill>
-                <a:latin typeface="Calibri" pitchFamily="34" charset="0"/>
-                <a:ea typeface="Calibri" pitchFamily="34" charset="-122"/>
-                <a:cs typeface="Calibri" pitchFamily="34" charset="-120"/>
-              </a:rPr>
-              <a:t>SoleTrader(Organization): legally the person is liable</a:t>
-            </a:r>
-            <a:endParaRPr lang="en-US" sz="1150" dirty="0"/>
-          </a:p>
-          <a:p>
-            <a:pPr marL="342900" indent="-342900">
-              <a:spcAft>
-                <a:spcPts val="600"/>
-              </a:spcAft>
-              <a:buSzPct val="100000"/>
-              <a:buChar char="•"/>
-            </a:pPr>
-            <a:r>
-              <a:rPr lang="en-US" sz="1150" dirty="0">
-                <a:solidFill>
-                  <a:srgbClr val="1D2B2A"/>
-                </a:solidFill>
-                <a:latin typeface="Calibri" pitchFamily="34" charset="0"/>
-                <a:ea typeface="Calibri" pitchFamily="34" charset="-122"/>
-                <a:cs typeface="Calibri" pitchFamily="34" charset="-120"/>
-              </a:rPr>
-              <a:t>MerchantRefund(Reversal): the purchase stays valid</a:t>
-            </a:r>
-            <a:endParaRPr lang="en-US" sz="1150" dirty="0"/>
           </a:p>
         </p:txBody>
       </p:sp>
@@ -5181,7 +6004,7 @@
                 <a:ea typeface="Cambria" pitchFamily="34" charset="-122"/>
                 <a:cs typeface="Cambria" pitchFamily="34" charset="-120"/>
               </a:rPr>
-              <a:t>One workflow end to end: a large transfer</a:t>
+              <a:t>Multi-level inheritance, and what I rejected</a:t>
             </a:r>
             <a:endParaRPr lang="en-US" sz="2300" dirty="0"/>
           </a:p>
@@ -5220,7 +6043,7 @@
                 <a:ea typeface="Calibri" pitchFamily="34" charset="-122"/>
                 <a:cs typeface="Calibri" pitchFamily="34" charset="-120"/>
               </a:rPr>
-              <a:t>Flowchart in standard symbols, in the order the code checks the rules</a:t>
+              <a:t>UML: shared data sits at the highest level where every subclass needs it</a:t>
             </a:r>
             <a:endParaRPr lang="en-US" sz="1200" dirty="0"/>
           </a:p>
@@ -5279,23 +6102,23 @@
               <a:buNone/>
             </a:pPr>
             <a:r>
+              <a:rPr lang="en-US" sz="1000" b="1" dirty="0">
+                <a:solidFill>
+                  <a:srgbClr val="B8862F"/>
+                </a:solidFill>
+                <a:latin typeface="Calibri" pitchFamily="34" charset="0"/>
+                <a:ea typeface="Calibri" pitchFamily="34" charset="-122"/>
+                <a:cs typeface="Calibri" pitchFamily="34" charset="-120"/>
+              </a:rPr>
+              <a:t>  ›  Design</a:t>
+            </a:r>
+            <a:pPr algn="r" indent="0" marL="0">
+              <a:buNone/>
+            </a:pPr>
+            <a:r>
               <a:rPr lang="en-US" sz="1000" dirty="0">
                 <a:solidFill>
                   <a:srgbClr val="9AAAA7"/>
-                </a:solidFill>
-                <a:latin typeface="Calibri" pitchFamily="34" charset="0"/>
-                <a:ea typeface="Calibri" pitchFamily="34" charset="-122"/>
-                <a:cs typeface="Calibri" pitchFamily="34" charset="-120"/>
-              </a:rPr>
-              <a:t>  ›  Design</a:t>
-            </a:r>
-            <a:pPr algn="r" indent="0" marL="0">
-              <a:buNone/>
-            </a:pPr>
-            <a:r>
-              <a:rPr lang="en-US" sz="1000" b="1" dirty="0">
-                <a:solidFill>
-                  <a:srgbClr val="B8862F"/>
                 </a:solidFill>
                 <a:latin typeface="Calibri" pitchFamily="34" charset="0"/>
                 <a:ea typeface="Calibri" pitchFamily="34" charset="-122"/>
@@ -5323,7 +6146,7 @@
       </p:sp>
       <p:pic>
         <p:nvPicPr>
-          <p:cNvPr id="5" name="Image 0" descr="/home/user/commercial-banking/docs/flowchart_3_transfer.png">    </p:cNvPr>
+          <p:cNvPr id="5" name="Image 0" descr="/home/user/commercial-banking/docs/uml_parties.png">    </p:cNvPr>
           <p:cNvPicPr>
             <a:picLocks noChangeAspect="1"/>
           </p:cNvPicPr>
@@ -5337,44 +6160,153 @@
         </p:blipFill>
         <p:spPr>
           <a:xfrm>
-            <a:off x="635801" y="1143000"/>
-            <a:ext cx="2751758" cy="3749040"/>
+            <a:off x="365760" y="1434093"/>
+            <a:ext cx="2743200" cy="2343894"/>
           </a:xfrm>
           <a:prstGeom prst="rect">
             <a:avLst/>
           </a:prstGeom>
         </p:spPr>
       </p:pic>
-      <p:sp>
-        <p:nvSpPr>
-          <p:cNvPr id="6" name="Shape 3"/>
+      <p:pic>
+        <p:nvPicPr>
+          <p:cNvPr id="6" name="Image 1" descr="/home/user/commercial-banking/docs/uml_arrangements.png">    </p:cNvPr>
+          <p:cNvPicPr>
+            <a:picLocks noChangeAspect="1"/>
+          </p:cNvPicPr>
+          <p:nvPr/>
+        </p:nvPicPr>
+        <p:blipFill>
+          <a:blip r:embed="rId2"/>
+          <a:stretch>
+            <a:fillRect/>
+          </a:stretch>
+        </p:blipFill>
+        <p:spPr>
+          <a:xfrm>
+            <a:off x="3200400" y="1353977"/>
+            <a:ext cx="2743200" cy="2504125"/>
+          </a:xfrm>
+          <a:prstGeom prst="rect">
+            <a:avLst/>
+          </a:prstGeom>
+        </p:spPr>
+      </p:pic>
+      <p:sp>
+        <p:nvSpPr>
+          <p:cNvPr id="7" name="Text 3"/>
+          <p:cNvSpPr txBox="1"/>
+          <p:nvPr/>
+        </p:nvSpPr>
+        <p:spPr>
+          <a:xfrm>
+            <a:off x="365760" y="4069080"/>
+            <a:ext cx="2743200" cy="274320"/>
+          </a:xfrm>
+          <a:prstGeom prst="rect">
+            <a:avLst/>
+          </a:prstGeom>
+          <a:noFill/>
+          <a:ln/>
+        </p:spPr>
+        <p:txBody>
+          <a:bodyPr wrap="square" lIns="0" tIns="0" rIns="0" bIns="0" rtlCol="0" anchor="ctr"/>
+          <a:lstStyle/>
+          <a:p>
+            <a:pPr algn="ctr" indent="0" marL="0">
+              <a:buNone/>
+            </a:pPr>
+            <a:r>
+              <a:rPr lang="en-US" sz="1050" b="1" dirty="0">
+                <a:solidFill>
+                  <a:srgbClr val="0B4F4A"/>
+                </a:solidFill>
+                <a:latin typeface="Calibri" pitchFamily="34" charset="0"/>
+                <a:ea typeface="Calibri" pitchFamily="34" charset="-122"/>
+                <a:cs typeface="Calibri" pitchFamily="34" charset="-120"/>
+              </a:rPr>
+              <a:t>Party › Organization › Company / Charity</a:t>
+            </a:r>
+            <a:endParaRPr lang="en-US" sz="1050" dirty="0"/>
+          </a:p>
+        </p:txBody>
+      </p:sp>
+      <p:sp>
+        <p:nvSpPr>
+          <p:cNvPr id="8" name="Text 4"/>
+          <p:cNvSpPr txBox="1"/>
+          <p:nvPr/>
+        </p:nvSpPr>
+        <p:spPr>
+          <a:xfrm>
+            <a:off x="3200400" y="4069080"/>
+            <a:ext cx="2743200" cy="274320"/>
+          </a:xfrm>
+          <a:prstGeom prst="rect">
+            <a:avLst/>
+          </a:prstGeom>
+          <a:noFill/>
+          <a:ln/>
+        </p:spPr>
+        <p:txBody>
+          <a:bodyPr wrap="square" lIns="0" tIns="0" rIns="0" bIns="0" rtlCol="0" anchor="ctr"/>
+          <a:lstStyle/>
+          <a:p>
+            <a:pPr algn="ctr" indent="0" marL="0">
+              <a:buNone/>
+            </a:pPr>
+            <a:r>
+              <a:rPr lang="en-US" sz="1050" b="1" dirty="0">
+                <a:solidFill>
+                  <a:srgbClr val="0B4F4A"/>
+                </a:solidFill>
+                <a:latin typeface="Calibri" pitchFamily="34" charset="0"/>
+                <a:ea typeface="Calibri" pitchFamily="34" charset="-122"/>
+                <a:cs typeface="Calibri" pitchFamily="34" charset="-120"/>
+              </a:rPr>
+              <a:t>Arrangement › DepositAccount › Current / Savings / Term</a:t>
+            </a:r>
+            <a:endParaRPr lang="en-US" sz="1050" dirty="0"/>
+          </a:p>
+        </p:txBody>
+      </p:sp>
+      <p:sp>
+        <p:nvSpPr>
+          <p:cNvPr id="9" name="Shape 5"/>
           <p:cNvSpPr/>
           <p:nvPr/>
         </p:nvSpPr>
         <p:spPr>
           <a:xfrm>
-            <a:off x="4023360" y="1234440"/>
-            <a:ext cx="365760" cy="365760"/>
-          </a:xfrm>
-          <a:prstGeom prst="ellipse">
-            <a:avLst/>
+            <a:off x="6172200" y="1188720"/>
+            <a:ext cx="2606040" cy="3520440"/>
+          </a:xfrm>
+          <a:prstGeom prst="roundRect">
+            <a:avLst>
+              <a:gd name="adj" fmla="val 2807"/>
+            </a:avLst>
           </a:prstGeom>
           <a:solidFill>
-            <a:srgbClr val="B8862F"/>
+            <a:srgbClr val="E8F0EE"/>
           </a:solidFill>
-          <a:ln/>
-        </p:spPr>
-      </p:sp>
-      <p:sp>
-        <p:nvSpPr>
-          <p:cNvPr id="7" name="Text 4"/>
-          <p:cNvSpPr txBox="1"/>
-          <p:nvPr/>
-        </p:nvSpPr>
-        <p:spPr>
-          <a:xfrm>
-            <a:off x="4023360" y="1234440"/>
-            <a:ext cx="365760" cy="365760"/>
+          <a:ln w="12700">
+            <a:solidFill>
+              <a:srgbClr val="E8F0EE"/>
+            </a:solidFill>
+            <a:prstDash val="solid"/>
+          </a:ln>
+        </p:spPr>
+      </p:sp>
+      <p:sp>
+        <p:nvSpPr>
+          <p:cNvPr id="10" name="Text 6"/>
+          <p:cNvSpPr txBox="1"/>
+          <p:nvPr/>
+        </p:nvSpPr>
+        <p:spPr>
+          <a:xfrm>
+            <a:off x="6355080" y="1280160"/>
+            <a:ext cx="2286000" cy="320040"/>
           </a:xfrm>
           <a:prstGeom prst="rect">
             <a:avLst/>
@@ -5386,67 +6318,54 @@
           <a:bodyPr wrap="square" lIns="0" tIns="0" rIns="0" bIns="0" rtlCol="0" anchor="ctr"/>
           <a:lstStyle/>
           <a:p>
-            <a:pPr algn="ctr" indent="0" marL="0">
-              <a:buNone/>
-            </a:pPr>
-            <a:r>
-              <a:rPr lang="en-US" sz="1300" b="1" dirty="0">
-                <a:solidFill>
-                  <a:srgbClr val="FFFFFF"/>
+            <a:pPr indent="0" marL="0">
+              <a:buNone/>
+            </a:pPr>
+            <a:r>
+              <a:rPr lang="en-US" sz="1500" b="1" dirty="0">
+                <a:solidFill>
+                  <a:srgbClr val="B8862F"/>
                 </a:solidFill>
                 <a:latin typeface="Cambria" pitchFamily="34" charset="0"/>
                 <a:ea typeface="Cambria" pitchFamily="34" charset="-122"/>
                 <a:cs typeface="Cambria" pitchFamily="34" charset="-120"/>
               </a:rPr>
-              <a:t>1</a:t>
-            </a:r>
-            <a:endParaRPr lang="en-US" sz="1300" dirty="0"/>
-          </a:p>
-        </p:txBody>
-      </p:sp>
-      <p:sp>
-        <p:nvSpPr>
-          <p:cNvPr id="8" name="Text 5"/>
-          <p:cNvSpPr txBox="1"/>
-          <p:nvPr/>
-        </p:nvSpPr>
-        <p:spPr>
-          <a:xfrm>
-            <a:off x="4572000" y="1188720"/>
-            <a:ext cx="4114800" cy="658368"/>
-          </a:xfrm>
-          <a:prstGeom prst="rect">
-            <a:avLst/>
-          </a:prstGeom>
-          <a:noFill/>
-          <a:ln/>
-        </p:spPr>
-        <p:txBody>
-          <a:bodyPr wrap="square" lIns="0" tIns="0" rIns="0" bIns="0" rtlCol="0" anchor="t"/>
-          <a:lstStyle/>
-          <a:p>
-            <a:pPr indent="0" marL="0">
-              <a:buNone/>
-            </a:pPr>
-            <a:r>
-              <a:rPr lang="en-US" sz="1200" b="1" dirty="0">
-                <a:solidFill>
-                  <a:srgbClr val="0B4F4A"/>
-                </a:solidFill>
-                <a:latin typeface="Calibri" pitchFamily="34" charset="0"/>
-                <a:ea typeface="Calibri" pitchFamily="34" charset="-122"/>
-                <a:cs typeface="Calibri" pitchFamily="34" charset="-120"/>
-              </a:rPr>
-              <a:t>Authority</a:t>
-            </a:r>
-            <a:endParaRPr lang="en-US" sz="1200" dirty="0"/>
-          </a:p>
-          <a:p>
-            <a:pPr indent="0" marL="0">
-              <a:buNone/>
-            </a:pPr>
-            <a:r>
-              <a:rPr lang="en-US" sz="1200" dirty="0">
+              <a:t>Rejected</a:t>
+            </a:r>
+            <a:endParaRPr lang="en-US" sz="1500" dirty="0"/>
+          </a:p>
+        </p:txBody>
+      </p:sp>
+      <p:sp>
+        <p:nvSpPr>
+          <p:cNvPr id="11" name="Text 7"/>
+          <p:cNvSpPr txBox="1"/>
+          <p:nvPr/>
+        </p:nvSpPr>
+        <p:spPr>
+          <a:xfrm>
+            <a:off x="6309360" y="1645920"/>
+            <a:ext cx="2377440" cy="3017520"/>
+          </a:xfrm>
+          <a:prstGeom prst="rect">
+            <a:avLst/>
+          </a:prstGeom>
+          <a:noFill/>
+          <a:ln/>
+        </p:spPr>
+        <p:txBody>
+          <a:bodyPr wrap="square" lIns="635" tIns="635" rIns="635" bIns="635" rtlCol="0" anchor="t"/>
+          <a:lstStyle/>
+          <a:p>
+            <a:pPr marL="342900" indent="-342900">
+              <a:spcAft>
+                <a:spcPts val="600"/>
+              </a:spcAft>
+              <a:buSzPct val="100000"/>
+              <a:buChar char="•"/>
+            </a:pPr>
+            <a:r>
+              <a:rPr lang="en-US" sz="1150" dirty="0">
                 <a:solidFill>
                   <a:srgbClr val="1D2B2A"/>
                 </a:solidFill>
@@ -5454,114 +6373,20 @@
                 <a:ea typeface="Calibri" pitchFamily="34" charset="-122"/>
                 <a:cs typeface="Calibri" pitchFamily="34" charset="-120"/>
               </a:rPr>
-              <a:t>Does this person hold a live payments mandate?</a:t>
-            </a:r>
-            <a:endParaRPr lang="en-US" sz="1200" dirty="0"/>
-          </a:p>
-        </p:txBody>
-      </p:sp>
-      <p:sp>
-        <p:nvSpPr>
-          <p:cNvPr id="9" name="Shape 6"/>
-          <p:cNvSpPr/>
-          <p:nvPr/>
-        </p:nvSpPr>
-        <p:spPr>
-          <a:xfrm>
-            <a:off x="4023360" y="1965960"/>
-            <a:ext cx="365760" cy="365760"/>
-          </a:xfrm>
-          <a:prstGeom prst="ellipse">
-            <a:avLst/>
-          </a:prstGeom>
-          <a:solidFill>
-            <a:srgbClr val="B8862F"/>
-          </a:solidFill>
-          <a:ln/>
-        </p:spPr>
-      </p:sp>
-      <p:sp>
-        <p:nvSpPr>
-          <p:cNvPr id="10" name="Text 7"/>
-          <p:cNvSpPr txBox="1"/>
-          <p:nvPr/>
-        </p:nvSpPr>
-        <p:spPr>
-          <a:xfrm>
-            <a:off x="4023360" y="1965960"/>
-            <a:ext cx="365760" cy="365760"/>
-          </a:xfrm>
-          <a:prstGeom prst="rect">
-            <a:avLst/>
-          </a:prstGeom>
-          <a:noFill/>
-          <a:ln/>
-        </p:spPr>
-        <p:txBody>
-          <a:bodyPr wrap="square" lIns="0" tIns="0" rIns="0" bIns="0" rtlCol="0" anchor="ctr"/>
-          <a:lstStyle/>
-          <a:p>
-            <a:pPr algn="ctr" indent="0" marL="0">
-              <a:buNone/>
-            </a:pPr>
-            <a:r>
-              <a:rPr lang="en-US" sz="1300" b="1" dirty="0">
-                <a:solidFill>
-                  <a:srgbClr val="FFFFFF"/>
-                </a:solidFill>
-                <a:latin typeface="Cambria" pitchFamily="34" charset="0"/>
-                <a:ea typeface="Cambria" pitchFamily="34" charset="-122"/>
-                <a:cs typeface="Cambria" pitchFamily="34" charset="-120"/>
-              </a:rPr>
-              <a:t>2</a:t>
-            </a:r>
-            <a:endParaRPr lang="en-US" sz="1300" dirty="0"/>
-          </a:p>
-        </p:txBody>
-      </p:sp>
-      <p:sp>
-        <p:nvSpPr>
-          <p:cNvPr id="11" name="Text 8"/>
-          <p:cNvSpPr txBox="1"/>
-          <p:nvPr/>
-        </p:nvSpPr>
-        <p:spPr>
-          <a:xfrm>
-            <a:off x="4572000" y="1920240"/>
-            <a:ext cx="4114800" cy="658368"/>
-          </a:xfrm>
-          <a:prstGeom prst="rect">
-            <a:avLst/>
-          </a:prstGeom>
-          <a:noFill/>
-          <a:ln/>
-        </p:spPr>
-        <p:txBody>
-          <a:bodyPr wrap="square" lIns="0" tIns="0" rIns="0" bIns="0" rtlCol="0" anchor="t"/>
-          <a:lstStyle/>
-          <a:p>
-            <a:pPr indent="0" marL="0">
-              <a:buNone/>
-            </a:pPr>
-            <a:r>
-              <a:rPr lang="en-US" sz="1200" b="1" dirty="0">
-                <a:solidFill>
-                  <a:srgbClr val="0B4F4A"/>
-                </a:solidFill>
-                <a:latin typeface="Calibri" pitchFamily="34" charset="0"/>
-                <a:ea typeface="Calibri" pitchFamily="34" charset="-122"/>
-                <a:cs typeface="Calibri" pitchFamily="34" charset="-120"/>
-              </a:rPr>
-              <a:t>Funds and limits</a:t>
-            </a:r>
-            <a:endParaRPr lang="en-US" sz="1200" dirty="0"/>
-          </a:p>
-          <a:p>
-            <a:pPr indent="0" marL="0">
-              <a:buNone/>
-            </a:pPr>
-            <a:r>
-              <a:rPr lang="en-US" sz="1200" dirty="0">
+              <a:t>Customer(Person): a role that starts and ends, not a kind of person</a:t>
+            </a:r>
+            <a:endParaRPr lang="en-US" sz="1150" dirty="0"/>
+          </a:p>
+          <a:p>
+            <a:pPr marL="342900" indent="-342900">
+              <a:spcAft>
+                <a:spcPts val="600"/>
+              </a:spcAft>
+              <a:buSzPct val="100000"/>
+              <a:buChar char="•"/>
+            </a:pPr>
+            <a:r>
+              <a:rPr lang="en-US" sz="1150" dirty="0">
                 <a:solidFill>
                   <a:srgbClr val="1D2B2A"/>
                 </a:solidFill>
@@ -5569,114 +6394,20 @@
                 <a:ea typeface="Calibri" pitchFamily="34" charset="-122"/>
                 <a:cs typeface="Calibri" pitchFamily="34" charset="-120"/>
               </a:rPr>
-              <a:t>Enough available balance, within the mandate limit?</a:t>
-            </a:r>
-            <a:endParaRPr lang="en-US" sz="1200" dirty="0"/>
-          </a:p>
-        </p:txBody>
-      </p:sp>
-      <p:sp>
-        <p:nvSpPr>
-          <p:cNvPr id="12" name="Shape 9"/>
-          <p:cNvSpPr/>
-          <p:nvPr/>
-        </p:nvSpPr>
-        <p:spPr>
-          <a:xfrm>
-            <a:off x="4023360" y="2697480"/>
-            <a:ext cx="365760" cy="365760"/>
-          </a:xfrm>
-          <a:prstGeom prst="ellipse">
-            <a:avLst/>
-          </a:prstGeom>
-          <a:solidFill>
-            <a:srgbClr val="B8862F"/>
-          </a:solidFill>
-          <a:ln/>
-        </p:spPr>
-      </p:sp>
-      <p:sp>
-        <p:nvSpPr>
-          <p:cNvPr id="13" name="Text 10"/>
-          <p:cNvSpPr txBox="1"/>
-          <p:nvPr/>
-        </p:nvSpPr>
-        <p:spPr>
-          <a:xfrm>
-            <a:off x="4023360" y="2697480"/>
-            <a:ext cx="365760" cy="365760"/>
-          </a:xfrm>
-          <a:prstGeom prst="rect">
-            <a:avLst/>
-          </a:prstGeom>
-          <a:noFill/>
-          <a:ln/>
-        </p:spPr>
-        <p:txBody>
-          <a:bodyPr wrap="square" lIns="0" tIns="0" rIns="0" bIns="0" rtlCol="0" anchor="ctr"/>
-          <a:lstStyle/>
-          <a:p>
-            <a:pPr algn="ctr" indent="0" marL="0">
-              <a:buNone/>
-            </a:pPr>
-            <a:r>
-              <a:rPr lang="en-US" sz="1300" b="1" dirty="0">
-                <a:solidFill>
-                  <a:srgbClr val="FFFFFF"/>
-                </a:solidFill>
-                <a:latin typeface="Cambria" pitchFamily="34" charset="0"/>
-                <a:ea typeface="Cambria" pitchFamily="34" charset="-122"/>
-                <a:cs typeface="Cambria" pitchFamily="34" charset="-120"/>
-              </a:rPr>
-              <a:t>3</a:t>
-            </a:r>
-            <a:endParaRPr lang="en-US" sz="1300" dirty="0"/>
-          </a:p>
-        </p:txBody>
-      </p:sp>
-      <p:sp>
-        <p:nvSpPr>
-          <p:cNvPr id="14" name="Text 11"/>
-          <p:cNvSpPr txBox="1"/>
-          <p:nvPr/>
-        </p:nvSpPr>
-        <p:spPr>
-          <a:xfrm>
-            <a:off x="4572000" y="2651760"/>
-            <a:ext cx="4114800" cy="658368"/>
-          </a:xfrm>
-          <a:prstGeom prst="rect">
-            <a:avLst/>
-          </a:prstGeom>
-          <a:noFill/>
-          <a:ln/>
-        </p:spPr>
-        <p:txBody>
-          <a:bodyPr wrap="square" lIns="0" tIns="0" rIns="0" bIns="0" rtlCol="0" anchor="t"/>
-          <a:lstStyle/>
-          <a:p>
-            <a:pPr indent="0" marL="0">
-              <a:buNone/>
-            </a:pPr>
-            <a:r>
-              <a:rPr lang="en-US" sz="1200" b="1" dirty="0">
-                <a:solidFill>
-                  <a:srgbClr val="0B4F4A"/>
-                </a:solidFill>
-                <a:latin typeface="Calibri" pitchFamily="34" charset="0"/>
-                <a:ea typeface="Calibri" pitchFamily="34" charset="-122"/>
-                <a:cs typeface="Calibri" pitchFamily="34" charset="-120"/>
-              </a:rPr>
-              <a:t>Dual control</a:t>
-            </a:r>
-            <a:endParaRPr lang="en-US" sz="1200" dirty="0"/>
-          </a:p>
-          <a:p>
-            <a:pPr indent="0" marL="0">
-              <a:buNone/>
-            </a:pPr>
-            <a:r>
-              <a:rPr lang="en-US" sz="1200" dirty="0">
+              <a:t>Card(Account): a card holds no money; it is linked to an account</a:t>
+            </a:r>
+            <a:endParaRPr lang="en-US" sz="1150" dirty="0"/>
+          </a:p>
+          <a:p>
+            <a:pPr marL="342900" indent="-342900">
+              <a:spcAft>
+                <a:spcPts val="600"/>
+              </a:spcAft>
+              <a:buSzPct val="100000"/>
+              <a:buChar char="•"/>
+            </a:pPr>
+            <a:r>
+              <a:rPr lang="en-US" sz="1150" dirty="0">
                 <a:solidFill>
                   <a:srgbClr val="1D2B2A"/>
                 </a:solidFill>
@@ -5684,114 +6415,20 @@
                 <a:ea typeface="Calibri" pitchFamily="34" charset="-122"/>
                 <a:cs typeface="Calibri" pitchFamily="34" charset="-120"/>
               </a:rPr>
-              <a:t>Above the threshold, a second signatory must approve</a:t>
-            </a:r>
-            <a:endParaRPr lang="en-US" sz="1200" dirty="0"/>
-          </a:p>
-        </p:txBody>
-      </p:sp>
-      <p:sp>
-        <p:nvSpPr>
-          <p:cNvPr id="15" name="Shape 12"/>
-          <p:cNvSpPr/>
-          <p:nvPr/>
-        </p:nvSpPr>
-        <p:spPr>
-          <a:xfrm>
-            <a:off x="4023360" y="3429000"/>
-            <a:ext cx="365760" cy="365760"/>
-          </a:xfrm>
-          <a:prstGeom prst="ellipse">
-            <a:avLst/>
-          </a:prstGeom>
-          <a:solidFill>
-            <a:srgbClr val="B8862F"/>
-          </a:solidFill>
-          <a:ln/>
-        </p:spPr>
-      </p:sp>
-      <p:sp>
-        <p:nvSpPr>
-          <p:cNvPr id="16" name="Text 13"/>
-          <p:cNvSpPr txBox="1"/>
-          <p:nvPr/>
-        </p:nvSpPr>
-        <p:spPr>
-          <a:xfrm>
-            <a:off x="4023360" y="3429000"/>
-            <a:ext cx="365760" cy="365760"/>
-          </a:xfrm>
-          <a:prstGeom prst="rect">
-            <a:avLst/>
-          </a:prstGeom>
-          <a:noFill/>
-          <a:ln/>
-        </p:spPr>
-        <p:txBody>
-          <a:bodyPr wrap="square" lIns="0" tIns="0" rIns="0" bIns="0" rtlCol="0" anchor="ctr"/>
-          <a:lstStyle/>
-          <a:p>
-            <a:pPr algn="ctr" indent="0" marL="0">
-              <a:buNone/>
-            </a:pPr>
-            <a:r>
-              <a:rPr lang="en-US" sz="1300" b="1" dirty="0">
-                <a:solidFill>
-                  <a:srgbClr val="FFFFFF"/>
-                </a:solidFill>
-                <a:latin typeface="Cambria" pitchFamily="34" charset="0"/>
-                <a:ea typeface="Cambria" pitchFamily="34" charset="-122"/>
-                <a:cs typeface="Cambria" pitchFamily="34" charset="-120"/>
-              </a:rPr>
-              <a:t>4</a:t>
-            </a:r>
-            <a:endParaRPr lang="en-US" sz="1300" dirty="0"/>
-          </a:p>
-        </p:txBody>
-      </p:sp>
-      <p:sp>
-        <p:nvSpPr>
-          <p:cNvPr id="17" name="Text 14"/>
-          <p:cNvSpPr txBox="1"/>
-          <p:nvPr/>
-        </p:nvSpPr>
-        <p:spPr>
-          <a:xfrm>
-            <a:off x="4572000" y="3383280"/>
-            <a:ext cx="4114800" cy="658368"/>
-          </a:xfrm>
-          <a:prstGeom prst="rect">
-            <a:avLst/>
-          </a:prstGeom>
-          <a:noFill/>
-          <a:ln/>
-        </p:spPr>
-        <p:txBody>
-          <a:bodyPr wrap="square" lIns="0" tIns="0" rIns="0" bIns="0" rtlCol="0" anchor="t"/>
-          <a:lstStyle/>
-          <a:p>
-            <a:pPr indent="0" marL="0">
-              <a:buNone/>
-            </a:pPr>
-            <a:r>
-              <a:rPr lang="en-US" sz="1200" b="1" dirty="0">
-                <a:solidFill>
-                  <a:srgbClr val="0B4F4A"/>
-                </a:solidFill>
-                <a:latin typeface="Calibri" pitchFamily="34" charset="0"/>
-                <a:ea typeface="Calibri" pitchFamily="34" charset="-122"/>
-                <a:cs typeface="Calibri" pitchFamily="34" charset="-120"/>
-              </a:rPr>
-              <a:t>Compliance hold</a:t>
-            </a:r>
-            <a:endParaRPr lang="en-US" sz="1200" dirty="0"/>
-          </a:p>
-          <a:p>
-            <a:pPr indent="0" marL="0">
-              <a:buNone/>
-            </a:pPr>
-            <a:r>
-              <a:rPr lang="en-US" sz="1200" dirty="0">
+              <a:t>SoleTrader(Organization): legally the person is liable</a:t>
+            </a:r>
+            <a:endParaRPr lang="en-US" sz="1150" dirty="0"/>
+          </a:p>
+          <a:p>
+            <a:pPr marL="342900" indent="-342900">
+              <a:spcAft>
+                <a:spcPts val="600"/>
+              </a:spcAft>
+              <a:buSzPct val="100000"/>
+              <a:buChar char="•"/>
+            </a:pPr>
+            <a:r>
+              <a:rPr lang="en-US" sz="1150" dirty="0">
                 <a:solidFill>
                   <a:srgbClr val="1D2B2A"/>
                 </a:solidFill>
@@ -5799,124 +6436,9 @@
                 <a:ea typeface="Calibri" pitchFamily="34" charset="-122"/>
                 <a:cs typeface="Calibri" pitchFamily="34" charset="-120"/>
               </a:rPr>
-              <a:t>Very large transfers wait for review, then release</a:t>
-            </a:r>
-            <a:endParaRPr lang="en-US" sz="1200" dirty="0"/>
-          </a:p>
-        </p:txBody>
-      </p:sp>
-      <p:sp>
-        <p:nvSpPr>
-          <p:cNvPr id="18" name="Shape 15"/>
-          <p:cNvSpPr/>
-          <p:nvPr/>
-        </p:nvSpPr>
-        <p:spPr>
-          <a:xfrm>
-            <a:off x="4023360" y="4160520"/>
-            <a:ext cx="365760" cy="365760"/>
-          </a:xfrm>
-          <a:prstGeom prst="ellipse">
-            <a:avLst/>
-          </a:prstGeom>
-          <a:solidFill>
-            <a:srgbClr val="B8862F"/>
-          </a:solidFill>
-          <a:ln/>
-        </p:spPr>
-      </p:sp>
-      <p:sp>
-        <p:nvSpPr>
-          <p:cNvPr id="19" name="Text 16"/>
-          <p:cNvSpPr txBox="1"/>
-          <p:nvPr/>
-        </p:nvSpPr>
-        <p:spPr>
-          <a:xfrm>
-            <a:off x="4023360" y="4160520"/>
-            <a:ext cx="365760" cy="365760"/>
-          </a:xfrm>
-          <a:prstGeom prst="rect">
-            <a:avLst/>
-          </a:prstGeom>
-          <a:noFill/>
-          <a:ln/>
-        </p:spPr>
-        <p:txBody>
-          <a:bodyPr wrap="square" lIns="0" tIns="0" rIns="0" bIns="0" rtlCol="0" anchor="ctr"/>
-          <a:lstStyle/>
-          <a:p>
-            <a:pPr algn="ctr" indent="0" marL="0">
-              <a:buNone/>
-            </a:pPr>
-            <a:r>
-              <a:rPr lang="en-US" sz="1300" b="1" dirty="0">
-                <a:solidFill>
-                  <a:srgbClr val="FFFFFF"/>
-                </a:solidFill>
-                <a:latin typeface="Cambria" pitchFamily="34" charset="0"/>
-                <a:ea typeface="Cambria" pitchFamily="34" charset="-122"/>
-                <a:cs typeface="Cambria" pitchFamily="34" charset="-120"/>
-              </a:rPr>
-              <a:t>5</a:t>
-            </a:r>
-            <a:endParaRPr lang="en-US" sz="1300" dirty="0"/>
-          </a:p>
-        </p:txBody>
-      </p:sp>
-      <p:sp>
-        <p:nvSpPr>
-          <p:cNvPr id="20" name="Text 17"/>
-          <p:cNvSpPr txBox="1"/>
-          <p:nvPr/>
-        </p:nvSpPr>
-        <p:spPr>
-          <a:xfrm>
-            <a:off x="4572000" y="4114800"/>
-            <a:ext cx="4114800" cy="658368"/>
-          </a:xfrm>
-          <a:prstGeom prst="rect">
-            <a:avLst/>
-          </a:prstGeom>
-          <a:noFill/>
-          <a:ln/>
-        </p:spPr>
-        <p:txBody>
-          <a:bodyPr wrap="square" lIns="0" tIns="0" rIns="0" bIns="0" rtlCol="0" anchor="t"/>
-          <a:lstStyle/>
-          <a:p>
-            <a:pPr indent="0" marL="0">
-              <a:buNone/>
-            </a:pPr>
-            <a:r>
-              <a:rPr lang="en-US" sz="1200" b="1" dirty="0">
-                <a:solidFill>
-                  <a:srgbClr val="0B4F4A"/>
-                </a:solidFill>
-                <a:latin typeface="Calibri" pitchFamily="34" charset="0"/>
-                <a:ea typeface="Calibri" pitchFamily="34" charset="-122"/>
-                <a:cs typeface="Calibri" pitchFamily="34" charset="-120"/>
-              </a:rPr>
-              <a:t>Refused?</a:t>
-            </a:r>
-            <a:endParaRPr lang="en-US" sz="1200" dirty="0"/>
-          </a:p>
-          <a:p>
-            <a:pPr indent="0" marL="0">
-              <a:buNone/>
-            </a:pPr>
-            <a:r>
-              <a:rPr lang="en-US" sz="1200" dirty="0">
-                <a:solidFill>
-                  <a:srgbClr val="1D2B2A"/>
-                </a:solidFill>
-                <a:latin typeface="Calibri" pitchFamily="34" charset="0"/>
-                <a:ea typeface="Calibri" pitchFamily="34" charset="-122"/>
-                <a:cs typeface="Calibri" pitchFamily="34" charset="-120"/>
-              </a:rPr>
-              <a:t>Kept on record as FAILED, with the rule that stopped it</a:t>
-            </a:r>
-            <a:endParaRPr lang="en-US" sz="1200" dirty="0"/>
+              <a:t>MerchantRefund(Reversal): the purchase stays valid</a:t>
+            </a:r>
+            <a:endParaRPr lang="en-US" sz="1150" dirty="0"/>
           </a:p>
         </p:txBody>
       </p:sp>
@@ -5985,7 +6507,7 @@
                 <a:ea typeface="Cambria" pitchFamily="34" charset="-122"/>
                 <a:cs typeface="Cambria" pitchFamily="34" charset="-120"/>
               </a:rPr>
-              <a:t>A lifecycle the code enforces: the card</a:t>
+              <a:t>One workflow end to end: a large transfer</a:t>
             </a:r>
             <a:endParaRPr lang="en-US" sz="2300" dirty="0"/>
           </a:p>
@@ -6024,7 +6546,7 @@
                 <a:ea typeface="Calibri" pitchFamily="34" charset="-122"/>
                 <a:cs typeface="Calibri" pitchFamily="34" charset="-120"/>
               </a:rPr>
-              <a:t>UML state machine drawn from the class's own LIFECYCLE declaration</a:t>
+              <a:t>Flowchart in standard symbols, in the order the rules are checked</a:t>
             </a:r>
             <a:endParaRPr lang="en-US" sz="1200" dirty="0"/>
           </a:p>
@@ -6083,23 +6605,23 @@
               <a:buNone/>
             </a:pPr>
             <a:r>
+              <a:rPr lang="en-US" sz="1000" b="1" dirty="0">
+                <a:solidFill>
+                  <a:srgbClr val="B8862F"/>
+                </a:solidFill>
+                <a:latin typeface="Calibri" pitchFamily="34" charset="0"/>
+                <a:ea typeface="Calibri" pitchFamily="34" charset="-122"/>
+                <a:cs typeface="Calibri" pitchFamily="34" charset="-120"/>
+              </a:rPr>
+              <a:t>  ›  Design</a:t>
+            </a:r>
+            <a:pPr algn="r" indent="0" marL="0">
+              <a:buNone/>
+            </a:pPr>
+            <a:r>
               <a:rPr lang="en-US" sz="1000" dirty="0">
                 <a:solidFill>
                   <a:srgbClr val="9AAAA7"/>
-                </a:solidFill>
-                <a:latin typeface="Calibri" pitchFamily="34" charset="0"/>
-                <a:ea typeface="Calibri" pitchFamily="34" charset="-122"/>
-                <a:cs typeface="Calibri" pitchFamily="34" charset="-120"/>
-              </a:rPr>
-              <a:t>  ›  Design</a:t>
-            </a:r>
-            <a:pPr algn="r" indent="0" marL="0">
-              <a:buNone/>
-            </a:pPr>
-            <a:r>
-              <a:rPr lang="en-US" sz="1000" b="1" dirty="0">
-                <a:solidFill>
-                  <a:srgbClr val="B8862F"/>
                 </a:solidFill>
                 <a:latin typeface="Calibri" pitchFamily="34" charset="0"/>
                 <a:ea typeface="Calibri" pitchFamily="34" charset="-122"/>
@@ -6127,7 +6649,7 @@
       </p:sp>
       <p:pic>
         <p:nvPicPr>
-          <p:cNvPr id="5" name="Image 0" descr="/home/user/commercial-banking/docs/state_2_card.png">    </p:cNvPr>
+          <p:cNvPr id="5" name="Image 0" descr="/home/user/commercial-banking/docs/flowchart_3_transfer.png">    </p:cNvPr>
           <p:cNvPicPr>
             <a:picLocks noChangeAspect="1"/>
           </p:cNvPicPr>
@@ -6141,8 +6663,8 @@
         </p:blipFill>
         <p:spPr>
           <a:xfrm>
-            <a:off x="365760" y="1212011"/>
-            <a:ext cx="5120640" cy="2970937"/>
+            <a:off x="635801" y="1143000"/>
+            <a:ext cx="2751758" cy="3749040"/>
           </a:xfrm>
           <a:prstGeom prst="rect">
             <a:avLst/>
@@ -6157,23 +6679,16 @@
         </p:nvSpPr>
         <p:spPr>
           <a:xfrm>
-            <a:off x="5715000" y="1188720"/>
-            <a:ext cx="3063240" cy="3474720"/>
-          </a:xfrm>
-          <a:prstGeom prst="roundRect">
-            <a:avLst>
-              <a:gd name="adj" fmla="val 2388"/>
-            </a:avLst>
+            <a:off x="4023360" y="1234440"/>
+            <a:ext cx="365760" cy="365760"/>
+          </a:xfrm>
+          <a:prstGeom prst="ellipse">
+            <a:avLst/>
           </a:prstGeom>
           <a:solidFill>
-            <a:srgbClr val="E8F0EE"/>
+            <a:srgbClr val="B8862F"/>
           </a:solidFill>
-          <a:ln w="12700">
-            <a:solidFill>
-              <a:srgbClr val="E8F0EE"/>
-            </a:solidFill>
-            <a:prstDash val="solid"/>
-          </a:ln>
+          <a:ln/>
         </p:spPr>
       </p:sp>
       <p:sp>
@@ -6184,8 +6699,8 @@
         </p:nvSpPr>
         <p:spPr>
           <a:xfrm>
-            <a:off x="5897880" y="1280160"/>
-            <a:ext cx="2743200" cy="320040"/>
+            <a:off x="4023360" y="1234440"/>
+            <a:ext cx="365760" cy="365760"/>
           </a:xfrm>
           <a:prstGeom prst="rect">
             <a:avLst/>
@@ -6197,21 +6712,21 @@
           <a:bodyPr wrap="square" lIns="0" tIns="0" rIns="0" bIns="0" rtlCol="0" anchor="ctr"/>
           <a:lstStyle/>
           <a:p>
-            <a:pPr indent="0" marL="0">
-              <a:buNone/>
-            </a:pPr>
-            <a:r>
-              <a:rPr lang="en-US" sz="1400" b="1" dirty="0">
-                <a:solidFill>
-                  <a:srgbClr val="0B4F4A"/>
+            <a:pPr algn="ctr" indent="0" marL="0">
+              <a:buNone/>
+            </a:pPr>
+            <a:r>
+              <a:rPr lang="en-US" sz="1300" b="1" dirty="0">
+                <a:solidFill>
+                  <a:srgbClr val="FFFFFF"/>
                 </a:solidFill>
                 <a:latin typeface="Cambria" pitchFamily="34" charset="0"/>
                 <a:ea typeface="Cambria" pitchFamily="34" charset="-122"/>
                 <a:cs typeface="Cambria" pitchFamily="34" charset="-120"/>
               </a:rPr>
-              <a:t>Critical case from the brief</a:t>
-            </a:r>
-            <a:endParaRPr lang="en-US" sz="1400" dirty="0"/>
+              <a:t>1</a:t>
+            </a:r>
+            <a:endParaRPr lang="en-US" sz="1300" dirty="0"/>
           </a:p>
         </p:txBody>
       </p:sp>
@@ -6223,25 +6738,38 @@
         </p:nvSpPr>
         <p:spPr>
           <a:xfrm>
-            <a:off x="5852160" y="1691640"/>
-            <a:ext cx="2834640" cy="2926080"/>
-          </a:xfrm>
-          <a:prstGeom prst="rect">
-            <a:avLst/>
-          </a:prstGeom>
-          <a:noFill/>
-          <a:ln/>
-        </p:spPr>
-        <p:txBody>
-          <a:bodyPr wrap="square" lIns="635" tIns="635" rIns="635" bIns="635" rtlCol="0" anchor="t"/>
-          <a:lstStyle/>
-          <a:p>
-            <a:pPr marL="342900" indent="-342900">
-              <a:spcAft>
-                <a:spcPts val="600"/>
-              </a:spcAft>
-              <a:buSzPct val="100000"/>
-              <a:buChar char="•"/>
+            <a:off x="4572000" y="1188720"/>
+            <a:ext cx="4114800" cy="658368"/>
+          </a:xfrm>
+          <a:prstGeom prst="rect">
+            <a:avLst/>
+          </a:prstGeom>
+          <a:noFill/>
+          <a:ln/>
+        </p:spPr>
+        <p:txBody>
+          <a:bodyPr wrap="square" lIns="0" tIns="0" rIns="0" bIns="0" rtlCol="0" anchor="t"/>
+          <a:lstStyle/>
+          <a:p>
+            <a:pPr indent="0" marL="0">
+              <a:buNone/>
+            </a:pPr>
+            <a:r>
+              <a:rPr lang="en-US" sz="1200" b="1" dirty="0">
+                <a:solidFill>
+                  <a:srgbClr val="0B4F4A"/>
+                </a:solidFill>
+                <a:latin typeface="Calibri" pitchFamily="34" charset="0"/>
+                <a:ea typeface="Calibri" pitchFamily="34" charset="-122"/>
+                <a:cs typeface="Calibri" pitchFamily="34" charset="-120"/>
+              </a:rPr>
+              <a:t>Authority</a:t>
+            </a:r>
+            <a:endParaRPr lang="en-US" sz="1200" dirty="0"/>
+          </a:p>
+          <a:p>
+            <a:pPr indent="0" marL="0">
+              <a:buNone/>
             </a:pPr>
             <a:r>
               <a:rPr lang="en-US" sz="1200" dirty="0">
@@ -6252,17 +6780,111 @@
                 <a:ea typeface="Calibri" pitchFamily="34" charset="-122"/>
                 <a:cs typeface="Calibri" pitchFamily="34" charset="-120"/>
               </a:rPr>
-              <a:t>Card reported stolen → blocked</a:t>
+              <a:t>Does this person hold a live payments mandate?</a:t>
             </a:r>
             <a:endParaRPr lang="en-US" sz="1200" dirty="0"/>
           </a:p>
-          <a:p>
-            <a:pPr marL="342900" indent="-342900">
-              <a:spcAft>
-                <a:spcPts val="600"/>
-              </a:spcAft>
-              <a:buSzPct val="100000"/>
-              <a:buChar char="•"/>
+        </p:txBody>
+      </p:sp>
+      <p:sp>
+        <p:nvSpPr>
+          <p:cNvPr id="9" name="Shape 6"/>
+          <p:cNvSpPr/>
+          <p:nvPr/>
+        </p:nvSpPr>
+        <p:spPr>
+          <a:xfrm>
+            <a:off x="4023360" y="1965960"/>
+            <a:ext cx="365760" cy="365760"/>
+          </a:xfrm>
+          <a:prstGeom prst="ellipse">
+            <a:avLst/>
+          </a:prstGeom>
+          <a:solidFill>
+            <a:srgbClr val="B8862F"/>
+          </a:solidFill>
+          <a:ln/>
+        </p:spPr>
+      </p:sp>
+      <p:sp>
+        <p:nvSpPr>
+          <p:cNvPr id="10" name="Text 7"/>
+          <p:cNvSpPr txBox="1"/>
+          <p:nvPr/>
+        </p:nvSpPr>
+        <p:spPr>
+          <a:xfrm>
+            <a:off x="4023360" y="1965960"/>
+            <a:ext cx="365760" cy="365760"/>
+          </a:xfrm>
+          <a:prstGeom prst="rect">
+            <a:avLst/>
+          </a:prstGeom>
+          <a:noFill/>
+          <a:ln/>
+        </p:spPr>
+        <p:txBody>
+          <a:bodyPr wrap="square" lIns="0" tIns="0" rIns="0" bIns="0" rtlCol="0" anchor="ctr"/>
+          <a:lstStyle/>
+          <a:p>
+            <a:pPr algn="ctr" indent="0" marL="0">
+              <a:buNone/>
+            </a:pPr>
+            <a:r>
+              <a:rPr lang="en-US" sz="1300" b="1" dirty="0">
+                <a:solidFill>
+                  <a:srgbClr val="FFFFFF"/>
+                </a:solidFill>
+                <a:latin typeface="Cambria" pitchFamily="34" charset="0"/>
+                <a:ea typeface="Cambria" pitchFamily="34" charset="-122"/>
+                <a:cs typeface="Cambria" pitchFamily="34" charset="-120"/>
+              </a:rPr>
+              <a:t>2</a:t>
+            </a:r>
+            <a:endParaRPr lang="en-US" sz="1300" dirty="0"/>
+          </a:p>
+        </p:txBody>
+      </p:sp>
+      <p:sp>
+        <p:nvSpPr>
+          <p:cNvPr id="11" name="Text 8"/>
+          <p:cNvSpPr txBox="1"/>
+          <p:nvPr/>
+        </p:nvSpPr>
+        <p:spPr>
+          <a:xfrm>
+            <a:off x="4572000" y="1920240"/>
+            <a:ext cx="4114800" cy="658368"/>
+          </a:xfrm>
+          <a:prstGeom prst="rect">
+            <a:avLst/>
+          </a:prstGeom>
+          <a:noFill/>
+          <a:ln/>
+        </p:spPr>
+        <p:txBody>
+          <a:bodyPr wrap="square" lIns="0" tIns="0" rIns="0" bIns="0" rtlCol="0" anchor="t"/>
+          <a:lstStyle/>
+          <a:p>
+            <a:pPr indent="0" marL="0">
+              <a:buNone/>
+            </a:pPr>
+            <a:r>
+              <a:rPr lang="en-US" sz="1200" b="1" dirty="0">
+                <a:solidFill>
+                  <a:srgbClr val="0B4F4A"/>
+                </a:solidFill>
+                <a:latin typeface="Calibri" pitchFamily="34" charset="0"/>
+                <a:ea typeface="Calibri" pitchFamily="34" charset="-122"/>
+                <a:cs typeface="Calibri" pitchFamily="34" charset="-120"/>
+              </a:rPr>
+              <a:t>Funds and limits</a:t>
+            </a:r>
+            <a:endParaRPr lang="en-US" sz="1200" dirty="0"/>
+          </a:p>
+          <a:p>
+            <a:pPr indent="0" marL="0">
+              <a:buNone/>
             </a:pPr>
             <a:r>
               <a:rPr lang="en-US" sz="1200" dirty="0">
@@ -6273,17 +6895,111 @@
                 <a:ea typeface="Calibri" pitchFamily="34" charset="-122"/>
                 <a:cs typeface="Calibri" pitchFamily="34" charset="-120"/>
               </a:rPr>
-              <a:t>Replaced, with a different daily limit</a:t>
+              <a:t>Enough available balance, within the mandate limit?</a:t>
             </a:r>
             <a:endParaRPr lang="en-US" sz="1200" dirty="0"/>
           </a:p>
-          <a:p>
-            <a:pPr marL="342900" indent="-342900">
-              <a:spcAft>
-                <a:spcPts val="600"/>
-              </a:spcAft>
-              <a:buSzPct val="100000"/>
-              <a:buChar char="•"/>
+        </p:txBody>
+      </p:sp>
+      <p:sp>
+        <p:nvSpPr>
+          <p:cNvPr id="12" name="Shape 9"/>
+          <p:cNvSpPr/>
+          <p:nvPr/>
+        </p:nvSpPr>
+        <p:spPr>
+          <a:xfrm>
+            <a:off x="4023360" y="2697480"/>
+            <a:ext cx="365760" cy="365760"/>
+          </a:xfrm>
+          <a:prstGeom prst="ellipse">
+            <a:avLst/>
+          </a:prstGeom>
+          <a:solidFill>
+            <a:srgbClr val="B8862F"/>
+          </a:solidFill>
+          <a:ln/>
+        </p:spPr>
+      </p:sp>
+      <p:sp>
+        <p:nvSpPr>
+          <p:cNvPr id="13" name="Text 10"/>
+          <p:cNvSpPr txBox="1"/>
+          <p:nvPr/>
+        </p:nvSpPr>
+        <p:spPr>
+          <a:xfrm>
+            <a:off x="4023360" y="2697480"/>
+            <a:ext cx="365760" cy="365760"/>
+          </a:xfrm>
+          <a:prstGeom prst="rect">
+            <a:avLst/>
+          </a:prstGeom>
+          <a:noFill/>
+          <a:ln/>
+        </p:spPr>
+        <p:txBody>
+          <a:bodyPr wrap="square" lIns="0" tIns="0" rIns="0" bIns="0" rtlCol="0" anchor="ctr"/>
+          <a:lstStyle/>
+          <a:p>
+            <a:pPr algn="ctr" indent="0" marL="0">
+              <a:buNone/>
+            </a:pPr>
+            <a:r>
+              <a:rPr lang="en-US" sz="1300" b="1" dirty="0">
+                <a:solidFill>
+                  <a:srgbClr val="FFFFFF"/>
+                </a:solidFill>
+                <a:latin typeface="Cambria" pitchFamily="34" charset="0"/>
+                <a:ea typeface="Cambria" pitchFamily="34" charset="-122"/>
+                <a:cs typeface="Cambria" pitchFamily="34" charset="-120"/>
+              </a:rPr>
+              <a:t>3</a:t>
+            </a:r>
+            <a:endParaRPr lang="en-US" sz="1300" dirty="0"/>
+          </a:p>
+        </p:txBody>
+      </p:sp>
+      <p:sp>
+        <p:nvSpPr>
+          <p:cNvPr id="14" name="Text 11"/>
+          <p:cNvSpPr txBox="1"/>
+          <p:nvPr/>
+        </p:nvSpPr>
+        <p:spPr>
+          <a:xfrm>
+            <a:off x="4572000" y="2651760"/>
+            <a:ext cx="4114800" cy="658368"/>
+          </a:xfrm>
+          <a:prstGeom prst="rect">
+            <a:avLst/>
+          </a:prstGeom>
+          <a:noFill/>
+          <a:ln/>
+        </p:spPr>
+        <p:txBody>
+          <a:bodyPr wrap="square" lIns="0" tIns="0" rIns="0" bIns="0" rtlCol="0" anchor="t"/>
+          <a:lstStyle/>
+          <a:p>
+            <a:pPr indent="0" marL="0">
+              <a:buNone/>
+            </a:pPr>
+            <a:r>
+              <a:rPr lang="en-US" sz="1200" b="1" dirty="0">
+                <a:solidFill>
+                  <a:srgbClr val="0B4F4A"/>
+                </a:solidFill>
+                <a:latin typeface="Calibri" pitchFamily="34" charset="0"/>
+                <a:ea typeface="Calibri" pitchFamily="34" charset="-122"/>
+                <a:cs typeface="Calibri" pitchFamily="34" charset="-120"/>
+              </a:rPr>
+              <a:t>Dual control</a:t>
+            </a:r>
+            <a:endParaRPr lang="en-US" sz="1200" dirty="0"/>
+          </a:p>
+          <a:p>
+            <a:pPr indent="0" marL="0">
+              <a:buNone/>
             </a:pPr>
             <a:r>
               <a:rPr lang="en-US" sz="1200" dirty="0">
@@ -6294,17 +7010,111 @@
                 <a:ea typeface="Calibri" pitchFamily="34" charset="-122"/>
                 <a:cs typeface="Calibri" pitchFamily="34" charset="-120"/>
               </a:rPr>
-              <a:t>Old card found → destroyed, never re-activated</a:t>
+              <a:t>Above the threshold, a second signatory must approve</a:t>
             </a:r>
             <a:endParaRPr lang="en-US" sz="1200" dirty="0"/>
           </a:p>
-          <a:p>
-            <a:pPr marL="342900" indent="-342900">
-              <a:spcAft>
-                <a:spcPts val="600"/>
-              </a:spcAft>
-              <a:buSzPct val="100000"/>
-              <a:buChar char="•"/>
+        </p:txBody>
+      </p:sp>
+      <p:sp>
+        <p:nvSpPr>
+          <p:cNvPr id="15" name="Shape 12"/>
+          <p:cNvSpPr/>
+          <p:nvPr/>
+        </p:nvSpPr>
+        <p:spPr>
+          <a:xfrm>
+            <a:off x="4023360" y="3429000"/>
+            <a:ext cx="365760" cy="365760"/>
+          </a:xfrm>
+          <a:prstGeom prst="ellipse">
+            <a:avLst/>
+          </a:prstGeom>
+          <a:solidFill>
+            <a:srgbClr val="B8862F"/>
+          </a:solidFill>
+          <a:ln/>
+        </p:spPr>
+      </p:sp>
+      <p:sp>
+        <p:nvSpPr>
+          <p:cNvPr id="16" name="Text 13"/>
+          <p:cNvSpPr txBox="1"/>
+          <p:nvPr/>
+        </p:nvSpPr>
+        <p:spPr>
+          <a:xfrm>
+            <a:off x="4023360" y="3429000"/>
+            <a:ext cx="365760" cy="365760"/>
+          </a:xfrm>
+          <a:prstGeom prst="rect">
+            <a:avLst/>
+          </a:prstGeom>
+          <a:noFill/>
+          <a:ln/>
+        </p:spPr>
+        <p:txBody>
+          <a:bodyPr wrap="square" lIns="0" tIns="0" rIns="0" bIns="0" rtlCol="0" anchor="ctr"/>
+          <a:lstStyle/>
+          <a:p>
+            <a:pPr algn="ctr" indent="0" marL="0">
+              <a:buNone/>
+            </a:pPr>
+            <a:r>
+              <a:rPr lang="en-US" sz="1300" b="1" dirty="0">
+                <a:solidFill>
+                  <a:srgbClr val="FFFFFF"/>
+                </a:solidFill>
+                <a:latin typeface="Cambria" pitchFamily="34" charset="0"/>
+                <a:ea typeface="Cambria" pitchFamily="34" charset="-122"/>
+                <a:cs typeface="Cambria" pitchFamily="34" charset="-120"/>
+              </a:rPr>
+              <a:t>4</a:t>
+            </a:r>
+            <a:endParaRPr lang="en-US" sz="1300" dirty="0"/>
+          </a:p>
+        </p:txBody>
+      </p:sp>
+      <p:sp>
+        <p:nvSpPr>
+          <p:cNvPr id="17" name="Text 14"/>
+          <p:cNvSpPr txBox="1"/>
+          <p:nvPr/>
+        </p:nvSpPr>
+        <p:spPr>
+          <a:xfrm>
+            <a:off x="4572000" y="3383280"/>
+            <a:ext cx="4114800" cy="658368"/>
+          </a:xfrm>
+          <a:prstGeom prst="rect">
+            <a:avLst/>
+          </a:prstGeom>
+          <a:noFill/>
+          <a:ln/>
+        </p:spPr>
+        <p:txBody>
+          <a:bodyPr wrap="square" lIns="0" tIns="0" rIns="0" bIns="0" rtlCol="0" anchor="t"/>
+          <a:lstStyle/>
+          <a:p>
+            <a:pPr indent="0" marL="0">
+              <a:buNone/>
+            </a:pPr>
+            <a:r>
+              <a:rPr lang="en-US" sz="1200" b="1" dirty="0">
+                <a:solidFill>
+                  <a:srgbClr val="0B4F4A"/>
+                </a:solidFill>
+                <a:latin typeface="Calibri" pitchFamily="34" charset="0"/>
+                <a:ea typeface="Calibri" pitchFamily="34" charset="-122"/>
+                <a:cs typeface="Calibri" pitchFamily="34" charset="-120"/>
+              </a:rPr>
+              <a:t>Compliance hold</a:t>
+            </a:r>
+            <a:endParaRPr lang="en-US" sz="1200" dirty="0"/>
+          </a:p>
+          <a:p>
+            <a:pPr indent="0" marL="0">
+              <a:buNone/>
             </a:pPr>
             <a:r>
               <a:rPr lang="en-US" sz="1200" dirty="0">
@@ -6315,17 +7125,111 @@
                 <a:ea typeface="Calibri" pitchFamily="34" charset="-122"/>
                 <a:cs typeface="Calibri" pitchFamily="34" charset="-120"/>
               </a:rPr>
-              <a:t>Every payment still names the physical card used</a:t>
+              <a:t>Very large transfers wait for review, then release</a:t>
             </a:r>
             <a:endParaRPr lang="en-US" sz="1200" dirty="0"/>
           </a:p>
-          <a:p>
-            <a:pPr marL="342900" indent="-342900">
-              <a:spcAft>
-                <a:spcPts val="600"/>
-              </a:spcAft>
-              <a:buSzPct val="100000"/>
-              <a:buChar char="•"/>
+        </p:txBody>
+      </p:sp>
+      <p:sp>
+        <p:nvSpPr>
+          <p:cNvPr id="18" name="Shape 15"/>
+          <p:cNvSpPr/>
+          <p:nvPr/>
+        </p:nvSpPr>
+        <p:spPr>
+          <a:xfrm>
+            <a:off x="4023360" y="4160520"/>
+            <a:ext cx="365760" cy="365760"/>
+          </a:xfrm>
+          <a:prstGeom prst="ellipse">
+            <a:avLst/>
+          </a:prstGeom>
+          <a:solidFill>
+            <a:srgbClr val="B8862F"/>
+          </a:solidFill>
+          <a:ln/>
+        </p:spPr>
+      </p:sp>
+      <p:sp>
+        <p:nvSpPr>
+          <p:cNvPr id="19" name="Text 16"/>
+          <p:cNvSpPr txBox="1"/>
+          <p:nvPr/>
+        </p:nvSpPr>
+        <p:spPr>
+          <a:xfrm>
+            <a:off x="4023360" y="4160520"/>
+            <a:ext cx="365760" cy="365760"/>
+          </a:xfrm>
+          <a:prstGeom prst="rect">
+            <a:avLst/>
+          </a:prstGeom>
+          <a:noFill/>
+          <a:ln/>
+        </p:spPr>
+        <p:txBody>
+          <a:bodyPr wrap="square" lIns="0" tIns="0" rIns="0" bIns="0" rtlCol="0" anchor="ctr"/>
+          <a:lstStyle/>
+          <a:p>
+            <a:pPr algn="ctr" indent="0" marL="0">
+              <a:buNone/>
+            </a:pPr>
+            <a:r>
+              <a:rPr lang="en-US" sz="1300" b="1" dirty="0">
+                <a:solidFill>
+                  <a:srgbClr val="FFFFFF"/>
+                </a:solidFill>
+                <a:latin typeface="Cambria" pitchFamily="34" charset="0"/>
+                <a:ea typeface="Cambria" pitchFamily="34" charset="-122"/>
+                <a:cs typeface="Cambria" pitchFamily="34" charset="-120"/>
+              </a:rPr>
+              <a:t>5</a:t>
+            </a:r>
+            <a:endParaRPr lang="en-US" sz="1300" dirty="0"/>
+          </a:p>
+        </p:txBody>
+      </p:sp>
+      <p:sp>
+        <p:nvSpPr>
+          <p:cNvPr id="20" name="Text 17"/>
+          <p:cNvSpPr txBox="1"/>
+          <p:nvPr/>
+        </p:nvSpPr>
+        <p:spPr>
+          <a:xfrm>
+            <a:off x="4572000" y="4114800"/>
+            <a:ext cx="4114800" cy="658368"/>
+          </a:xfrm>
+          <a:prstGeom prst="rect">
+            <a:avLst/>
+          </a:prstGeom>
+          <a:noFill/>
+          <a:ln/>
+        </p:spPr>
+        <p:txBody>
+          <a:bodyPr wrap="square" lIns="0" tIns="0" rIns="0" bIns="0" rtlCol="0" anchor="t"/>
+          <a:lstStyle/>
+          <a:p>
+            <a:pPr indent="0" marL="0">
+              <a:buNone/>
+            </a:pPr>
+            <a:r>
+              <a:rPr lang="en-US" sz="1200" b="1" dirty="0">
+                <a:solidFill>
+                  <a:srgbClr val="0B4F4A"/>
+                </a:solidFill>
+                <a:latin typeface="Calibri" pitchFamily="34" charset="0"/>
+                <a:ea typeface="Calibri" pitchFamily="34" charset="-122"/>
+                <a:cs typeface="Calibri" pitchFamily="34" charset="-120"/>
+              </a:rPr>
+              <a:t>Refused?</a:t>
+            </a:r>
+            <a:endParaRPr lang="en-US" sz="1200" dirty="0"/>
+          </a:p>
+          <a:p>
+            <a:pPr indent="0" marL="0">
+              <a:buNone/>
             </a:pPr>
             <a:r>
               <a:rPr lang="en-US" sz="1200" dirty="0">
@@ -6336,48 +7240,9 @@
                 <a:ea typeface="Calibri" pitchFamily="34" charset="-122"/>
                 <a:cs typeface="Calibri" pitchFamily="34" charset="-120"/>
               </a:rPr>
-              <a:t>Illegal moves (Destroyed → Active) raise an error</a:t>
+              <a:t>Kept on record as FAILED, with the rule that stopped it</a:t>
             </a:r>
             <a:endParaRPr lang="en-US" sz="1200" dirty="0"/>
-          </a:p>
-        </p:txBody>
-      </p:sp>
-      <p:sp>
-        <p:nvSpPr>
-          <p:cNvPr id="9" name="Text 6"/>
-          <p:cNvSpPr txBox="1"/>
-          <p:nvPr/>
-        </p:nvSpPr>
-        <p:spPr>
-          <a:xfrm>
-            <a:off x="457200" y="4343400"/>
-            <a:ext cx="5120640" cy="274320"/>
-          </a:xfrm>
-          <a:prstGeom prst="rect">
-            <a:avLst/>
-          </a:prstGeom>
-          <a:noFill/>
-          <a:ln/>
-        </p:spPr>
-        <p:txBody>
-          <a:bodyPr wrap="square" lIns="0" tIns="0" rIns="0" bIns="0" rtlCol="0" anchor="ctr"/>
-          <a:lstStyle/>
-          <a:p>
-            <a:pPr indent="0" marL="0">
-              <a:buNone/>
-            </a:pPr>
-            <a:r>
-              <a:rPr lang="en-US" sz="1050" i="1" dirty="0">
-                <a:solidFill>
-                  <a:srgbClr val="5B6B69"/>
-                </a:solidFill>
-                <a:latin typeface="Calibri" pitchFamily="34" charset="0"/>
-                <a:ea typeface="Calibri" pitchFamily="34" charset="-122"/>
-                <a:cs typeface="Calibri" pitchFamily="34" charset="-120"/>
-              </a:rPr>
-              <a:t>Tested: test_stolen_replaced_card_cannot_be_reactivated, test_card_search_covers_the_replacement_chain</a:t>
-            </a:r>
-            <a:endParaRPr lang="en-US" sz="1050" dirty="0"/>
           </a:p>
         </p:txBody>
       </p:sp>
@@ -6446,6 +7311,576 @@
                 <a:ea typeface="Cambria" pitchFamily="34" charset="-122"/>
                 <a:cs typeface="Cambria" pitchFamily="34" charset="-120"/>
               </a:rPr>
+              <a:t>Implementation and GUI: in progress</a:t>
+            </a:r>
+            <a:endParaRPr lang="en-US" sz="2600" dirty="0"/>
+          </a:p>
+        </p:txBody>
+      </p:sp>
+      <p:sp>
+        <p:nvSpPr>
+          <p:cNvPr id="3" name="Text 1"/>
+          <p:cNvSpPr txBox="1"/>
+          <p:nvPr/>
+        </p:nvSpPr>
+        <p:spPr>
+          <a:xfrm>
+            <a:off x="457200" y="841248"/>
+            <a:ext cx="8229600" cy="274320"/>
+          </a:xfrm>
+          <a:prstGeom prst="rect">
+            <a:avLst/>
+          </a:prstGeom>
+          <a:noFill/>
+          <a:ln/>
+        </p:spPr>
+        <p:txBody>
+          <a:bodyPr wrap="square" lIns="0" tIns="0" rIns="0" bIns="0" rtlCol="0" anchor="ctr"/>
+          <a:lstStyle/>
+          <a:p>
+            <a:pPr indent="0" marL="0">
+              <a:buNone/>
+            </a:pPr>
+            <a:r>
+              <a:rPr lang="en-US" sz="1200" i="1" dirty="0">
+                <a:solidFill>
+                  <a:srgbClr val="5B6B69"/>
+                </a:solidFill>
+                <a:latin typeface="Calibri" pitchFamily="34" charset="0"/>
+                <a:ea typeface="Calibri" pitchFamily="34" charset="-122"/>
+                <a:cs typeface="Calibri" pitchFamily="34" charset="-120"/>
+              </a:rPr>
+              <a:t>Python, standard library only; GUI in Tkinter</a:t>
+            </a:r>
+            <a:endParaRPr lang="en-US" sz="1200" dirty="0"/>
+          </a:p>
+        </p:txBody>
+      </p:sp>
+      <p:sp>
+        <p:nvSpPr>
+          <p:cNvPr id="4" name="Text 2"/>
+          <p:cNvSpPr txBox="1"/>
+          <p:nvPr/>
+        </p:nvSpPr>
+        <p:spPr>
+          <a:xfrm>
+            <a:off x="5120640" y="91440"/>
+            <a:ext cx="3657600" cy="228600"/>
+          </a:xfrm>
+          <a:prstGeom prst="rect">
+            <a:avLst/>
+          </a:prstGeom>
+          <a:noFill/>
+          <a:ln/>
+        </p:spPr>
+        <p:txBody>
+          <a:bodyPr wrap="square" lIns="0" tIns="0" rIns="0" bIns="0" rtlCol="0" anchor="ctr"/>
+          <a:lstStyle/>
+          <a:p>
+            <a:pPr algn="r" indent="0" marL="0">
+              <a:buNone/>
+            </a:pPr>
+            <a:r>
+              <a:rPr lang="en-US" sz="1000" dirty="0">
+                <a:solidFill>
+                  <a:srgbClr val="9AAAA7"/>
+                </a:solidFill>
+                <a:latin typeface="Calibri" pitchFamily="34" charset="0"/>
+                <a:ea typeface="Calibri" pitchFamily="34" charset="-122"/>
+                <a:cs typeface="Calibri" pitchFamily="34" charset="-120"/>
+              </a:rPr>
+              <a:t>Progress</a:t>
+            </a:r>
+            <a:pPr algn="r" indent="0" marL="0">
+              <a:buNone/>
+            </a:pPr>
+            <a:r>
+              <a:rPr lang="en-US" sz="1000" dirty="0">
+                <a:solidFill>
+                  <a:srgbClr val="9AAAA7"/>
+                </a:solidFill>
+                <a:latin typeface="Calibri" pitchFamily="34" charset="0"/>
+                <a:ea typeface="Calibri" pitchFamily="34" charset="-122"/>
+                <a:cs typeface="Calibri" pitchFamily="34" charset="-120"/>
+              </a:rPr>
+              <a:t>  ›  Research</a:t>
+            </a:r>
+            <a:pPr algn="r" indent="0" marL="0">
+              <a:buNone/>
+            </a:pPr>
+            <a:r>
+              <a:rPr lang="en-US" sz="1000" dirty="0">
+                <a:solidFill>
+                  <a:srgbClr val="9AAAA7"/>
+                </a:solidFill>
+                <a:latin typeface="Calibri" pitchFamily="34" charset="0"/>
+                <a:ea typeface="Calibri" pitchFamily="34" charset="-122"/>
+                <a:cs typeface="Calibri" pitchFamily="34" charset="-120"/>
+              </a:rPr>
+              <a:t>  ›  Design</a:t>
+            </a:r>
+            <a:pPr algn="r" indent="0" marL="0">
+              <a:buNone/>
+            </a:pPr>
+            <a:r>
+              <a:rPr lang="en-US" sz="1000" b="1" dirty="0">
+                <a:solidFill>
+                  <a:srgbClr val="B8862F"/>
+                </a:solidFill>
+                <a:latin typeface="Calibri" pitchFamily="34" charset="0"/>
+                <a:ea typeface="Calibri" pitchFamily="34" charset="-122"/>
+                <a:cs typeface="Calibri" pitchFamily="34" charset="-120"/>
+              </a:rPr>
+              <a:t>  ›  Build</a:t>
+            </a:r>
+            <a:pPr algn="r" indent="0" marL="0">
+              <a:buNone/>
+            </a:pPr>
+            <a:r>
+              <a:rPr lang="en-US" sz="1000" dirty="0">
+                <a:solidFill>
+                  <a:srgbClr val="9AAAA7"/>
+                </a:solidFill>
+                <a:latin typeface="Calibri" pitchFamily="34" charset="0"/>
+                <a:ea typeface="Calibri" pitchFamily="34" charset="-122"/>
+                <a:cs typeface="Calibri" pitchFamily="34" charset="-120"/>
+              </a:rPr>
+              <a:t>  ›  Next</a:t>
+            </a:r>
+            <a:endParaRPr lang="en-US" sz="1000" dirty="0"/>
+          </a:p>
+        </p:txBody>
+      </p:sp>
+      <p:pic>
+        <p:nvPicPr>
+          <p:cNvPr id="5" name="Image 0" descr="/home/user/commercial-banking/docs/screenshots/gui_02_overview.png">    </p:cNvPr>
+          <p:cNvPicPr>
+            <a:picLocks noChangeAspect="1"/>
+          </p:cNvPicPr>
+          <p:nvPr/>
+        </p:nvPicPr>
+        <p:blipFill>
+          <a:blip r:embed="rId1"/>
+          <a:stretch>
+            <a:fillRect/>
+          </a:stretch>
+        </p:blipFill>
+        <p:spPr>
+          <a:xfrm>
+            <a:off x="365760" y="1300480"/>
+            <a:ext cx="4572000" cy="2794000"/>
+          </a:xfrm>
+          <a:prstGeom prst="rect">
+            <a:avLst/>
+          </a:prstGeom>
+        </p:spPr>
+      </p:pic>
+      <p:sp>
+        <p:nvSpPr>
+          <p:cNvPr id="6" name="Text 3"/>
+          <p:cNvSpPr txBox="1"/>
+          <p:nvPr/>
+        </p:nvSpPr>
+        <p:spPr>
+          <a:xfrm>
+            <a:off x="365760" y="4206240"/>
+            <a:ext cx="4572000" cy="274320"/>
+          </a:xfrm>
+          <a:prstGeom prst="rect">
+            <a:avLst/>
+          </a:prstGeom>
+          <a:noFill/>
+          <a:ln/>
+        </p:spPr>
+        <p:txBody>
+          <a:bodyPr wrap="square" lIns="0" tIns="0" rIns="0" bIns="0" rtlCol="0" anchor="ctr"/>
+          <a:lstStyle/>
+          <a:p>
+            <a:pPr algn="ctr" indent="0" marL="0">
+              <a:buNone/>
+            </a:pPr>
+            <a:r>
+              <a:rPr lang="en-US" sz="1050" i="1" dirty="0">
+                <a:solidFill>
+                  <a:srgbClr val="5B6B69"/>
+                </a:solidFill>
+                <a:latin typeface="Calibri" pitchFamily="34" charset="0"/>
+                <a:ea typeface="Calibri" pitchFamily="34" charset="-122"/>
+                <a:cs typeface="Calibri" pitchFamily="34" charset="-120"/>
+              </a:rPr>
+              <a:t>GUI prototype: staff overview screen</a:t>
+            </a:r>
+            <a:endParaRPr lang="en-US" sz="1050" dirty="0"/>
+          </a:p>
+        </p:txBody>
+      </p:sp>
+      <p:sp>
+        <p:nvSpPr>
+          <p:cNvPr id="7" name="Shape 4"/>
+          <p:cNvSpPr/>
+          <p:nvPr/>
+        </p:nvSpPr>
+        <p:spPr>
+          <a:xfrm>
+            <a:off x="5212080" y="1234440"/>
+            <a:ext cx="1188720" cy="310896"/>
+          </a:xfrm>
+          <a:prstGeom prst="roundRect">
+            <a:avLst>
+              <a:gd name="adj" fmla="val 23529"/>
+            </a:avLst>
+          </a:prstGeom>
+          <a:solidFill>
+            <a:srgbClr val="2E7D4F"/>
+          </a:solidFill>
+          <a:ln w="12700">
+            <a:solidFill>
+              <a:srgbClr val="2E7D4F"/>
+            </a:solidFill>
+            <a:prstDash val="solid"/>
+          </a:ln>
+        </p:spPr>
+      </p:sp>
+      <p:sp>
+        <p:nvSpPr>
+          <p:cNvPr id="8" name="Text 5"/>
+          <p:cNvSpPr txBox="1"/>
+          <p:nvPr/>
+        </p:nvSpPr>
+        <p:spPr>
+          <a:xfrm>
+            <a:off x="5212080" y="1234440"/>
+            <a:ext cx="1188720" cy="310896"/>
+          </a:xfrm>
+          <a:prstGeom prst="rect">
+            <a:avLst/>
+          </a:prstGeom>
+          <a:noFill/>
+          <a:ln/>
+        </p:spPr>
+        <p:txBody>
+          <a:bodyPr wrap="square" lIns="0" tIns="0" rIns="0" bIns="0" rtlCol="0" anchor="ctr"/>
+          <a:lstStyle/>
+          <a:p>
+            <a:pPr algn="ctr" indent="0" marL="0">
+              <a:buNone/>
+            </a:pPr>
+            <a:r>
+              <a:rPr lang="en-US" sz="1150" b="1" dirty="0">
+                <a:solidFill>
+                  <a:srgbClr val="FFFFFF"/>
+                </a:solidFill>
+                <a:latin typeface="Calibri" pitchFamily="34" charset="0"/>
+                <a:ea typeface="Calibri" pitchFamily="34" charset="-122"/>
+                <a:cs typeface="Calibri" pitchFamily="34" charset="-120"/>
+              </a:rPr>
+              <a:t>Built</a:t>
+            </a:r>
+            <a:endParaRPr lang="en-US" sz="1150" dirty="0"/>
+          </a:p>
+        </p:txBody>
+      </p:sp>
+      <p:sp>
+        <p:nvSpPr>
+          <p:cNvPr id="9" name="Text 6"/>
+          <p:cNvSpPr txBox="1"/>
+          <p:nvPr/>
+        </p:nvSpPr>
+        <p:spPr>
+          <a:xfrm>
+            <a:off x="5212080" y="1618488"/>
+            <a:ext cx="3566160" cy="1234440"/>
+          </a:xfrm>
+          <a:prstGeom prst="rect">
+            <a:avLst/>
+          </a:prstGeom>
+          <a:noFill/>
+          <a:ln/>
+        </p:spPr>
+        <p:txBody>
+          <a:bodyPr wrap="square" lIns="635" tIns="635" rIns="635" bIns="635" rtlCol="0" anchor="t"/>
+          <a:lstStyle/>
+          <a:p>
+            <a:pPr marL="342900" indent="-342900">
+              <a:spcAft>
+                <a:spcPts val="600"/>
+              </a:spcAft>
+              <a:buSzPct val="100000"/>
+              <a:buChar char="•"/>
+            </a:pPr>
+            <a:r>
+              <a:rPr lang="en-US" sz="1200" dirty="0">
+                <a:solidFill>
+                  <a:srgbClr val="1D2B2A"/>
+                </a:solidFill>
+                <a:latin typeface="Calibri" pitchFamily="34" charset="0"/>
+                <a:ea typeface="Calibri" pitchFamily="34" charset="-122"/>
+                <a:cs typeface="Calibri" pitchFamily="34" charset="-120"/>
+              </a:rPr>
+              <a:t>Party, Arrangement and Transaction hierarchies</a:t>
+            </a:r>
+            <a:endParaRPr lang="en-US" sz="1200" dirty="0"/>
+          </a:p>
+          <a:p>
+            <a:pPr marL="342900" indent="-342900">
+              <a:spcAft>
+                <a:spcPts val="600"/>
+              </a:spcAft>
+              <a:buSzPct val="100000"/>
+              <a:buChar char="•"/>
+            </a:pPr>
+            <a:r>
+              <a:rPr lang="en-US" sz="1200" dirty="0">
+                <a:solidFill>
+                  <a:srgbClr val="1D2B2A"/>
+                </a:solidFill>
+                <a:latin typeface="Calibri" pitchFamily="34" charset="0"/>
+                <a:ea typeface="Calibri" pitchFamily="34" charset="-122"/>
+                <a:cs typeface="Calibri" pitchFamily="34" charset="-120"/>
+              </a:rPr>
+              <a:t>Double-entry ledger: balances derived, never stored</a:t>
+            </a:r>
+            <a:endParaRPr lang="en-US" sz="1200" dirty="0"/>
+          </a:p>
+          <a:p>
+            <a:pPr marL="342900" indent="-342900">
+              <a:spcAft>
+                <a:spcPts val="600"/>
+              </a:spcAft>
+              <a:buSzPct val="100000"/>
+              <a:buChar char="•"/>
+            </a:pPr>
+            <a:r>
+              <a:rPr lang="en-US" sz="1200" dirty="0">
+                <a:solidFill>
+                  <a:srgbClr val="1D2B2A"/>
+                </a:solidFill>
+                <a:latin typeface="Calibri" pitchFamily="34" charset="0"/>
+                <a:ea typeface="Calibri" pitchFamily="34" charset="-122"/>
+                <a:cs typeface="Calibri" pitchFamily="34" charset="-120"/>
+              </a:rPr>
+              <a:t>KYC checks and dated mandates</a:t>
+            </a:r>
+            <a:endParaRPr lang="en-US" sz="1200" dirty="0"/>
+          </a:p>
+        </p:txBody>
+      </p:sp>
+      <p:sp>
+        <p:nvSpPr>
+          <p:cNvPr id="10" name="Shape 7"/>
+          <p:cNvSpPr/>
+          <p:nvPr/>
+        </p:nvSpPr>
+        <p:spPr>
+          <a:xfrm>
+            <a:off x="5212080" y="2926080"/>
+            <a:ext cx="1188720" cy="310896"/>
+          </a:xfrm>
+          <a:prstGeom prst="roundRect">
+            <a:avLst>
+              <a:gd name="adj" fmla="val 23529"/>
+            </a:avLst>
+          </a:prstGeom>
+          <a:solidFill>
+            <a:srgbClr val="C98A12"/>
+          </a:solidFill>
+          <a:ln w="12700">
+            <a:solidFill>
+              <a:srgbClr val="C98A12"/>
+            </a:solidFill>
+            <a:prstDash val="solid"/>
+          </a:ln>
+        </p:spPr>
+      </p:sp>
+      <p:sp>
+        <p:nvSpPr>
+          <p:cNvPr id="11" name="Text 8"/>
+          <p:cNvSpPr txBox="1"/>
+          <p:nvPr/>
+        </p:nvSpPr>
+        <p:spPr>
+          <a:xfrm>
+            <a:off x="5212080" y="2926080"/>
+            <a:ext cx="1188720" cy="310896"/>
+          </a:xfrm>
+          <a:prstGeom prst="rect">
+            <a:avLst/>
+          </a:prstGeom>
+          <a:noFill/>
+          <a:ln/>
+        </p:spPr>
+        <p:txBody>
+          <a:bodyPr wrap="square" lIns="0" tIns="0" rIns="0" bIns="0" rtlCol="0" anchor="ctr"/>
+          <a:lstStyle/>
+          <a:p>
+            <a:pPr algn="ctr" indent="0" marL="0">
+              <a:buNone/>
+            </a:pPr>
+            <a:r>
+              <a:rPr lang="en-US" sz="1150" b="1" dirty="0">
+                <a:solidFill>
+                  <a:srgbClr val="FFFFFF"/>
+                </a:solidFill>
+                <a:latin typeface="Calibri" pitchFamily="34" charset="0"/>
+                <a:ea typeface="Calibri" pitchFamily="34" charset="-122"/>
+                <a:cs typeface="Calibri" pitchFamily="34" charset="-120"/>
+              </a:rPr>
+              <a:t>In progress</a:t>
+            </a:r>
+            <a:endParaRPr lang="en-US" sz="1150" dirty="0"/>
+          </a:p>
+        </p:txBody>
+      </p:sp>
+      <p:sp>
+        <p:nvSpPr>
+          <p:cNvPr id="12" name="Text 9"/>
+          <p:cNvSpPr txBox="1"/>
+          <p:nvPr/>
+        </p:nvSpPr>
+        <p:spPr>
+          <a:xfrm>
+            <a:off x="5212080" y="3310128"/>
+            <a:ext cx="3566160" cy="1234440"/>
+          </a:xfrm>
+          <a:prstGeom prst="rect">
+            <a:avLst/>
+          </a:prstGeom>
+          <a:noFill/>
+          <a:ln/>
+        </p:spPr>
+        <p:txBody>
+          <a:bodyPr wrap="square" lIns="635" tIns="635" rIns="635" bIns="635" rtlCol="0" anchor="t"/>
+          <a:lstStyle/>
+          <a:p>
+            <a:pPr marL="342900" indent="-342900">
+              <a:spcAft>
+                <a:spcPts val="600"/>
+              </a:spcAft>
+              <a:buSzPct val="100000"/>
+              <a:buChar char="•"/>
+            </a:pPr>
+            <a:r>
+              <a:rPr lang="en-US" sz="1200" dirty="0">
+                <a:solidFill>
+                  <a:srgbClr val="1D2B2A"/>
+                </a:solidFill>
+                <a:latin typeface="Calibri" pitchFamily="34" charset="0"/>
+                <a:ea typeface="Calibri" pitchFamily="34" charset="-122"/>
+                <a:cs typeface="Calibri" pitchFamily="34" charset="-120"/>
+              </a:rPr>
+              <a:t>Card and lending workflows</a:t>
+            </a:r>
+            <a:endParaRPr lang="en-US" sz="1200" dirty="0"/>
+          </a:p>
+          <a:p>
+            <a:pPr marL="342900" indent="-342900">
+              <a:spcAft>
+                <a:spcPts val="600"/>
+              </a:spcAft>
+              <a:buSzPct val="100000"/>
+              <a:buChar char="•"/>
+            </a:pPr>
+            <a:r>
+              <a:rPr lang="en-US" sz="1200" dirty="0">
+                <a:solidFill>
+                  <a:srgbClr val="1D2B2A"/>
+                </a:solidFill>
+                <a:latin typeface="Calibri" pitchFamily="34" charset="0"/>
+                <a:ea typeface="Calibri" pitchFamily="34" charset="-122"/>
+                <a:cs typeface="Calibri" pitchFamily="34" charset="-120"/>
+              </a:rPr>
+              <a:t>Exception scenarios from the brief</a:t>
+            </a:r>
+            <a:endParaRPr lang="en-US" sz="1200" dirty="0"/>
+          </a:p>
+          <a:p>
+            <a:pPr marL="342900" indent="-342900">
+              <a:spcAft>
+                <a:spcPts val="600"/>
+              </a:spcAft>
+              <a:buSzPct val="100000"/>
+              <a:buChar char="•"/>
+            </a:pPr>
+            <a:r>
+              <a:rPr lang="en-US" sz="1200" dirty="0">
+                <a:solidFill>
+                  <a:srgbClr val="1D2B2A"/>
+                </a:solidFill>
+                <a:latin typeface="Calibri" pitchFamily="34" charset="0"/>
+                <a:ea typeface="Calibri" pitchFamily="34" charset="-122"/>
+                <a:cs typeface="Calibri" pitchFamily="34" charset="-120"/>
+              </a:rPr>
+              <a:t>GUI screens for staff and customers</a:t>
+            </a:r>
+            <a:endParaRPr lang="en-US" sz="1200" dirty="0"/>
+          </a:p>
+        </p:txBody>
+      </p:sp>
+    </p:spTree>
+  </p:cSld>
+  <p:clrMapOvr>
+    <a:masterClrMapping/>
+  </p:clrMapOvr>
+</p:sld>
+</file>
+
+<file path=ppt/slides/slide9.xml><?xml version="1.0" encoding="utf-8"?>
+<p:sld xmlns:a="http://schemas.openxmlformats.org/drawingml/2006/main" xmlns:r="http://schemas.openxmlformats.org/officeDocument/2006/relationships" xmlns:p="http://schemas.openxmlformats.org/presentationml/2006/main">
+  <p:cSld name="Slide 9">
+    <p:bg>
+      <p:bgPr>
+        <a:solidFill>
+          <a:srgbClr val="FFFFFF"/>
+        </a:solidFill>
+      </p:bgPr>
+    </p:bg>
+    <p:spTree>
+      <p:nvGrpSpPr>
+        <p:cNvPr id="1" name=""/>
+        <p:cNvGrpSpPr/>
+        <p:nvPr/>
+      </p:nvGrpSpPr>
+      <p:grpSpPr>
+        <a:xfrm>
+          <a:off x="0" y="0"/>
+          <a:ext cx="0" cy="0"/>
+          <a:chOff x="0" y="0"/>
+          <a:chExt cx="0" cy="0"/>
+        </a:xfrm>
+      </p:grpSpPr>
+      <p:sp>
+        <p:nvSpPr>
+          <p:cNvPr id="2" name="Text 0"/>
+          <p:cNvSpPr txBox="1"/>
+          <p:nvPr/>
+        </p:nvSpPr>
+        <p:spPr>
+          <a:xfrm>
+            <a:off x="457200" y="347472"/>
+            <a:ext cx="8229600" cy="502920"/>
+          </a:xfrm>
+          <a:prstGeom prst="rect">
+            <a:avLst/>
+          </a:prstGeom>
+          <a:noFill/>
+          <a:ln/>
+        </p:spPr>
+        <p:txBody>
+          <a:bodyPr wrap="square" lIns="0" tIns="0" rIns="0" bIns="0" rtlCol="0" anchor="ctr"/>
+          <a:lstStyle/>
+          <a:p>
+            <a:pPr indent="0" marL="0">
+              <a:buNone/>
+            </a:pPr>
+            <a:r>
+              <a:rPr lang="en-US" sz="2600" b="1" dirty="0">
+                <a:solidFill>
+                  <a:srgbClr val="0B4F4A"/>
+                </a:solidFill>
+                <a:latin typeface="Cambria" pitchFamily="34" charset="0"/>
+                <a:ea typeface="Cambria" pitchFamily="34" charset="-122"/>
+                <a:cs typeface="Cambria" pitchFamily="34" charset="-120"/>
+              </a:rPr>
               <a:t>Next steps to the final submission</a:t>
             </a:r>
             <a:endParaRPr lang="en-US" sz="2600" dirty="0"/>
@@ -6712,7 +8147,7 @@
                 <a:ea typeface="Calibri" pitchFamily="34" charset="-122"/>
                 <a:cs typeface="Calibri" pitchFamily="34" charset="-120"/>
               </a:rPr>
-              <a:t>Refine the model with feedback from this checkpoint</a:t>
+              <a:t>Finish the implementation and GUI screens</a:t>
             </a:r>
             <a:endParaRPr lang="en-US" sz="1400" dirty="0"/>
           </a:p>
@@ -6844,7 +8279,7 @@
                 <a:ea typeface="Calibri" pitchFamily="34" charset="-122"/>
                 <a:cs typeface="Calibri" pitchFamily="34" charset="-120"/>
               </a:rPr>
-              <a:t>Save and load the bank's records with files / JSON (course weeks 6 and 11)</a:t>
+              <a:t>Test every critical case from the brief with automated tests</a:t>
             </a:r>
             <a:endParaRPr lang="en-US" sz="1400" dirty="0"/>
           </a:p>
@@ -6976,7 +8411,7 @@
                 <a:ea typeface="Calibri" pitchFamily="34" charset="-122"/>
                 <a:cs typeface="Calibri" pitchFamily="34" charset="-120"/>
               </a:rPr>
-              <a:t>Review the design against SOLID and the design patterns taught (weeks 10-11)</a:t>
+              <a:t>Save and load records with files / JSON; review against SOLID (weeks 6, 11)</a:t>
             </a:r>
             <a:endParaRPr lang="en-US" sz="1400" dirty="0"/>
           </a:p>
@@ -7147,7 +8582,7 @@
                 <a:ea typeface="Cambria" pitchFamily="34" charset="-122"/>
                 <a:cs typeface="Cambria" pitchFamily="34" charset="-120"/>
               </a:rPr>
-              <a:t>Thank you — questions welcome</a:t>
+              <a:t>Shukriya — questions welcome</a:t>
             </a:r>
             <a:endParaRPr lang="en-US" sz="1600" dirty="0"/>
           </a:p>

--- a/docs/Progress_Presentation_1.pptx
+++ b/docs/Progress_Presentation_1.pptx
@@ -1126,7 +1126,7 @@
           <a:p>
             <a:r>
               <a:rPr lang="en-US" dirty="0"/>
-              <a:t>[3:55-4:35] Ab implementation ki progress. Core model Python mein ban raha hai: parties, accounts, transactions aur double-entry ledger ka kaam ho chuka hai, aur har rule ke saath test likh raha hoon. Is waqt main cards aur lending ke workflows aur brief ke exception scenarios par kaam kar raha hoon. Saath hi Tkinter mein GUI ka prototype ban raha hai, yeh us ki screen hai, jahan staff aur customer dono apne role ke hisaab se kaam kar sakenge.</a:t>
+              <a:t>[3:55-4:35] Ab implementation ki progress. Core model Python mein ban raha hai: parties, accounts, transactions aur double-entry ledger ka kaam ho chuka hai, aur har rule ke saath test likh raha hoon. Is waqt main cards aur lending ke workflows aur brief ke exception scenarios par kaam kar raha hoon. Saath hi Tkinter mein GUI ka prototype ban raha hai, yeh us ki screen hai, jahan staff aur customer dono apne role ke hisaab se kaam kar sakenge. Aur main ek AI assistant bhi jor raha hoon, jo Claude API se bank ke records parh kar sawalon ka jawab deta hai, magar khud koi record nahi badal sakta.</a:t>
             </a:r>
             <a:endParaRPr lang="en-US" dirty="0"/>
           </a:p>
@@ -7814,6 +7814,27 @@
             </a:r>
             <a:endParaRPr lang="en-US" sz="1200" dirty="0"/>
           </a:p>
+          <a:p>
+            <a:pPr marL="342900" indent="-342900">
+              <a:spcAft>
+                <a:spcPts val="600"/>
+              </a:spcAft>
+              <a:buSzPct val="100000"/>
+              <a:buChar char="•"/>
+            </a:pPr>
+            <a:r>
+              <a:rPr lang="en-US" sz="1200" dirty="0">
+                <a:solidFill>
+                  <a:srgbClr val="1D2B2A"/>
+                </a:solidFill>
+                <a:latin typeface="Calibri" pitchFamily="34" charset="0"/>
+                <a:ea typeface="Calibri" pitchFamily="34" charset="-122"/>
+                <a:cs typeface="Calibri" pitchFamily="34" charset="-120"/>
+              </a:rPr>
+              <a:t>AI assistant (Claude) that answers from the records</a:t>
+            </a:r>
+            <a:endParaRPr lang="en-US" sz="1200" dirty="0"/>
+          </a:p>
         </p:txBody>
       </p:sp>
     </p:spTree>

--- a/docs/Progress_Presentation_1.pptx
+++ b/docs/Progress_Presentation_1.pptx
@@ -598,7 +598,7 @@
           <a:p>
             <a:r>
               <a:rPr lang="en-US" dirty="0"/>
-              <a:t>[0:20-0:55] Main ne project ko chhe phases mein plan kiya. Pehle teen phases mukammal hain: domain research, assumptions aur requirements, aur class aur inheritance design. Chautha phase, yani Python implementation, is waqt jaari hai, aur us ke saath Tkinter GUI par bhi kaam chal raha hai. Aakhri phase final report aur viva hai. Neeche diye gaye numbers meri research aur design ke hain: aath sources, sattaees banking terms, chhattees documented assumptions, aur ikhattar classes ka design, jin mein chaar multi-level hierarchies hain.</a:t>
+              <a:t>[0:20-0:55] Main ne project ko chhe phases mein plan kiya. Pehle chaar phases mukammal hain: research aur assumptions, class aur inheritance design, tests ke saath Python implementation, aur GUI ke saath AI assistant. Is waqt paanchwan phase, yani refinement, jaari hai, aur aakhri phase final report aur viva hai. Neeche diye gaye numbers code se liye gaye hain: aath sources, ikhattar business classes, athanve operations, solah exception scenarios, aur tehattar automated tests jo sab pass hote hain. Brief kam az kam tees classes aur tees operations maangta hai.</a:t>
             </a:r>
             <a:endParaRPr lang="en-US" dirty="0"/>
           </a:p>
@@ -1126,7 +1126,7 @@
           <a:p>
             <a:r>
               <a:rPr lang="en-US" dirty="0"/>
-              <a:t>[3:55-4:35] Ab implementation ki progress. Core model Python mein ban raha hai: parties, accounts, transactions aur double-entry ledger ka kaam ho chuka hai, aur har rule ke saath test likh raha hoon. Is waqt main cards aur lending ke workflows aur brief ke exception scenarios par kaam kar raha hoon. Saath hi Tkinter mein GUI ka prototype ban raha hai, yeh us ki screen hai, jahan staff aur customer dono apne role ke hisaab se kaam kar sakenge. Aur main ek AI assistant bhi jor raha hoon, jo Claude API se bank ke records parh kar sawalon ka jawab deta hai, magar khud koi record nahi badal sakta.</a:t>
+              <a:t>[3:55-4:35] Ab implementation. Model Python mein ban chuka hai: chaaron hierarchies, double-entry ledger jo hamesha balance rehta hai, aur brief ke solah exception scenarios, jo tehattar automated tests se check hote hain. Tkinter mein GUI bhi ban chuka hai, yeh us ki screen hai, jahan staff aur customer dono apne role ke hisaab se kaam karte hain. Aur ek AI assistant bhi hai, jo Claude API se bank ke records parh kar sawalon ka jawab deta hai, magar khud koi record nahi badal sakta. Is waqt main refinement kar raha hoon: files aur JSON se records save karna, SOLID ke mutabiq review, aur final presentation ke liye zyada wazeh diagrams.</a:t>
             </a:r>
             <a:endParaRPr lang="en-US" dirty="0"/>
           </a:p>
@@ -1214,7 +1214,7 @@
           <a:p>
             <a:r>
               <a:rPr lang="en-US" dirty="0"/>
-              <a:t>[4:35-5:00] Agle steps: implementation aur GUI mukammal karna, brief ke har critical case ko automated tests se check karna, files aur JSON se data save karna, aur SOLID principles ke mutabiq design review karna. Aakhir mein final report aur viva. Shukriya, main sawalat ke liye hazir hoon.</a:t>
+              <a:t>[4:35-5:00] Agle steps: pehle files aur JSON se bank ke records save aur load karna, phir SOLID aur design patterns ke mutabiq design review, phir aaj ke feedback par amal. Aakhir mein final report aur viva. Shukriya, main sawalat ke liye hazir hoon.</a:t>
             </a:r>
             <a:endParaRPr lang="en-US" dirty="0"/>
           </a:p>
@@ -1864,7 +1864,7 @@
                 <a:ea typeface="Calibri" pitchFamily="34" charset="-122"/>
                 <a:cs typeface="Calibri" pitchFamily="34" charset="-120"/>
               </a:rPr>
-              <a:t>Six planned phases: research and design complete, implementation and GUI under way</a:t>
+              <a:t>Six planned phases: four complete, refinement under way, then the final submission</a:t>
             </a:r>
             <a:endParaRPr lang="en-US" sz="1200" dirty="0"/>
           </a:p>
@@ -2085,7 +2085,7 @@
                 <a:ea typeface="Calibri" pitchFamily="34" charset="-122"/>
                 <a:cs typeface="Calibri" pitchFamily="34" charset="-120"/>
               </a:rPr>
-              <a:t>Domain research</a:t>
+              <a:t>Domain research &amp; assumptions</a:t>
             </a:r>
             <a:endParaRPr lang="en-US" sz="1100" dirty="0"/>
           </a:p>
@@ -2227,7 +2227,7 @@
                 <a:ea typeface="Calibri" pitchFamily="34" charset="-122"/>
                 <a:cs typeface="Calibri" pitchFamily="34" charset="-120"/>
               </a:rPr>
-              <a:t>Assumptions &amp; requirements</a:t>
+              <a:t>Class &amp; inheritance design</a:t>
             </a:r>
             <a:endParaRPr lang="en-US" sz="1100" dirty="0"/>
           </a:p>
@@ -2369,7 +2369,7 @@
                 <a:ea typeface="Calibri" pitchFamily="34" charset="-122"/>
                 <a:cs typeface="Calibri" pitchFamily="34" charset="-120"/>
               </a:rPr>
-              <a:t>Class &amp; inheritance design</a:t>
+              <a:t>Implementation + tests</a:t>
             </a:r>
             <a:endParaRPr lang="en-US" sz="1100" dirty="0"/>
           </a:p>
@@ -2423,6 +2423,148 @@
         <p:spPr>
           <a:xfrm>
             <a:off x="5129784" y="1554480"/>
+            <a:ext cx="365760" cy="365760"/>
+          </a:xfrm>
+          <a:prstGeom prst="ellipse">
+            <a:avLst/>
+          </a:prstGeom>
+          <a:solidFill>
+            <a:srgbClr val="2E7D4F"/>
+          </a:solidFill>
+          <a:ln w="25400">
+            <a:solidFill>
+              <a:srgbClr val="FFFFFF"/>
+            </a:solidFill>
+            <a:prstDash val="solid"/>
+          </a:ln>
+        </p:spPr>
+      </p:sp>
+      <p:sp>
+        <p:nvSpPr>
+          <p:cNvPr id="19" name="Text 17"/>
+          <p:cNvSpPr txBox="1"/>
+          <p:nvPr/>
+        </p:nvSpPr>
+        <p:spPr>
+          <a:xfrm>
+            <a:off x="5129784" y="1554480"/>
+            <a:ext cx="365760" cy="365760"/>
+          </a:xfrm>
+          <a:prstGeom prst="rect">
+            <a:avLst/>
+          </a:prstGeom>
+          <a:noFill/>
+          <a:ln/>
+        </p:spPr>
+        <p:txBody>
+          <a:bodyPr wrap="square" lIns="0" tIns="0" rIns="0" bIns="0" rtlCol="0" anchor="ctr"/>
+          <a:lstStyle/>
+          <a:p>
+            <a:pPr algn="ctr" indent="0" marL="0">
+              <a:buNone/>
+            </a:pPr>
+            <a:r>
+              <a:rPr lang="en-US" sz="1300" b="1" dirty="0">
+                <a:solidFill>
+                  <a:srgbClr val="FFFFFF"/>
+                </a:solidFill>
+                <a:latin typeface="Cambria" pitchFamily="34" charset="0"/>
+                <a:ea typeface="Cambria" pitchFamily="34" charset="-122"/>
+                <a:cs typeface="Cambria" pitchFamily="34" charset="-120"/>
+              </a:rPr>
+              <a:t>4</a:t>
+            </a:r>
+            <a:endParaRPr lang="en-US" sz="1300" dirty="0"/>
+          </a:p>
+        </p:txBody>
+      </p:sp>
+      <p:sp>
+        <p:nvSpPr>
+          <p:cNvPr id="20" name="Text 18"/>
+          <p:cNvSpPr txBox="1"/>
+          <p:nvPr/>
+        </p:nvSpPr>
+        <p:spPr>
+          <a:xfrm>
+            <a:off x="4626864" y="2011680"/>
+            <a:ext cx="1371600" cy="502920"/>
+          </a:xfrm>
+          <a:prstGeom prst="rect">
+            <a:avLst/>
+          </a:prstGeom>
+          <a:noFill/>
+          <a:ln/>
+        </p:spPr>
+        <p:txBody>
+          <a:bodyPr wrap="square" lIns="0" tIns="0" rIns="0" bIns="0" rtlCol="0" anchor="t"/>
+          <a:lstStyle/>
+          <a:p>
+            <a:pPr algn="ctr" indent="0" marL="0">
+              <a:buNone/>
+            </a:pPr>
+            <a:r>
+              <a:rPr lang="en-US" sz="1100" b="1" dirty="0">
+                <a:solidFill>
+                  <a:srgbClr val="1D2B2A"/>
+                </a:solidFill>
+                <a:latin typeface="Calibri" pitchFamily="34" charset="0"/>
+                <a:ea typeface="Calibri" pitchFamily="34" charset="-122"/>
+                <a:cs typeface="Calibri" pitchFamily="34" charset="-120"/>
+              </a:rPr>
+              <a:t>GUI + AI assistant</a:t>
+            </a:r>
+            <a:endParaRPr lang="en-US" sz="1100" dirty="0"/>
+          </a:p>
+        </p:txBody>
+      </p:sp>
+      <p:sp>
+        <p:nvSpPr>
+          <p:cNvPr id="21" name="Text 19"/>
+          <p:cNvSpPr txBox="1"/>
+          <p:nvPr/>
+        </p:nvSpPr>
+        <p:spPr>
+          <a:xfrm>
+            <a:off x="4626864" y="2514600"/>
+            <a:ext cx="1371600" cy="228600"/>
+          </a:xfrm>
+          <a:prstGeom prst="rect">
+            <a:avLst/>
+          </a:prstGeom>
+          <a:noFill/>
+          <a:ln/>
+        </p:spPr>
+        <p:txBody>
+          <a:bodyPr wrap="square" lIns="0" tIns="0" rIns="0" bIns="0" rtlCol="0" anchor="ctr"/>
+          <a:lstStyle/>
+          <a:p>
+            <a:pPr algn="ctr" indent="0" marL="0">
+              <a:buNone/>
+            </a:pPr>
+            <a:r>
+              <a:rPr lang="en-US" sz="1050" dirty="0">
+                <a:solidFill>
+                  <a:srgbClr val="2E7D4F"/>
+                </a:solidFill>
+                <a:latin typeface="Calibri" pitchFamily="34" charset="0"/>
+                <a:ea typeface="Calibri" pitchFamily="34" charset="-122"/>
+                <a:cs typeface="Calibri" pitchFamily="34" charset="-120"/>
+              </a:rPr>
+              <a:t>Done</a:t>
+            </a:r>
+            <a:endParaRPr lang="en-US" sz="1050" dirty="0"/>
+          </a:p>
+        </p:txBody>
+      </p:sp>
+      <p:sp>
+        <p:nvSpPr>
+          <p:cNvPr id="22" name="Shape 20"/>
+          <p:cNvSpPr/>
+          <p:nvPr/>
+        </p:nvSpPr>
+        <p:spPr>
+          <a:xfrm>
+            <a:off x="6611112" y="1554480"/>
             <a:ext cx="365760" cy="365760"/>
           </a:xfrm>
           <a:prstGeom prst="ellipse">
@@ -2441,13 +2583,13 @@
       </p:sp>
       <p:sp>
         <p:nvSpPr>
-          <p:cNvPr id="19" name="Text 17"/>
-          <p:cNvSpPr txBox="1"/>
-          <p:nvPr/>
-        </p:nvSpPr>
-        <p:spPr>
-          <a:xfrm>
-            <a:off x="5129784" y="1554480"/>
+          <p:cNvPr id="23" name="Text 21"/>
+          <p:cNvSpPr txBox="1"/>
+          <p:nvPr/>
+        </p:nvSpPr>
+        <p:spPr>
+          <a:xfrm>
+            <a:off x="6611112" y="1554480"/>
             <a:ext cx="365760" cy="365760"/>
           </a:xfrm>
           <a:prstGeom prst="rect">
@@ -2472,148 +2614,6 @@
                 <a:ea typeface="Cambria" pitchFamily="34" charset="-122"/>
                 <a:cs typeface="Cambria" pitchFamily="34" charset="-120"/>
               </a:rPr>
-              <a:t>4</a:t>
-            </a:r>
-            <a:endParaRPr lang="en-US" sz="1300" dirty="0"/>
-          </a:p>
-        </p:txBody>
-      </p:sp>
-      <p:sp>
-        <p:nvSpPr>
-          <p:cNvPr id="20" name="Text 18"/>
-          <p:cNvSpPr txBox="1"/>
-          <p:nvPr/>
-        </p:nvSpPr>
-        <p:spPr>
-          <a:xfrm>
-            <a:off x="4626864" y="2011680"/>
-            <a:ext cx="1371600" cy="502920"/>
-          </a:xfrm>
-          <a:prstGeom prst="rect">
-            <a:avLst/>
-          </a:prstGeom>
-          <a:noFill/>
-          <a:ln/>
-        </p:spPr>
-        <p:txBody>
-          <a:bodyPr wrap="square" lIns="0" tIns="0" rIns="0" bIns="0" rtlCol="0" anchor="t"/>
-          <a:lstStyle/>
-          <a:p>
-            <a:pPr algn="ctr" indent="0" marL="0">
-              <a:buNone/>
-            </a:pPr>
-            <a:r>
-              <a:rPr lang="en-US" sz="1100" b="1" dirty="0">
-                <a:solidFill>
-                  <a:srgbClr val="1D2B2A"/>
-                </a:solidFill>
-                <a:latin typeface="Calibri" pitchFamily="34" charset="0"/>
-                <a:ea typeface="Calibri" pitchFamily="34" charset="-122"/>
-                <a:cs typeface="Calibri" pitchFamily="34" charset="-120"/>
-              </a:rPr>
-              <a:t>Implementation (Python)</a:t>
-            </a:r>
-            <a:endParaRPr lang="en-US" sz="1100" dirty="0"/>
-          </a:p>
-        </p:txBody>
-      </p:sp>
-      <p:sp>
-        <p:nvSpPr>
-          <p:cNvPr id="21" name="Text 19"/>
-          <p:cNvSpPr txBox="1"/>
-          <p:nvPr/>
-        </p:nvSpPr>
-        <p:spPr>
-          <a:xfrm>
-            <a:off x="4626864" y="2514600"/>
-            <a:ext cx="1371600" cy="228600"/>
-          </a:xfrm>
-          <a:prstGeom prst="rect">
-            <a:avLst/>
-          </a:prstGeom>
-          <a:noFill/>
-          <a:ln/>
-        </p:spPr>
-        <p:txBody>
-          <a:bodyPr wrap="square" lIns="0" tIns="0" rIns="0" bIns="0" rtlCol="0" anchor="ctr"/>
-          <a:lstStyle/>
-          <a:p>
-            <a:pPr algn="ctr" indent="0" marL="0">
-              <a:buNone/>
-            </a:pPr>
-            <a:r>
-              <a:rPr lang="en-US" sz="1050" dirty="0">
-                <a:solidFill>
-                  <a:srgbClr val="C98A12"/>
-                </a:solidFill>
-                <a:latin typeface="Calibri" pitchFamily="34" charset="0"/>
-                <a:ea typeface="Calibri" pitchFamily="34" charset="-122"/>
-                <a:cs typeface="Calibri" pitchFamily="34" charset="-120"/>
-              </a:rPr>
-              <a:t>In progress</a:t>
-            </a:r>
-            <a:endParaRPr lang="en-US" sz="1050" dirty="0"/>
-          </a:p>
-        </p:txBody>
-      </p:sp>
-      <p:sp>
-        <p:nvSpPr>
-          <p:cNvPr id="22" name="Shape 20"/>
-          <p:cNvSpPr/>
-          <p:nvPr/>
-        </p:nvSpPr>
-        <p:spPr>
-          <a:xfrm>
-            <a:off x="6611112" y="1554480"/>
-            <a:ext cx="365760" cy="365760"/>
-          </a:xfrm>
-          <a:prstGeom prst="ellipse">
-            <a:avLst/>
-          </a:prstGeom>
-          <a:solidFill>
-            <a:srgbClr val="C98A12"/>
-          </a:solidFill>
-          <a:ln w="25400">
-            <a:solidFill>
-              <a:srgbClr val="FFFFFF"/>
-            </a:solidFill>
-            <a:prstDash val="solid"/>
-          </a:ln>
-        </p:spPr>
-      </p:sp>
-      <p:sp>
-        <p:nvSpPr>
-          <p:cNvPr id="23" name="Text 21"/>
-          <p:cNvSpPr txBox="1"/>
-          <p:nvPr/>
-        </p:nvSpPr>
-        <p:spPr>
-          <a:xfrm>
-            <a:off x="6611112" y="1554480"/>
-            <a:ext cx="365760" cy="365760"/>
-          </a:xfrm>
-          <a:prstGeom prst="rect">
-            <a:avLst/>
-          </a:prstGeom>
-          <a:noFill/>
-          <a:ln/>
-        </p:spPr>
-        <p:txBody>
-          <a:bodyPr wrap="square" lIns="0" tIns="0" rIns="0" bIns="0" rtlCol="0" anchor="ctr"/>
-          <a:lstStyle/>
-          <a:p>
-            <a:pPr algn="ctr" indent="0" marL="0">
-              <a:buNone/>
-            </a:pPr>
-            <a:r>
-              <a:rPr lang="en-US" sz="1300" b="1" dirty="0">
-                <a:solidFill>
-                  <a:srgbClr val="FFFFFF"/>
-                </a:solidFill>
-                <a:latin typeface="Cambria" pitchFamily="34" charset="0"/>
-                <a:ea typeface="Cambria" pitchFamily="34" charset="-122"/>
-                <a:cs typeface="Cambria" pitchFamily="34" charset="-120"/>
-              </a:rPr>
               <a:t>5</a:t>
             </a:r>
             <a:endParaRPr lang="en-US" sz="1300" dirty="0"/>
@@ -2653,7 +2653,7 @@
                 <a:ea typeface="Calibri" pitchFamily="34" charset="-122"/>
                 <a:cs typeface="Calibri" pitchFamily="34" charset="-120"/>
               </a:rPr>
-              <a:t>GUI (Tkinter)</a:t>
+              <a:t>Refinement: JSON, SOLID</a:t>
             </a:r>
             <a:endParaRPr lang="en-US" sz="1100" dirty="0"/>
           </a:p>
@@ -3005,7 +3005,7 @@
                 <a:ea typeface="Cambria" pitchFamily="34" charset="-122"/>
                 <a:cs typeface="Cambria" pitchFamily="34" charset="-120"/>
               </a:rPr>
-              <a:t>27</a:t>
+              <a:t>71</a:t>
             </a:r>
             <a:endParaRPr lang="en-US" sz="3400" dirty="0"/>
           </a:p>
@@ -3044,7 +3044,7 @@
                 <a:ea typeface="Calibri" pitchFamily="34" charset="-122"/>
                 <a:cs typeface="Calibri" pitchFamily="34" charset="-120"/>
               </a:rPr>
-              <a:t>banking terms defined</a:t>
+              <a:t>business classes</a:t>
             </a:r>
             <a:endParaRPr lang="en-US" sz="1150" dirty="0"/>
           </a:p>
@@ -3110,7 +3110,7 @@
                 <a:ea typeface="Cambria" pitchFamily="34" charset="-122"/>
                 <a:cs typeface="Cambria" pitchFamily="34" charset="-120"/>
               </a:rPr>
-              <a:t>36</a:t>
+              <a:t>98</a:t>
             </a:r>
             <a:endParaRPr lang="en-US" sz="3400" dirty="0"/>
           </a:p>
@@ -3149,7 +3149,7 @@
                 <a:ea typeface="Calibri" pitchFamily="34" charset="-122"/>
                 <a:cs typeface="Calibri" pitchFamily="34" charset="-120"/>
               </a:rPr>
-              <a:t>documented assumptions</a:t>
+              <a:t>operations</a:t>
             </a:r>
             <a:endParaRPr lang="en-US" sz="1150" dirty="0"/>
           </a:p>
@@ -3215,7 +3215,7 @@
                 <a:ea typeface="Cambria" pitchFamily="34" charset="-122"/>
                 <a:cs typeface="Cambria" pitchFamily="34" charset="-120"/>
               </a:rPr>
-              <a:t>71</a:t>
+              <a:t>16</a:t>
             </a:r>
             <a:endParaRPr lang="en-US" sz="3400" dirty="0"/>
           </a:p>
@@ -3254,7 +3254,7 @@
                 <a:ea typeface="Calibri" pitchFamily="34" charset="-122"/>
                 <a:cs typeface="Calibri" pitchFamily="34" charset="-120"/>
               </a:rPr>
-              <a:t>classes designed</a:t>
+              <a:t>exception scenarios</a:t>
             </a:r>
             <a:endParaRPr lang="en-US" sz="1150" dirty="0"/>
           </a:p>
@@ -3320,7 +3320,7 @@
                 <a:ea typeface="Cambria" pitchFamily="34" charset="-122"/>
                 <a:cs typeface="Cambria" pitchFamily="34" charset="-120"/>
               </a:rPr>
-              <a:t>4</a:t>
+              <a:t>73</a:t>
             </a:r>
             <a:endParaRPr lang="en-US" sz="3400" dirty="0"/>
           </a:p>
@@ -3359,7 +3359,7 @@
                 <a:ea typeface="Calibri" pitchFamily="34" charset="-122"/>
                 <a:cs typeface="Calibri" pitchFamily="34" charset="-120"/>
               </a:rPr>
-              <a:t>multi-level hierarchies</a:t>
+              <a:t>automated tests</a:t>
             </a:r>
             <a:endParaRPr lang="en-US" sz="1150" dirty="0"/>
           </a:p>
@@ -3398,7 +3398,7 @@
                 <a:ea typeface="Calibri" pitchFamily="34" charset="-122"/>
                 <a:cs typeface="Calibri" pitchFamily="34" charset="-120"/>
               </a:rPr>
-              <a:t>The brief asks for at least 30 meaningful classes and one multi-level hierarchy</a:t>
+              <a:t>The brief asks for at least 30 meaningful classes, 30 operations and one multi-level hierarchy</a:t>
             </a:r>
             <a:endParaRPr lang="en-US" sz="1100" dirty="0"/>
           </a:p>
@@ -7303,7 +7303,7 @@
               <a:buNone/>
             </a:pPr>
             <a:r>
-              <a:rPr lang="en-US" sz="2600" b="1" dirty="0">
+              <a:rPr lang="en-US" sz="2300" b="1" dirty="0">
                 <a:solidFill>
                   <a:srgbClr val="0B4F4A"/>
                 </a:solidFill>
@@ -7311,9 +7311,9 @@
                 <a:ea typeface="Cambria" pitchFamily="34" charset="-122"/>
                 <a:cs typeface="Cambria" pitchFamily="34" charset="-120"/>
               </a:rPr>
-              <a:t>Implementation and GUI: in progress</a:t>
-            </a:r>
-            <a:endParaRPr lang="en-US" sz="2600" dirty="0"/>
+              <a:t>Implementation and GUI: built and tested</a:t>
+            </a:r>
+            <a:endParaRPr lang="en-US" sz="2300" dirty="0"/>
           </a:p>
         </p:txBody>
       </p:sp>
@@ -7589,7 +7589,7 @@
         <p:spPr>
           <a:xfrm>
             <a:off x="5212080" y="1618488"/>
-            <a:ext cx="3566160" cy="1234440"/>
+            <a:ext cx="3566160" cy="1536192"/>
           </a:xfrm>
           <a:prstGeom prst="rect">
             <a:avLst/>
@@ -7617,7 +7617,7 @@
                 <a:ea typeface="Calibri" pitchFamily="34" charset="-122"/>
                 <a:cs typeface="Calibri" pitchFamily="34" charset="-120"/>
               </a:rPr>
-              <a:t>Party, Arrangement and Transaction hierarchies</a:t>
+              <a:t>Four hierarchies; double-entry ledger that always balances</a:t>
             </a:r>
             <a:endParaRPr lang="en-US" sz="1200" dirty="0"/>
           </a:p>
@@ -7638,7 +7638,7 @@
                 <a:ea typeface="Calibri" pitchFamily="34" charset="-122"/>
                 <a:cs typeface="Calibri" pitchFamily="34" charset="-120"/>
               </a:rPr>
-              <a:t>Double-entry ledger: balances derived, never stored</a:t>
+              <a:t>16 exception scenarios, 73 automated tests</a:t>
             </a:r>
             <a:endParaRPr lang="en-US" sz="1200" dirty="0"/>
           </a:p>
@@ -7659,7 +7659,28 @@
                 <a:ea typeface="Calibri" pitchFamily="34" charset="-122"/>
                 <a:cs typeface="Calibri" pitchFamily="34" charset="-120"/>
               </a:rPr>
-              <a:t>KYC checks and dated mandates</a:t>
+              <a:t>GUI for staff and for customers</a:t>
+            </a:r>
+            <a:endParaRPr lang="en-US" sz="1200" dirty="0"/>
+          </a:p>
+          <a:p>
+            <a:pPr marL="342900" indent="-342900">
+              <a:spcAft>
+                <a:spcPts val="600"/>
+              </a:spcAft>
+              <a:buSzPct val="100000"/>
+              <a:buChar char="•"/>
+            </a:pPr>
+            <a:r>
+              <a:rPr lang="en-US" sz="1200" dirty="0">
+                <a:solidFill>
+                  <a:srgbClr val="1D2B2A"/>
+                </a:solidFill>
+                <a:latin typeface="Calibri" pitchFamily="34" charset="0"/>
+                <a:ea typeface="Calibri" pitchFamily="34" charset="-122"/>
+                <a:cs typeface="Calibri" pitchFamily="34" charset="-120"/>
+              </a:rPr>
+              <a:t>AI assistant (Claude) that answers from the records</a:t>
             </a:r>
             <a:endParaRPr lang="en-US" sz="1200" dirty="0"/>
           </a:p>
@@ -7673,7 +7694,7 @@
         </p:nvSpPr>
         <p:spPr>
           <a:xfrm>
-            <a:off x="5212080" y="2926080"/>
+            <a:off x="5212080" y="3383280"/>
             <a:ext cx="1188720" cy="310896"/>
           </a:xfrm>
           <a:prstGeom prst="roundRect">
@@ -7700,7 +7721,7 @@
         </p:nvSpPr>
         <p:spPr>
           <a:xfrm>
-            <a:off x="5212080" y="2926080"/>
+            <a:off x="5212080" y="3383280"/>
             <a:ext cx="1188720" cy="310896"/>
           </a:xfrm>
           <a:prstGeom prst="rect">
@@ -7725,7 +7746,7 @@
                 <a:ea typeface="Calibri" pitchFamily="34" charset="-122"/>
                 <a:cs typeface="Calibri" pitchFamily="34" charset="-120"/>
               </a:rPr>
-              <a:t>In progress</a:t>
+              <a:t>Now refining</a:t>
             </a:r>
             <a:endParaRPr lang="en-US" sz="1150" dirty="0"/>
           </a:p>
@@ -7739,8 +7760,8 @@
         </p:nvSpPr>
         <p:spPr>
           <a:xfrm>
-            <a:off x="5212080" y="3310128"/>
-            <a:ext cx="3566160" cy="1234440"/>
+            <a:off x="5212080" y="3767328"/>
+            <a:ext cx="3566160" cy="1152144"/>
           </a:xfrm>
           <a:prstGeom prst="rect">
             <a:avLst/>
@@ -7768,7 +7789,7 @@
                 <a:ea typeface="Calibri" pitchFamily="34" charset="-122"/>
                 <a:cs typeface="Calibri" pitchFamily="34" charset="-120"/>
               </a:rPr>
-              <a:t>Card and lending workflows</a:t>
+              <a:t>Saving and loading records (files / JSON)</a:t>
             </a:r>
             <a:endParaRPr lang="en-US" sz="1200" dirty="0"/>
           </a:p>
@@ -7789,7 +7810,7 @@
                 <a:ea typeface="Calibri" pitchFamily="34" charset="-122"/>
                 <a:cs typeface="Calibri" pitchFamily="34" charset="-120"/>
               </a:rPr>
-              <a:t>Exception scenarios from the brief</a:t>
+              <a:t>Design review against SOLID</a:t>
             </a:r>
             <a:endParaRPr lang="en-US" sz="1200" dirty="0"/>
           </a:p>
@@ -7810,28 +7831,7 @@
                 <a:ea typeface="Calibri" pitchFamily="34" charset="-122"/>
                 <a:cs typeface="Calibri" pitchFamily="34" charset="-120"/>
               </a:rPr>
-              <a:t>GUI screens for staff and customers</a:t>
-            </a:r>
-            <a:endParaRPr lang="en-US" sz="1200" dirty="0"/>
-          </a:p>
-          <a:p>
-            <a:pPr marL="342900" indent="-342900">
-              <a:spcAft>
-                <a:spcPts val="600"/>
-              </a:spcAft>
-              <a:buSzPct val="100000"/>
-              <a:buChar char="•"/>
-            </a:pPr>
-            <a:r>
-              <a:rPr lang="en-US" sz="1200" dirty="0">
-                <a:solidFill>
-                  <a:srgbClr val="1D2B2A"/>
-                </a:solidFill>
-                <a:latin typeface="Calibri" pitchFamily="34" charset="0"/>
-                <a:ea typeface="Calibri" pitchFamily="34" charset="-122"/>
-                <a:cs typeface="Calibri" pitchFamily="34" charset="-120"/>
-              </a:rPr>
-              <a:t>AI assistant (Claude) that answers from the records</a:t>
+              <a:t>Clearer diagrams for the final presentation</a:t>
             </a:r>
             <a:endParaRPr lang="en-US" sz="1200" dirty="0"/>
           </a:p>
@@ -8168,7 +8168,7 @@
                 <a:ea typeface="Calibri" pitchFamily="34" charset="-122"/>
                 <a:cs typeface="Calibri" pitchFamily="34" charset="-120"/>
               </a:rPr>
-              <a:t>Finish the implementation and GUI screens</a:t>
+              <a:t>Save and load the bank's records with files / JSON (weeks 6, 11)</a:t>
             </a:r>
             <a:endParaRPr lang="en-US" sz="1400" dirty="0"/>
           </a:p>
@@ -8300,7 +8300,7 @@
                 <a:ea typeface="Calibri" pitchFamily="34" charset="-122"/>
                 <a:cs typeface="Calibri" pitchFamily="34" charset="-120"/>
               </a:rPr>
-              <a:t>Test every critical case from the brief with automated tests</a:t>
+              <a:t>Review the design against SOLID and the design patterns (weeks 10, 11)</a:t>
             </a:r>
             <a:endParaRPr lang="en-US" sz="1400" dirty="0"/>
           </a:p>
@@ -8432,7 +8432,7 @@
                 <a:ea typeface="Calibri" pitchFamily="34" charset="-122"/>
                 <a:cs typeface="Calibri" pitchFamily="34" charset="-120"/>
               </a:rPr>
-              <a:t>Save and load records with files / JSON; review against SOLID (weeks 6, 11)</a:t>
+              <a:t>Apply the feedback from this checkpoint</a:t>
             </a:r>
             <a:endParaRPr lang="en-US" sz="1400" dirty="0"/>
           </a:p>

--- a/docs/Progress_Presentation_1.pptx
+++ b/docs/Progress_Presentation_1.pptx
@@ -5878,7 +5878,7 @@
       </p:sp>
       <p:pic>
         <p:nvPicPr>
-          <p:cNvPr id="5" name="Image 0" descr="/home/user/commercial-banking/docs/class_diagram.png">    </p:cNvPr>
+          <p:cNvPr id="5" name="Image 0" descr="/home/user/commercial-banking/docs/slide_overview.png">    </p:cNvPr>
           <p:cNvPicPr>
             <a:picLocks noChangeAspect="1"/>
           </p:cNvPicPr>
@@ -5892,8 +5892,8 @@
         </p:blipFill>
         <p:spPr>
           <a:xfrm>
-            <a:off x="380426" y="1188720"/>
-            <a:ext cx="8383148" cy="3429000"/>
+            <a:off x="1524000" y="1188720"/>
+            <a:ext cx="6096000" cy="3429000"/>
           </a:xfrm>
           <a:prstGeom prst="rect">
             <a:avLst/>
@@ -5933,7 +5933,7 @@
                 <a:ea typeface="Calibri" pitchFamily="34" charset="-122"/>
                 <a:cs typeface="Calibri" pitchFamily="34" charset="-120"/>
               </a:rPr>
-              <a:t>Inheritance only for a true “is-a”; everything else is association</a:t>
+              <a:t>Inheritance only for a true “is-a”; everything else is association. Full UML in the design report</a:t>
             </a:r>
             <a:endParaRPr lang="en-US" sz="1050" dirty="0"/>
           </a:p>

--- a/docs/Progress_Presentation_1.pptx
+++ b/docs/Progress_Presentation_1.pptx
@@ -598,7 +598,7 @@
           <a:p>
             <a:r>
               <a:rPr lang="en-US" dirty="0"/>
-              <a:t>[0:20-0:55] Main ne project ko chhe phases mein plan kiya. Pehle chaar phases mukammal hain: research aur assumptions, class aur inheritance design, tests ke saath Python implementation, aur GUI ke saath AI assistant. Is waqt paanchwan phase, yani refinement, jaari hai, aur aakhri phase final report aur viva hai. Neeche diye gaye numbers code se liye gaye hain: aath sources, ikhattar business classes, athanve operations, solah exception scenarios, aur tehattar automated tests jo sab pass hote hain. Brief kam az kam tees classes aur tees operations maangta hai.</a:t>
+              <a:t>[0:20-0:55] Main ne project ko chhe phases mein plan kiya. Pehle chaar phases mukammal hain: research aur assumptions, class aur inheritance design, tests ke saath Python implementation, aur GUI ke saath AI assistant. Is waqt paanchwan phase, yani refinement, jaari hai, aur aakhri phase final report aur viva hai. Neeche diye gaye numbers code se liye gaye hain: aath sources, ikhattar business classes, athanve operations, solah exception scenarios, aur sattattar automated tests jo sab pass hote hain. Brief kam az kam tees classes aur tees operations maangta hai.</a:t>
             </a:r>
             <a:endParaRPr lang="en-US" dirty="0"/>
           </a:p>
@@ -1126,7 +1126,7 @@
           <a:p>
             <a:r>
               <a:rPr lang="en-US" dirty="0"/>
-              <a:t>[3:55-4:35] Ab implementation. Model Python mein ban chuka hai: chaaron hierarchies, double-entry ledger jo hamesha balance rehta hai, aur brief ke solah exception scenarios, jo tehattar automated tests se check hote hain. Tkinter mein GUI bhi ban chuka hai, yeh us ki screen hai, jahan staff aur customer dono apne role ke hisaab se kaam karte hain. Aur ek AI assistant bhi hai, jo Claude API se bank ke records parh kar sawalon ka jawab deta hai, magar khud koi record nahi badal sakta. Is waqt main refinement kar raha hoon: files aur JSON se records save karna, SOLID ke mutabiq review, aur final presentation ke liye zyada wazeh diagrams.</a:t>
+              <a:t>[3:55-4:35] Ab implementation. Model Python mein ban chuka hai: chaaron hierarchies, double-entry ledger jo hamesha balance rehta hai, aur brief ke solah exception scenarios, jo sattattar automated tests se check hote hain. Tkinter mein GUI bhi ban chuka hai, yeh us ki screen hai, jahan staff aur customer dono apne role ke hisaab se kaam karte hain. Aur ek AI assistant bhi hai, jo Claude API se bank ke records parh kar sawalon ka jawab deta hai, magar khud koi record nahi badal sakta. Poora bank ek JSON file mein save aur dobara load bhi ho jata hai. Is waqt main refinement kar raha hoon: SOLID aur design patterns ke mutabiq review, aur final presentation ki tayyari.</a:t>
             </a:r>
             <a:endParaRPr lang="en-US" dirty="0"/>
           </a:p>
@@ -1214,7 +1214,7 @@
           <a:p>
             <a:r>
               <a:rPr lang="en-US" dirty="0"/>
-              <a:t>[4:35-5:00] Agle steps: pehle files aur JSON se bank ke records save aur load karna, phir SOLID aur design patterns ke mutabiq design review, phir aaj ke feedback par amal. Aakhir mein final report aur viva. Shukriya, main sawalat ke liye hazir hoon.</a:t>
+              <a:t>[4:35-5:00] Agle steps: pehle SOLID aur design patterns ke mutabiq design review, phir aaj ke feedback par amal, phir final presentation aur live demo ki tayyari. Aakhir mein final report aur viva. Shukriya, main sawalat ke liye hazir hoon.</a:t>
             </a:r>
             <a:endParaRPr lang="en-US" dirty="0"/>
           </a:p>
@@ -2653,7 +2653,7 @@
                 <a:ea typeface="Calibri" pitchFamily="34" charset="-122"/>
                 <a:cs typeface="Calibri" pitchFamily="34" charset="-120"/>
               </a:rPr>
-              <a:t>Refinement: JSON, SOLID</a:t>
+              <a:t>Refinement: SOLID review</a:t>
             </a:r>
             <a:endParaRPr lang="en-US" sz="1100" dirty="0"/>
           </a:p>
@@ -3320,7 +3320,7 @@
                 <a:ea typeface="Cambria" pitchFamily="34" charset="-122"/>
                 <a:cs typeface="Cambria" pitchFamily="34" charset="-120"/>
               </a:rPr>
-              <a:t>73</a:t>
+              <a:t>77</a:t>
             </a:r>
             <a:endParaRPr lang="en-US" sz="3400" dirty="0"/>
           </a:p>
@@ -7638,7 +7638,7 @@
                 <a:ea typeface="Calibri" pitchFamily="34" charset="-122"/>
                 <a:cs typeface="Calibri" pitchFamily="34" charset="-120"/>
               </a:rPr>
-              <a:t>16 exception scenarios, 73 automated tests</a:t>
+              <a:t>16 exception scenarios, 77 automated tests</a:t>
             </a:r>
             <a:endParaRPr lang="en-US" sz="1200" dirty="0"/>
           </a:p>
@@ -7659,7 +7659,7 @@
                 <a:ea typeface="Calibri" pitchFamily="34" charset="-122"/>
                 <a:cs typeface="Calibri" pitchFamily="34" charset="-120"/>
               </a:rPr>
-              <a:t>GUI for staff and for customers</a:t>
+              <a:t>GUI for staff and customers; AI assistant</a:t>
             </a:r>
             <a:endParaRPr lang="en-US" sz="1200" dirty="0"/>
           </a:p>
@@ -7680,7 +7680,7 @@
                 <a:ea typeface="Calibri" pitchFamily="34" charset="-122"/>
                 <a:cs typeface="Calibri" pitchFamily="34" charset="-120"/>
               </a:rPr>
-              <a:t>AI assistant (Claude) that answers from the records</a:t>
+              <a:t>Save and load the whole bank (JSON file)</a:t>
             </a:r>
             <a:endParaRPr lang="en-US" sz="1200" dirty="0"/>
           </a:p>
@@ -7761,7 +7761,7 @@
         <p:spPr>
           <a:xfrm>
             <a:off x="5212080" y="3767328"/>
-            <a:ext cx="3566160" cy="1152144"/>
+            <a:ext cx="3566160" cy="768096"/>
           </a:xfrm>
           <a:prstGeom prst="rect">
             <a:avLst/>
@@ -7789,7 +7789,7 @@
                 <a:ea typeface="Calibri" pitchFamily="34" charset="-122"/>
                 <a:cs typeface="Calibri" pitchFamily="34" charset="-120"/>
               </a:rPr>
-              <a:t>Saving and loading records (files / JSON)</a:t>
+              <a:t>Design review against SOLID and design patterns</a:t>
             </a:r>
             <a:endParaRPr lang="en-US" sz="1200" dirty="0"/>
           </a:p>
@@ -7810,28 +7810,7 @@
                 <a:ea typeface="Calibri" pitchFamily="34" charset="-122"/>
                 <a:cs typeface="Calibri" pitchFamily="34" charset="-120"/>
               </a:rPr>
-              <a:t>Design review against SOLID</a:t>
-            </a:r>
-            <a:endParaRPr lang="en-US" sz="1200" dirty="0"/>
-          </a:p>
-          <a:p>
-            <a:pPr marL="342900" indent="-342900">
-              <a:spcAft>
-                <a:spcPts val="600"/>
-              </a:spcAft>
-              <a:buSzPct val="100000"/>
-              <a:buChar char="•"/>
-            </a:pPr>
-            <a:r>
-              <a:rPr lang="en-US" sz="1200" dirty="0">
-                <a:solidFill>
-                  <a:srgbClr val="1D2B2A"/>
-                </a:solidFill>
-                <a:latin typeface="Calibri" pitchFamily="34" charset="0"/>
-                <a:ea typeface="Calibri" pitchFamily="34" charset="-122"/>
-                <a:cs typeface="Calibri" pitchFamily="34" charset="-120"/>
-              </a:rPr>
-              <a:t>Clearer diagrams for the final presentation</a:t>
+              <a:t>The final 30-minute presentation</a:t>
             </a:r>
             <a:endParaRPr lang="en-US" sz="1200" dirty="0"/>
           </a:p>
@@ -8168,7 +8147,7 @@
                 <a:ea typeface="Calibri" pitchFamily="34" charset="-122"/>
                 <a:cs typeface="Calibri" pitchFamily="34" charset="-120"/>
               </a:rPr>
-              <a:t>Save and load the bank's records with files / JSON (weeks 6, 11)</a:t>
+              <a:t>Review the design against SOLID and the design patterns (weeks 10, 11)</a:t>
             </a:r>
             <a:endParaRPr lang="en-US" sz="1400" dirty="0"/>
           </a:p>
@@ -8300,7 +8279,7 @@
                 <a:ea typeface="Calibri" pitchFamily="34" charset="-122"/>
                 <a:cs typeface="Calibri" pitchFamily="34" charset="-120"/>
               </a:rPr>
-              <a:t>Review the design against SOLID and the design patterns (weeks 10, 11)</a:t>
+              <a:t>Apply the feedback from this checkpoint</a:t>
             </a:r>
             <a:endParaRPr lang="en-US" sz="1400" dirty="0"/>
           </a:p>
@@ -8432,7 +8411,7 @@
                 <a:ea typeface="Calibri" pitchFamily="34" charset="-122"/>
                 <a:cs typeface="Calibri" pitchFamily="34" charset="-120"/>
               </a:rPr>
-              <a:t>Apply the feedback from this checkpoint</a:t>
+              <a:t>Prepare the final 30-minute presentation and live demonstration</a:t>
             </a:r>
             <a:endParaRPr lang="en-US" sz="1400" dirty="0"/>
           </a:p>

--- a/docs/Progress_Presentation_1.pptx
+++ b/docs/Progress_Presentation_1.pptx
@@ -598,7 +598,7 @@
           <a:p>
             <a:r>
               <a:rPr lang="en-US" dirty="0"/>
-              <a:t>[0:20-0:55] Main ne project ko chhe phases mein plan kiya. Pehle chaar phases mukammal hain: research aur assumptions, class aur inheritance design, tests ke saath Python implementation, aur GUI ke saath AI assistant. Is waqt paanchwan phase, yani refinement, jaari hai, aur aakhri phase final report aur viva hai. Neeche diye gaye numbers code se liye gaye hain: aath sources, ikhattar business classes, athanve operations, solah exception scenarios, aur sattattar automated tests jo sab pass hote hain. Brief kam az kam tees classes aur tees operations maangta hai.</a:t>
+              <a:t>[0:20-0:55] Main ne project ko chhe phases mein plan kiya. Pehle chaar phases mukammal hain: research aur assumptions, class aur inheritance design, tests ke saath Python implementation, aur GUI ke saath AI assistant. Is waqt paanchwan phase, yani refinement, jaari hai, aur aakhri phase final report aur viva hai. Neeche diye gaye numbers code se liye gaye hain: aath sources, chauhattar business classes, athanve operations, solah exception scenarios, aur ikyasi automated tests jo sab pass hote hain. Brief kam az kam tees classes aur tees operations maangta hai.</a:t>
             </a:r>
             <a:endParaRPr lang="en-US" dirty="0"/>
           </a:p>
@@ -1126,7 +1126,7 @@
           <a:p>
             <a:r>
               <a:rPr lang="en-US" dirty="0"/>
-              <a:t>[3:55-4:35] Ab implementation. Model Python mein ban chuka hai: chaaron hierarchies, double-entry ledger jo hamesha balance rehta hai, aur brief ke solah exception scenarios, jo sattattar automated tests se check hote hain. Tkinter mein GUI bhi ban chuka hai, yeh us ki screen hai, jahan staff aur customer dono apne role ke hisaab se kaam karte hain. Aur ek AI assistant bhi hai, jo Claude API se bank ke records parh kar sawalon ka jawab deta hai, magar khud koi record nahi badal sakta. Poora bank ek JSON file mein save aur dobara load bhi ho jata hai. Is waqt main refinement kar raha hoon: SOLID aur design patterns ke mutabiq review, aur final presentation ki tayyari.</a:t>
+              <a:t>[3:55-4:35] Ab implementation. Model Python mein, kisi library ke baghair, ban chuka hai: chaaron hierarchies, double-entry ledger jo hamesha balance rehta hai, aur brief ke solah exception scenarios, jo ikyasi automated tests se check hote hain. Tkinter mein GUI bhi ban chuka hai, yeh us ki screen hai, jahan staff aur customer dono apne role ke hisaab se kaam karte hain. Aur ek AI assistant bhi hai, jo Claude API se bank ke records parh kar sawalon ka jawab deta hai, magar khud koi record nahi badal sakta. Poora bank ek JSON file mein save aur dobara load bhi ho jata hai. Is waqt main refinement kar raha hoon: SOLID aur design patterns ke mutabiq review, aur final presentation ki tayyari.</a:t>
             </a:r>
             <a:endParaRPr lang="en-US" dirty="0"/>
           </a:p>
@@ -3005,7 +3005,7 @@
                 <a:ea typeface="Cambria" pitchFamily="34" charset="-122"/>
                 <a:cs typeface="Cambria" pitchFamily="34" charset="-120"/>
               </a:rPr>
-              <a:t>71</a:t>
+              <a:t>74</a:t>
             </a:r>
             <a:endParaRPr lang="en-US" sz="3400" dirty="0"/>
           </a:p>
@@ -3320,7 +3320,7 @@
                 <a:ea typeface="Cambria" pitchFamily="34" charset="-122"/>
                 <a:cs typeface="Cambria" pitchFamily="34" charset="-120"/>
               </a:rPr>
-              <a:t>77</a:t>
+              <a:t>81</a:t>
             </a:r>
             <a:endParaRPr lang="en-US" sz="3400" dirty="0"/>
           </a:p>
@@ -7350,7 +7350,7 @@
                 <a:ea typeface="Calibri" pitchFamily="34" charset="-122"/>
                 <a:cs typeface="Calibri" pitchFamily="34" charset="-120"/>
               </a:rPr>
-              <a:t>Python, standard library only; GUI in Tkinter</a:t>
+              <a:t>Python with no libraries; GUI in Tkinter</a:t>
             </a:r>
             <a:endParaRPr lang="en-US" sz="1200" dirty="0"/>
           </a:p>
@@ -7638,7 +7638,7 @@
                 <a:ea typeface="Calibri" pitchFamily="34" charset="-122"/>
                 <a:cs typeface="Calibri" pitchFamily="34" charset="-120"/>
               </a:rPr>
-              <a:t>16 exception scenarios, 77 automated tests</a:t>
+              <a:t>16 exception scenarios, 81 automated tests</a:t>
             </a:r>
             <a:endParaRPr lang="en-US" sz="1200" dirty="0"/>
           </a:p>

--- a/docs/Progress_Presentation_1.pptx
+++ b/docs/Progress_Presentation_1.pptx
@@ -598,7 +598,7 @@
           <a:p>
             <a:r>
               <a:rPr lang="en-US" dirty="0"/>
-              <a:t>[0:20-0:55] Main ne project ko chhe phases mein plan kiya. Pehle chaar phases mukammal hain: research aur assumptions, class aur inheritance design, tests ke saath Python implementation, aur GUI ke saath AI assistant. Is waqt paanchwan phase, yani refinement, jaari hai, aur aakhri phase final report aur viva hai. Neeche diye gaye numbers code se liye gaye hain: aath sources, chauhattar business classes, athanve operations, solah exception scenarios, aur ikyasi automated tests jo sab pass hote hain. Brief kam az kam tees classes aur tees operations maangta hai.</a:t>
+              <a:t>[0:20-0:55] Main ne project ko chhe phases mein plan kiya. Pehle chaar phases mukammal hain: research aur assumptions, class aur inheritance design, tests ke saath Python implementation, aur GUI ke saath AI assistant. Is waqt paanchwan phase, yani refinement, jaari hai, aur aakhri phase final report aur viva hai. Neeche diye gaye numbers code se liye gaye hain: aath sources, chauhattar business classes, athanve operations, solah exception scenarios, aur chauraasi automated tests jo sab pass hote hain. Brief kam az kam tees classes aur tees operations maangta hai.</a:t>
             </a:r>
             <a:endParaRPr lang="en-US" dirty="0"/>
           </a:p>
@@ -1126,7 +1126,7 @@
           <a:p>
             <a:r>
               <a:rPr lang="en-US" dirty="0"/>
-              <a:t>[3:55-4:35] Ab implementation. Model Python mein, kisi library ke baghair, ban chuka hai: chaaron hierarchies, double-entry ledger jo hamesha balance rehta hai, aur brief ke solah exception scenarios, jo ikyasi automated tests se check hote hain. Tkinter mein GUI bhi ban chuka hai, yeh us ki screen hai, jahan staff aur customer dono apne role ke hisaab se kaam karte hain. Aur ek AI assistant bhi hai, jo Claude API se bank ke records parh kar sawalon ka jawab deta hai, magar khud koi record nahi badal sakta. Poora bank ek JSON file mein save aur dobara load bhi ho jata hai. Is waqt main refinement kar raha hoon: SOLID aur design patterns ke mutabiq review, aur final presentation ki tayyari.</a:t>
+              <a:t>[3:55-4:35] Ab implementation. Model Python mein, kisi library ke baghair, ban chuka hai: chaaron hierarchies, double-entry ledger jo hamesha balance rehta hai, aur brief ke solah exception scenarios, jo chauraasi automated tests se check hote hain. Tkinter mein GUI bhi ban chuka hai, yeh us ki screen hai, jahan staff aur customer dono apne role ke hisaab se kaam karte hain. Aur ek AI assistant bhi hai, jo Claude API se bank ke records parh kar sawalon ka jawab deta hai, magar khud koi record nahi badal sakta. Poora bank ek JSON file mein save aur dobara load bhi ho jata hai. Is waqt main refinement kar raha hoon: SOLID aur design patterns ke mutabiq review, aur final presentation ki tayyari.</a:t>
             </a:r>
             <a:endParaRPr lang="en-US" dirty="0"/>
           </a:p>
@@ -3320,7 +3320,7 @@
                 <a:ea typeface="Cambria" pitchFamily="34" charset="-122"/>
                 <a:cs typeface="Cambria" pitchFamily="34" charset="-120"/>
               </a:rPr>
-              <a:t>81</a:t>
+              <a:t>84</a:t>
             </a:r>
             <a:endParaRPr lang="en-US" sz="3400" dirty="0"/>
           </a:p>
@@ -6184,8 +6184,8 @@
         </p:blipFill>
         <p:spPr>
           <a:xfrm>
-            <a:off x="3200400" y="1353977"/>
-            <a:ext cx="2743200" cy="2504125"/>
+            <a:off x="3200400" y="1336725"/>
+            <a:ext cx="2743200" cy="2538631"/>
           </a:xfrm>
           <a:prstGeom prst="rect">
             <a:avLst/>
@@ -7638,7 +7638,7 @@
                 <a:ea typeface="Calibri" pitchFamily="34" charset="-122"/>
                 <a:cs typeface="Calibri" pitchFamily="34" charset="-120"/>
               </a:rPr>
-              <a:t>16 exception scenarios, 81 automated tests</a:t>
+              <a:t>16 exception scenarios, 84 automated tests</a:t>
             </a:r>
             <a:endParaRPr lang="en-US" sz="1200" dirty="0"/>
           </a:p>
